--- a/output/LINK. pilotvoorstel OK Creative Agency.pptx
+++ b/output/LINK. pilotvoorstel OK Creative Agency.pptx
@@ -2468,358 +2468,9 @@
           </a:p>
         </p:txBody>
       </p:sp>
-      <p:sp>
-        <p:nvSpPr>
-          <p:cNvPr id="25" name="Text 23"/>
-          <p:cNvSpPr txBox="1"/>
-          <p:nvPr/>
-        </p:nvSpPr>
-        <p:spPr>
-          <a:xfrm>
-            <a:off x="609598" y="6381734"/>
-            <a:ext cx="5714986" cy="228599"/>
-          </a:xfrm>
-          <a:prstGeom prst="rect">
-            <a:avLst/>
-          </a:prstGeom>
-          <a:noFill/>
-          <a:ln/>
-        </p:spPr>
-        <p:txBody>
-          <a:bodyPr wrap="square" lIns="0" tIns="0" rIns="0" bIns="0" rtlCol="0" anchor="ctr"/>
-          <a:lstStyle/>
-          <a:p>
-            <a:pPr algn="l" indent="0" marL="0">
-              <a:buNone/>
-            </a:pPr>
-            <a:r>
-              <a:rPr lang="en-US" sz="750" b="1" spc="100" kern="0" dirty="0">
-                <a:solidFill>
-                  <a:srgbClr val="BDC3CE"/>
-                </a:solidFill>
-                <a:latin typeface="Arial" pitchFamily="34" charset="0"/>
-                <a:ea typeface="Arial" pitchFamily="34" charset="-122"/>
-                <a:cs typeface="Arial" pitchFamily="34" charset="-120"/>
-              </a:rPr>
-              <a:t>LINK. · Pilot makelaars · OK Creative Agency</a:t>
-            </a:r>
-            <a:endParaRPr lang="en-US" sz="750" dirty="0"/>
-          </a:p>
-        </p:txBody>
-      </p:sp>
-      <p:sp>
-        <p:nvSpPr>
-          <p:cNvPr id="26" name="Text 24"/>
-          <p:cNvSpPr txBox="1"/>
-          <p:nvPr/>
-        </p:nvSpPr>
-        <p:spPr>
-          <a:xfrm>
-            <a:off x="9677376" y="6381734"/>
-            <a:ext cx="1904995" cy="228599"/>
-          </a:xfrm>
-          <a:prstGeom prst="rect">
-            <a:avLst/>
-          </a:prstGeom>
-          <a:noFill/>
-          <a:ln/>
-        </p:spPr>
-        <p:txBody>
-          <a:bodyPr wrap="square" lIns="0" tIns="0" rIns="0" bIns="0" rtlCol="0" anchor="ctr"/>
-          <a:lstStyle/>
-          <a:p>
-            <a:pPr algn="r" indent="0" marL="0">
-              <a:buNone/>
-            </a:pPr>
-            <a:r>
-              <a:rPr lang="en-US" sz="750" b="1" spc="100" kern="0" dirty="0">
-                <a:solidFill>
-                  <a:srgbClr val="BDC3CE"/>
-                </a:solidFill>
-                <a:latin typeface="Arial" pitchFamily="34" charset="0"/>
-                <a:ea typeface="Arial" pitchFamily="34" charset="-122"/>
-                <a:cs typeface="Arial" pitchFamily="34" charset="-120"/>
-              </a:rPr>
-              <a:t>1 / 12</a:t>
-            </a:r>
-            <a:endParaRPr lang="en-US" sz="750" dirty="0"/>
-          </a:p>
-        </p:txBody>
-      </p:sp>
-      <p:sp>
-        <p:nvSpPr>
-          <p:cNvPr id="27" name="Text 25"/>
-          <p:cNvSpPr txBox="1"/>
-          <p:nvPr/>
-        </p:nvSpPr>
-        <p:spPr>
-          <a:xfrm>
-            <a:off x="609598" y="2133595"/>
-            <a:ext cx="10159975" cy="215899"/>
-          </a:xfrm>
-          <a:prstGeom prst="rect">
-            <a:avLst/>
-          </a:prstGeom>
-          <a:noFill/>
-          <a:ln/>
-        </p:spPr>
-        <p:txBody>
-          <a:bodyPr wrap="square" lIns="0" tIns="0" rIns="0" bIns="0" rtlCol="0" anchor="ctr"/>
-          <a:lstStyle/>
-          <a:p>
-            <a:pPr algn="l" indent="0" marL="0">
-              <a:buNone/>
-            </a:pPr>
-            <a:r>
-              <a:rPr lang="en-US" sz="950" b="1" spc="400" kern="0" dirty="0">
-                <a:solidFill>
-                  <a:srgbClr val="38B6FF"/>
-                </a:solidFill>
-                <a:latin typeface="Arial" pitchFamily="34" charset="0"/>
-                <a:ea typeface="Arial" pitchFamily="34" charset="-122"/>
-                <a:cs typeface="Arial" pitchFamily="34" charset="-120"/>
-              </a:rPr>
-              <a:t>VOOR MEES · OK CREATIVE AGENCY · OKTOBER 2026</a:t>
-            </a:r>
-            <a:endParaRPr lang="en-US" sz="950" dirty="0"/>
-          </a:p>
-        </p:txBody>
-      </p:sp>
-      <p:sp>
-        <p:nvSpPr>
-          <p:cNvPr id="28" name="Text 26"/>
-          <p:cNvSpPr txBox="1"/>
-          <p:nvPr/>
-        </p:nvSpPr>
-        <p:spPr>
-          <a:xfrm>
-            <a:off x="609598" y="2514594"/>
-            <a:ext cx="8635978" cy="2031995"/>
-          </a:xfrm>
-          <a:prstGeom prst="rect">
-            <a:avLst/>
-          </a:prstGeom>
-          <a:noFill/>
-          <a:ln/>
-        </p:spPr>
-        <p:txBody>
-          <a:bodyPr wrap="square" lIns="0" tIns="0" rIns="0" bIns="0" rtlCol="0" anchor="t"/>
-          <a:lstStyle/>
-          <a:p>
-            <a:pPr algn="l" indent="0" marL="0">
-              <a:lnSpc>
-                <a:spcPct val="105000"/>
-              </a:lnSpc>
-              <a:buNone/>
-            </a:pPr>
-            <a:r>
-              <a:rPr lang="en-US" sz="5200" b="1" dirty="0">
-                <a:solidFill>
-                  <a:srgbClr val="F2EFE6"/>
-                </a:solidFill>
-                <a:latin typeface="Arial" pitchFamily="34" charset="0"/>
-                <a:ea typeface="Arial" pitchFamily="34" charset="-122"/>
-                <a:cs typeface="Arial" pitchFamily="34" charset="-120"/>
-              </a:rPr>
-              <a:t>Jullie makelaarsverhaal, nu </a:t>
-            </a:r>
-            <a:pPr algn="l" indent="0" marL="0">
-              <a:lnSpc>
-                <a:spcPct val="105000"/>
-              </a:lnSpc>
-              <a:buNone/>
-            </a:pPr>
-            <a:r>
-              <a:rPr lang="en-US" sz="5000" i="1" dirty="0">
-                <a:solidFill>
-                  <a:srgbClr val="F2EFE6"/>
-                </a:solidFill>
-                <a:latin typeface="Georgia" pitchFamily="34" charset="0"/>
-                <a:ea typeface="Georgia" pitchFamily="34" charset="-122"/>
-                <a:cs typeface="Georgia" pitchFamily="34" charset="-120"/>
-              </a:rPr>
-              <a:t>op schaal</a:t>
-            </a:r>
-            <a:pPr algn="l" indent="0" marL="0">
-              <a:lnSpc>
-                <a:spcPct val="105000"/>
-              </a:lnSpc>
-              <a:buNone/>
-            </a:pPr>
-            <a:r>
-              <a:rPr lang="en-US" sz="5200" b="1" dirty="0">
-                <a:solidFill>
-                  <a:srgbClr val="F2EFE6"/>
-                </a:solidFill>
-                <a:latin typeface="Arial" pitchFamily="34" charset="0"/>
-                <a:ea typeface="Arial" pitchFamily="34" charset="-122"/>
-                <a:cs typeface="Arial" pitchFamily="34" charset="-120"/>
-              </a:rPr>
-              <a:t>.</a:t>
-            </a:r>
-            <a:endParaRPr lang="en-US" sz="5200" dirty="0"/>
-          </a:p>
-        </p:txBody>
-      </p:sp>
-      <p:sp>
-        <p:nvSpPr>
-          <p:cNvPr id="29" name="Text 27"/>
-          <p:cNvSpPr txBox="1"/>
-          <p:nvPr/>
-        </p:nvSpPr>
-        <p:spPr>
-          <a:xfrm>
-            <a:off x="609598" y="4711688"/>
-            <a:ext cx="6667483" cy="761998"/>
-          </a:xfrm>
-          <a:prstGeom prst="rect">
-            <a:avLst/>
-          </a:prstGeom>
-          <a:noFill/>
-          <a:ln/>
-        </p:spPr>
-        <p:txBody>
-          <a:bodyPr wrap="square" lIns="0" tIns="0" rIns="0" bIns="0" rtlCol="0" anchor="t"/>
-          <a:lstStyle/>
-          <a:p>
-            <a:pPr indent="0" marL="0">
-              <a:lnSpc>
-                <a:spcPct val="135000"/>
-              </a:lnSpc>
-              <a:buNone/>
-            </a:pPr>
-            <a:r>
-              <a:rPr lang="en-US" sz="1400" dirty="0">
-                <a:solidFill>
-                  <a:srgbClr val="BDC3CE"/>
-                </a:solidFill>
-                <a:latin typeface="Arial" pitchFamily="34" charset="0"/>
-                <a:ea typeface="Arial" pitchFamily="34" charset="-122"/>
-                <a:cs typeface="Arial" pitchFamily="34" charset="-120"/>
-              </a:rPr>
-              <a:t>Jullie hebben ruim twintig makelaarskantoren zelf benaderd en de reacties zijn goed. Er zijn er in Nederland ruim vijfduizend. Dit voorstel gaat over de rest.</a:t>
-            </a:r>
-            <a:endParaRPr lang="en-US" sz="1400" dirty="0"/>
-          </a:p>
-        </p:txBody>
-      </p:sp>
-      <p:sp>
-        <p:nvSpPr>
-          <p:cNvPr id="30" name="Text 28"/>
-          <p:cNvSpPr txBox="1"/>
-          <p:nvPr/>
-        </p:nvSpPr>
-        <p:spPr>
-          <a:xfrm>
-            <a:off x="609598" y="5714986"/>
-            <a:ext cx="825498" cy="406399"/>
-          </a:xfrm>
-          <a:prstGeom prst="rect">
-            <a:avLst/>
-          </a:prstGeom>
-          <a:noFill/>
-          <a:ln/>
-        </p:spPr>
-        <p:txBody>
-          <a:bodyPr wrap="square" lIns="0" tIns="0" rIns="0" bIns="0" rtlCol="0" anchor="ctr"/>
-          <a:lstStyle/>
-          <a:p>
-            <a:pPr indent="0" marL="0">
-              <a:buNone/>
-            </a:pPr>
-            <a:r>
-              <a:rPr lang="en-US" sz="1700" b="1" dirty="0">
-                <a:solidFill>
-                  <a:srgbClr val="F2EFE6"/>
-                </a:solidFill>
-                <a:latin typeface="Arial" pitchFamily="34" charset="0"/>
-                <a:ea typeface="Arial" pitchFamily="34" charset="-122"/>
-                <a:cs typeface="Arial" pitchFamily="34" charset="-120"/>
-              </a:rPr>
-              <a:t>LINK</a:t>
-            </a:r>
-            <a:pPr indent="0" marL="0">
-              <a:buNone/>
-            </a:pPr>
-            <a:r>
-              <a:rPr lang="en-US" sz="1700" b="1" dirty="0">
-                <a:solidFill>
-                  <a:srgbClr val="38B6FF"/>
-                </a:solidFill>
-                <a:latin typeface="Arial" pitchFamily="34" charset="0"/>
-                <a:ea typeface="Arial" pitchFamily="34" charset="-122"/>
-                <a:cs typeface="Arial" pitchFamily="34" charset="-120"/>
-              </a:rPr>
-              <a:t>.</a:t>
-            </a:r>
-            <a:endParaRPr lang="en-US" sz="1700" dirty="0"/>
-          </a:p>
-        </p:txBody>
-      </p:sp>
-      <p:sp>
-        <p:nvSpPr>
-          <p:cNvPr id="31" name="Text 29"/>
-          <p:cNvSpPr txBox="1"/>
-          <p:nvPr/>
-        </p:nvSpPr>
-        <p:spPr>
-          <a:xfrm>
-            <a:off x="1473196" y="5714986"/>
-            <a:ext cx="279399" cy="406399"/>
-          </a:xfrm>
-          <a:prstGeom prst="rect">
-            <a:avLst/>
-          </a:prstGeom>
-          <a:noFill/>
-          <a:ln/>
-        </p:spPr>
-        <p:txBody>
-          <a:bodyPr wrap="square" lIns="0" tIns="0" rIns="0" bIns="0" rtlCol="0" anchor="ctr"/>
-          <a:lstStyle/>
-          <a:p>
-            <a:pPr algn="ctr" indent="0" marL="0">
-              <a:buNone/>
-            </a:pPr>
-            <a:r>
-              <a:rPr lang="en-US" sz="1300" dirty="0">
-                <a:solidFill>
-                  <a:srgbClr val="8A90A0"/>
-                </a:solidFill>
-                <a:latin typeface="Arial" pitchFamily="34" charset="0"/>
-                <a:ea typeface="Arial" pitchFamily="34" charset="-122"/>
-                <a:cs typeface="Arial" pitchFamily="34" charset="-120"/>
-              </a:rPr>
-              <a:t>×</a:t>
-            </a:r>
-            <a:endParaRPr lang="en-US" sz="1300" dirty="0"/>
-          </a:p>
-        </p:txBody>
-      </p:sp>
-      <p:sp>
-        <p:nvSpPr>
-          <p:cNvPr id="32" name="Shape 30"/>
-          <p:cNvSpPr/>
-          <p:nvPr/>
-        </p:nvSpPr>
-        <p:spPr>
-          <a:xfrm>
-            <a:off x="1854195" y="5714986"/>
-            <a:ext cx="671944" cy="406399"/>
-          </a:xfrm>
-          <a:prstGeom prst="roundRect">
-            <a:avLst>
-              <a:gd name="adj" fmla="val 21875"/>
-            </a:avLst>
-          </a:prstGeom>
-          <a:solidFill>
-            <a:srgbClr val="F8F4EB"/>
-          </a:solidFill>
-          <a:ln/>
-        </p:spPr>
-      </p:sp>
       <p:pic>
         <p:nvPicPr>
-          <p:cNvPr id="33" name="Image 0" descr="preencoded.png">    </p:cNvPr>
+          <p:cNvPr id="25" name="Image 0" descr="/home/user/Test/assets/okcreative-mark.png">    </p:cNvPr>
           <p:cNvPicPr>
             <a:picLocks noChangeAspect="1"/>
           </p:cNvPicPr>
@@ -2833,8 +2484,359 @@
         </p:blipFill>
         <p:spPr>
           <a:xfrm>
-            <a:off x="2031995" y="5791186"/>
-            <a:ext cx="316345" cy="253999"/>
+            <a:off x="11226772" y="393699"/>
+            <a:ext cx="355599" cy="355599"/>
+          </a:xfrm>
+          <a:prstGeom prst="rect">
+            <a:avLst/>
+          </a:prstGeom>
+        </p:spPr>
+      </p:pic>
+      <p:sp>
+        <p:nvSpPr>
+          <p:cNvPr id="26" name="Text 23"/>
+          <p:cNvSpPr txBox="1"/>
+          <p:nvPr/>
+        </p:nvSpPr>
+        <p:spPr>
+          <a:xfrm>
+            <a:off x="609598" y="6381734"/>
+            <a:ext cx="5714986" cy="228599"/>
+          </a:xfrm>
+          <a:prstGeom prst="rect">
+            <a:avLst/>
+          </a:prstGeom>
+          <a:noFill/>
+          <a:ln/>
+        </p:spPr>
+        <p:txBody>
+          <a:bodyPr wrap="square" lIns="0" tIns="0" rIns="0" bIns="0" rtlCol="0" anchor="ctr"/>
+          <a:lstStyle/>
+          <a:p>
+            <a:pPr algn="l" indent="0" marL="0">
+              <a:buNone/>
+            </a:pPr>
+            <a:r>
+              <a:rPr lang="en-US" sz="750" b="1" spc="100" kern="0" dirty="0">
+                <a:solidFill>
+                  <a:srgbClr val="BDC3CE"/>
+                </a:solidFill>
+                <a:latin typeface="Arial" pitchFamily="34" charset="0"/>
+                <a:ea typeface="Arial" pitchFamily="34" charset="-122"/>
+                <a:cs typeface="Arial" pitchFamily="34" charset="-120"/>
+              </a:rPr>
+              <a:t>LINK. · Pilot makelaars · OK Creative Agency</a:t>
+            </a:r>
+            <a:endParaRPr lang="en-US" sz="750" dirty="0"/>
+          </a:p>
+        </p:txBody>
+      </p:sp>
+      <p:sp>
+        <p:nvSpPr>
+          <p:cNvPr id="27" name="Text 24"/>
+          <p:cNvSpPr txBox="1"/>
+          <p:nvPr/>
+        </p:nvSpPr>
+        <p:spPr>
+          <a:xfrm>
+            <a:off x="9677376" y="6381734"/>
+            <a:ext cx="1904995" cy="228599"/>
+          </a:xfrm>
+          <a:prstGeom prst="rect">
+            <a:avLst/>
+          </a:prstGeom>
+          <a:noFill/>
+          <a:ln/>
+        </p:spPr>
+        <p:txBody>
+          <a:bodyPr wrap="square" lIns="0" tIns="0" rIns="0" bIns="0" rtlCol="0" anchor="ctr"/>
+          <a:lstStyle/>
+          <a:p>
+            <a:pPr algn="r" indent="0" marL="0">
+              <a:buNone/>
+            </a:pPr>
+            <a:r>
+              <a:rPr lang="en-US" sz="750" b="1" spc="100" kern="0" dirty="0">
+                <a:solidFill>
+                  <a:srgbClr val="BDC3CE"/>
+                </a:solidFill>
+                <a:latin typeface="Arial" pitchFamily="34" charset="0"/>
+                <a:ea typeface="Arial" pitchFamily="34" charset="-122"/>
+                <a:cs typeface="Arial" pitchFamily="34" charset="-120"/>
+              </a:rPr>
+              <a:t>1 / 12</a:t>
+            </a:r>
+            <a:endParaRPr lang="en-US" sz="750" dirty="0"/>
+          </a:p>
+        </p:txBody>
+      </p:sp>
+      <p:sp>
+        <p:nvSpPr>
+          <p:cNvPr id="28" name="Text 25"/>
+          <p:cNvSpPr txBox="1"/>
+          <p:nvPr/>
+        </p:nvSpPr>
+        <p:spPr>
+          <a:xfrm>
+            <a:off x="609598" y="2133595"/>
+            <a:ext cx="10159975" cy="215899"/>
+          </a:xfrm>
+          <a:prstGeom prst="rect">
+            <a:avLst/>
+          </a:prstGeom>
+          <a:noFill/>
+          <a:ln/>
+        </p:spPr>
+        <p:txBody>
+          <a:bodyPr wrap="square" lIns="0" tIns="0" rIns="0" bIns="0" rtlCol="0" anchor="ctr"/>
+          <a:lstStyle/>
+          <a:p>
+            <a:pPr algn="l" indent="0" marL="0">
+              <a:buNone/>
+            </a:pPr>
+            <a:r>
+              <a:rPr lang="en-US" sz="950" b="1" spc="400" kern="0" dirty="0">
+                <a:solidFill>
+                  <a:srgbClr val="38B6FF"/>
+                </a:solidFill>
+                <a:latin typeface="Arial" pitchFamily="34" charset="0"/>
+                <a:ea typeface="Arial" pitchFamily="34" charset="-122"/>
+                <a:cs typeface="Arial" pitchFamily="34" charset="-120"/>
+              </a:rPr>
+              <a:t>VOOR MEES · OK CREATIVE AGENCY · OKTOBER 2026</a:t>
+            </a:r>
+            <a:endParaRPr lang="en-US" sz="950" dirty="0"/>
+          </a:p>
+        </p:txBody>
+      </p:sp>
+      <p:sp>
+        <p:nvSpPr>
+          <p:cNvPr id="29" name="Text 26"/>
+          <p:cNvSpPr txBox="1"/>
+          <p:nvPr/>
+        </p:nvSpPr>
+        <p:spPr>
+          <a:xfrm>
+            <a:off x="609598" y="2514594"/>
+            <a:ext cx="8635978" cy="2031995"/>
+          </a:xfrm>
+          <a:prstGeom prst="rect">
+            <a:avLst/>
+          </a:prstGeom>
+          <a:noFill/>
+          <a:ln/>
+        </p:spPr>
+        <p:txBody>
+          <a:bodyPr wrap="square" lIns="0" tIns="0" rIns="0" bIns="0" rtlCol="0" anchor="t"/>
+          <a:lstStyle/>
+          <a:p>
+            <a:pPr algn="l" indent="0" marL="0">
+              <a:lnSpc>
+                <a:spcPct val="105000"/>
+              </a:lnSpc>
+              <a:buNone/>
+            </a:pPr>
+            <a:r>
+              <a:rPr lang="en-US" sz="5200" b="1" dirty="0">
+                <a:solidFill>
+                  <a:srgbClr val="F2EFE6"/>
+                </a:solidFill>
+                <a:latin typeface="Arial" pitchFamily="34" charset="0"/>
+                <a:ea typeface="Arial" pitchFamily="34" charset="-122"/>
+                <a:cs typeface="Arial" pitchFamily="34" charset="-120"/>
+              </a:rPr>
+              <a:t>Jullie makelaarsverhaal, nu </a:t>
+            </a:r>
+            <a:pPr algn="l" indent="0" marL="0">
+              <a:lnSpc>
+                <a:spcPct val="105000"/>
+              </a:lnSpc>
+              <a:buNone/>
+            </a:pPr>
+            <a:r>
+              <a:rPr lang="en-US" sz="5000" i="1" dirty="0">
+                <a:solidFill>
+                  <a:srgbClr val="F2EFE6"/>
+                </a:solidFill>
+                <a:latin typeface="Georgia" pitchFamily="34" charset="0"/>
+                <a:ea typeface="Georgia" pitchFamily="34" charset="-122"/>
+                <a:cs typeface="Georgia" pitchFamily="34" charset="-120"/>
+              </a:rPr>
+              <a:t>op schaal</a:t>
+            </a:r>
+            <a:pPr algn="l" indent="0" marL="0">
+              <a:lnSpc>
+                <a:spcPct val="105000"/>
+              </a:lnSpc>
+              <a:buNone/>
+            </a:pPr>
+            <a:r>
+              <a:rPr lang="en-US" sz="5200" b="1" dirty="0">
+                <a:solidFill>
+                  <a:srgbClr val="F2EFE6"/>
+                </a:solidFill>
+                <a:latin typeface="Arial" pitchFamily="34" charset="0"/>
+                <a:ea typeface="Arial" pitchFamily="34" charset="-122"/>
+                <a:cs typeface="Arial" pitchFamily="34" charset="-120"/>
+              </a:rPr>
+              <a:t>.</a:t>
+            </a:r>
+            <a:endParaRPr lang="en-US" sz="5200" dirty="0"/>
+          </a:p>
+        </p:txBody>
+      </p:sp>
+      <p:sp>
+        <p:nvSpPr>
+          <p:cNvPr id="30" name="Text 27"/>
+          <p:cNvSpPr txBox="1"/>
+          <p:nvPr/>
+        </p:nvSpPr>
+        <p:spPr>
+          <a:xfrm>
+            <a:off x="609598" y="4711688"/>
+            <a:ext cx="6667483" cy="761998"/>
+          </a:xfrm>
+          <a:prstGeom prst="rect">
+            <a:avLst/>
+          </a:prstGeom>
+          <a:noFill/>
+          <a:ln/>
+        </p:spPr>
+        <p:txBody>
+          <a:bodyPr wrap="square" lIns="0" tIns="0" rIns="0" bIns="0" rtlCol="0" anchor="t"/>
+          <a:lstStyle/>
+          <a:p>
+            <a:pPr indent="0" marL="0">
+              <a:lnSpc>
+                <a:spcPct val="135000"/>
+              </a:lnSpc>
+              <a:buNone/>
+            </a:pPr>
+            <a:r>
+              <a:rPr lang="en-US" sz="1400" dirty="0">
+                <a:solidFill>
+                  <a:srgbClr val="BDC3CE"/>
+                </a:solidFill>
+                <a:latin typeface="Arial" pitchFamily="34" charset="0"/>
+                <a:ea typeface="Arial" pitchFamily="34" charset="-122"/>
+                <a:cs typeface="Arial" pitchFamily="34" charset="-120"/>
+              </a:rPr>
+              <a:t>Jullie hebben ruim twintig makelaarskantoren zelf benaderd en de reacties zijn goed. Er zijn er in Nederland ruim vijfduizend. Dit voorstel gaat over de rest.</a:t>
+            </a:r>
+            <a:endParaRPr lang="en-US" sz="1400" dirty="0"/>
+          </a:p>
+        </p:txBody>
+      </p:sp>
+      <p:sp>
+        <p:nvSpPr>
+          <p:cNvPr id="31" name="Text 28"/>
+          <p:cNvSpPr txBox="1"/>
+          <p:nvPr/>
+        </p:nvSpPr>
+        <p:spPr>
+          <a:xfrm>
+            <a:off x="609598" y="5714986"/>
+            <a:ext cx="825498" cy="406399"/>
+          </a:xfrm>
+          <a:prstGeom prst="rect">
+            <a:avLst/>
+          </a:prstGeom>
+          <a:noFill/>
+          <a:ln/>
+        </p:spPr>
+        <p:txBody>
+          <a:bodyPr wrap="square" lIns="0" tIns="0" rIns="0" bIns="0" rtlCol="0" anchor="ctr"/>
+          <a:lstStyle/>
+          <a:p>
+            <a:pPr indent="0" marL="0">
+              <a:buNone/>
+            </a:pPr>
+            <a:r>
+              <a:rPr lang="en-US" sz="1700" b="1" dirty="0">
+                <a:solidFill>
+                  <a:srgbClr val="F2EFE6"/>
+                </a:solidFill>
+                <a:latin typeface="Arial" pitchFamily="34" charset="0"/>
+                <a:ea typeface="Arial" pitchFamily="34" charset="-122"/>
+                <a:cs typeface="Arial" pitchFamily="34" charset="-120"/>
+              </a:rPr>
+              <a:t>LINK</a:t>
+            </a:r>
+            <a:pPr indent="0" marL="0">
+              <a:buNone/>
+            </a:pPr>
+            <a:r>
+              <a:rPr lang="en-US" sz="1700" b="1" dirty="0">
+                <a:solidFill>
+                  <a:srgbClr val="38B6FF"/>
+                </a:solidFill>
+                <a:latin typeface="Arial" pitchFamily="34" charset="0"/>
+                <a:ea typeface="Arial" pitchFamily="34" charset="-122"/>
+                <a:cs typeface="Arial" pitchFamily="34" charset="-120"/>
+              </a:rPr>
+              <a:t>.</a:t>
+            </a:r>
+            <a:endParaRPr lang="en-US" sz="1700" dirty="0"/>
+          </a:p>
+        </p:txBody>
+      </p:sp>
+      <p:sp>
+        <p:nvSpPr>
+          <p:cNvPr id="32" name="Text 29"/>
+          <p:cNvSpPr txBox="1"/>
+          <p:nvPr/>
+        </p:nvSpPr>
+        <p:spPr>
+          <a:xfrm>
+            <a:off x="1473196" y="5714986"/>
+            <a:ext cx="279399" cy="406399"/>
+          </a:xfrm>
+          <a:prstGeom prst="rect">
+            <a:avLst/>
+          </a:prstGeom>
+          <a:noFill/>
+          <a:ln/>
+        </p:spPr>
+        <p:txBody>
+          <a:bodyPr wrap="square" lIns="0" tIns="0" rIns="0" bIns="0" rtlCol="0" anchor="ctr"/>
+          <a:lstStyle/>
+          <a:p>
+            <a:pPr algn="ctr" indent="0" marL="0">
+              <a:buNone/>
+            </a:pPr>
+            <a:r>
+              <a:rPr lang="en-US" sz="1300" dirty="0">
+                <a:solidFill>
+                  <a:srgbClr val="8A90A0"/>
+                </a:solidFill>
+                <a:latin typeface="Arial" pitchFamily="34" charset="0"/>
+                <a:ea typeface="Arial" pitchFamily="34" charset="-122"/>
+                <a:cs typeface="Arial" pitchFamily="34" charset="-120"/>
+              </a:rPr>
+              <a:t>×</a:t>
+            </a:r>
+            <a:endParaRPr lang="en-US" sz="1300" dirty="0"/>
+          </a:p>
+        </p:txBody>
+      </p:sp>
+      <p:pic>
+        <p:nvPicPr>
+          <p:cNvPr id="33" name="Image 1" descr="preencoded.png">    </p:cNvPr>
+          <p:cNvPicPr>
+            <a:picLocks noChangeAspect="1"/>
+          </p:cNvPicPr>
+          <p:nvPr/>
+        </p:nvPicPr>
+        <p:blipFill>
+          <a:blip r:embed="rId2"/>
+          <a:stretch>
+            <a:fillRect/>
+          </a:stretch>
+        </p:blipFill>
+        <p:spPr>
+          <a:xfrm>
+            <a:off x="1854195" y="5587986"/>
+            <a:ext cx="660398" cy="660398"/>
           </a:xfrm>
           <a:prstGeom prst="rect">
             <a:avLst/>
@@ -2926,246 +2928,9 @@
           </a:p>
         </p:txBody>
       </p:sp>
-      <p:sp>
-        <p:nvSpPr>
-          <p:cNvPr id="3" name="Text 1"/>
-          <p:cNvSpPr txBox="1"/>
-          <p:nvPr/>
-        </p:nvSpPr>
-        <p:spPr>
-          <a:xfrm>
-            <a:off x="609598" y="6381734"/>
-            <a:ext cx="5714986" cy="228599"/>
-          </a:xfrm>
-          <a:prstGeom prst="rect">
-            <a:avLst/>
-          </a:prstGeom>
-          <a:noFill/>
-          <a:ln/>
-        </p:spPr>
-        <p:txBody>
-          <a:bodyPr wrap="square" lIns="0" tIns="0" rIns="0" bIns="0" rtlCol="0" anchor="ctr"/>
-          <a:lstStyle/>
-          <a:p>
-            <a:pPr algn="l" indent="0" marL="0">
-              <a:buNone/>
-            </a:pPr>
-            <a:r>
-              <a:rPr lang="en-US" sz="750" b="1" spc="100" kern="0" dirty="0">
-                <a:solidFill>
-                  <a:srgbClr val="6F6A5C"/>
-                </a:solidFill>
-                <a:latin typeface="Arial" pitchFamily="34" charset="0"/>
-                <a:ea typeface="Arial" pitchFamily="34" charset="-122"/>
-                <a:cs typeface="Arial" pitchFamily="34" charset="-120"/>
-              </a:rPr>
-              <a:t>LINK. · Pilot makelaars · OK Creative Agency</a:t>
-            </a:r>
-            <a:endParaRPr lang="en-US" sz="750" dirty="0"/>
-          </a:p>
-        </p:txBody>
-      </p:sp>
-      <p:sp>
-        <p:nvSpPr>
-          <p:cNvPr id="4" name="Text 2"/>
-          <p:cNvSpPr txBox="1"/>
-          <p:nvPr/>
-        </p:nvSpPr>
-        <p:spPr>
-          <a:xfrm>
-            <a:off x="9677376" y="6381734"/>
-            <a:ext cx="1904995" cy="228599"/>
-          </a:xfrm>
-          <a:prstGeom prst="rect">
-            <a:avLst/>
-          </a:prstGeom>
-          <a:noFill/>
-          <a:ln/>
-        </p:spPr>
-        <p:txBody>
-          <a:bodyPr wrap="square" lIns="0" tIns="0" rIns="0" bIns="0" rtlCol="0" anchor="ctr"/>
-          <a:lstStyle/>
-          <a:p>
-            <a:pPr algn="r" indent="0" marL="0">
-              <a:buNone/>
-            </a:pPr>
-            <a:r>
-              <a:rPr lang="en-US" sz="750" b="1" spc="100" kern="0" dirty="0">
-                <a:solidFill>
-                  <a:srgbClr val="6F6A5C"/>
-                </a:solidFill>
-                <a:latin typeface="Arial" pitchFamily="34" charset="0"/>
-                <a:ea typeface="Arial" pitchFamily="34" charset="-122"/>
-                <a:cs typeface="Arial" pitchFamily="34" charset="-120"/>
-              </a:rPr>
-              <a:t>10 / 12</a:t>
-            </a:r>
-            <a:endParaRPr lang="en-US" sz="750" dirty="0"/>
-          </a:p>
-        </p:txBody>
-      </p:sp>
-      <p:sp>
-        <p:nvSpPr>
-          <p:cNvPr id="5" name="Text 3"/>
-          <p:cNvSpPr txBox="1"/>
-          <p:nvPr/>
-        </p:nvSpPr>
-        <p:spPr>
-          <a:xfrm>
-            <a:off x="609598" y="1206497"/>
-            <a:ext cx="10159975" cy="215899"/>
-          </a:xfrm>
-          <a:prstGeom prst="rect">
-            <a:avLst/>
-          </a:prstGeom>
-          <a:noFill/>
-          <a:ln/>
-        </p:spPr>
-        <p:txBody>
-          <a:bodyPr wrap="square" lIns="0" tIns="0" rIns="0" bIns="0" rtlCol="0" anchor="ctr"/>
-          <a:lstStyle/>
-          <a:p>
-            <a:pPr algn="l" indent="0" marL="0">
-              <a:buNone/>
-            </a:pPr>
-            <a:r>
-              <a:rPr lang="en-US" sz="950" b="1" spc="400" kern="0" dirty="0">
-                <a:solidFill>
-                  <a:srgbClr val="38B6FF"/>
-                </a:solidFill>
-                <a:latin typeface="Arial" pitchFamily="34" charset="0"/>
-                <a:ea typeface="Arial" pitchFamily="34" charset="-122"/>
-                <a:cs typeface="Arial" pitchFamily="34" charset="-120"/>
-              </a:rPr>
-              <a:t>WAT WE VAN OK CREATIVE AGENCY NODIG HEBBEN</a:t>
-            </a:r>
-            <a:endParaRPr lang="en-US" sz="950" dirty="0"/>
-          </a:p>
-        </p:txBody>
-      </p:sp>
-      <p:sp>
-        <p:nvSpPr>
-          <p:cNvPr id="6" name="Text 4"/>
-          <p:cNvSpPr txBox="1"/>
-          <p:nvPr/>
-        </p:nvSpPr>
-        <p:spPr>
-          <a:xfrm>
-            <a:off x="609598" y="1511296"/>
-            <a:ext cx="10972773" cy="1142997"/>
-          </a:xfrm>
-          <a:prstGeom prst="rect">
-            <a:avLst/>
-          </a:prstGeom>
-          <a:noFill/>
-          <a:ln/>
-        </p:spPr>
-        <p:txBody>
-          <a:bodyPr wrap="square" lIns="0" tIns="0" rIns="0" bIns="0" rtlCol="0" anchor="t"/>
-          <a:lstStyle/>
-          <a:p>
-            <a:pPr algn="l" indent="0" marL="0">
-              <a:lnSpc>
-                <a:spcPct val="108000"/>
-              </a:lnSpc>
-              <a:buNone/>
-            </a:pPr>
-            <a:r>
-              <a:rPr lang="en-US" sz="3200" b="1" dirty="0">
-                <a:solidFill>
-                  <a:srgbClr val="1C2230"/>
-                </a:solidFill>
-                <a:latin typeface="Arial" pitchFamily="34" charset="0"/>
-                <a:ea typeface="Arial" pitchFamily="34" charset="-122"/>
-                <a:cs typeface="Arial" pitchFamily="34" charset="-120"/>
-              </a:rPr>
-              <a:t>Ongeveer een </a:t>
-            </a:r>
-            <a:pPr algn="l" indent="0" marL="0">
-              <a:lnSpc>
-                <a:spcPct val="108000"/>
-              </a:lnSpc>
-              <a:buNone/>
-            </a:pPr>
-            <a:r>
-              <a:rPr lang="en-US" sz="3000" i="1" dirty="0">
-                <a:solidFill>
-                  <a:srgbClr val="1C2230"/>
-                </a:solidFill>
-                <a:latin typeface="Georgia" pitchFamily="34" charset="0"/>
-                <a:ea typeface="Georgia" pitchFamily="34" charset="-122"/>
-                <a:cs typeface="Georgia" pitchFamily="34" charset="-120"/>
-              </a:rPr>
-              <a:t>halve dag</a:t>
-            </a:r>
-            <a:pPr algn="l" indent="0" marL="0">
-              <a:lnSpc>
-                <a:spcPct val="108000"/>
-              </a:lnSpc>
-              <a:buNone/>
-            </a:pPr>
-            <a:r>
-              <a:rPr lang="en-US" sz="3200" b="1" dirty="0">
-                <a:solidFill>
-                  <a:srgbClr val="1C2230"/>
-                </a:solidFill>
-                <a:latin typeface="Arial" pitchFamily="34" charset="0"/>
-                <a:ea typeface="Arial" pitchFamily="34" charset="-122"/>
-                <a:cs typeface="Arial" pitchFamily="34" charset="-120"/>
-              </a:rPr>
-              <a:t>, daarna draaien wij.</a:t>
-            </a:r>
-            <a:endParaRPr lang="en-US" sz="3200" dirty="0"/>
-          </a:p>
-        </p:txBody>
-      </p:sp>
-      <p:sp>
-        <p:nvSpPr>
-          <p:cNvPr id="7" name="Shape 5"/>
-          <p:cNvSpPr/>
-          <p:nvPr/>
-        </p:nvSpPr>
-        <p:spPr>
-          <a:xfrm>
-            <a:off x="609598" y="2793993"/>
-            <a:ext cx="5397487" cy="1530346"/>
-          </a:xfrm>
-          <a:prstGeom prst="roundRect">
-            <a:avLst>
-              <a:gd name="adj" fmla="val 6639"/>
-            </a:avLst>
-          </a:prstGeom>
-          <a:solidFill>
-            <a:srgbClr val="000000"/>
-          </a:solidFill>
-          <a:ln/>
-        </p:spPr>
-      </p:sp>
-      <p:sp>
-        <p:nvSpPr>
-          <p:cNvPr id="8" name="Shape 6"/>
-          <p:cNvSpPr/>
-          <p:nvPr/>
-        </p:nvSpPr>
-        <p:spPr>
-          <a:xfrm>
-            <a:off x="939798" y="3098792"/>
-            <a:ext cx="380999" cy="380999"/>
-          </a:xfrm>
-          <a:prstGeom prst="roundRect">
-            <a:avLst>
-              <a:gd name="adj" fmla="val 23333"/>
-            </a:avLst>
-          </a:prstGeom>
-          <a:solidFill>
-            <a:srgbClr val="DDEBF3"/>
-          </a:solidFill>
-          <a:ln/>
-        </p:spPr>
-      </p:sp>
       <p:pic>
         <p:nvPicPr>
-          <p:cNvPr id="9" name="Image 0" descr="preencoded.png">    </p:cNvPr>
+          <p:cNvPr id="3" name="Image 0" descr="/home/user/Test/assets/okcreative-mark.png">    </p:cNvPr>
           <p:cNvPicPr>
             <a:picLocks noChangeAspect="1"/>
           </p:cNvPicPr>
@@ -3179,8 +2944,8 @@
         </p:blipFill>
         <p:spPr>
           <a:xfrm>
-            <a:off x="1035047" y="3194042"/>
-            <a:ext cx="190500" cy="190500"/>
+            <a:off x="11226772" y="393699"/>
+            <a:ext cx="355599" cy="355599"/>
           </a:xfrm>
           <a:prstGeom prst="rect">
             <a:avLst/>
@@ -3189,14 +2954,14 @@
       </p:pic>
       <p:sp>
         <p:nvSpPr>
-          <p:cNvPr id="10" name="Text 7"/>
-          <p:cNvSpPr txBox="1"/>
-          <p:nvPr/>
-        </p:nvSpPr>
-        <p:spPr>
-          <a:xfrm>
-            <a:off x="1549396" y="3073392"/>
-            <a:ext cx="4127490" cy="279399"/>
+          <p:cNvPr id="4" name="Text 1"/>
+          <p:cNvSpPr txBox="1"/>
+          <p:nvPr/>
+        </p:nvSpPr>
+        <p:spPr>
+          <a:xfrm>
+            <a:off x="609598" y="6381734"/>
+            <a:ext cx="5714986" cy="228599"/>
           </a:xfrm>
           <a:prstGeom prst="rect">
             <a:avLst/>
@@ -3208,34 +2973,112 @@
           <a:bodyPr wrap="square" lIns="0" tIns="0" rIns="0" bIns="0" rtlCol="0" anchor="ctr"/>
           <a:lstStyle/>
           <a:p>
-            <a:pPr indent="0" marL="0">
-              <a:buNone/>
-            </a:pPr>
-            <a:r>
-              <a:rPr lang="en-US" sz="1450" b="1" dirty="0">
-                <a:solidFill>
-                  <a:srgbClr val="F2EFE6"/>
-                </a:solidFill>
-                <a:latin typeface="Arial" pitchFamily="34" charset="0"/>
-                <a:ea typeface="Arial" pitchFamily="34" charset="-122"/>
-                <a:cs typeface="Arial" pitchFamily="34" charset="-120"/>
-              </a:rPr>
-              <a:t>Kick-off</a:t>
-            </a:r>
-            <a:endParaRPr lang="en-US" sz="1450" dirty="0"/>
-          </a:p>
-        </p:txBody>
-      </p:sp>
-      <p:sp>
-        <p:nvSpPr>
-          <p:cNvPr id="11" name="Text 8"/>
-          <p:cNvSpPr txBox="1"/>
-          <p:nvPr/>
-        </p:nvSpPr>
-        <p:spPr>
-          <a:xfrm>
-            <a:off x="1549396" y="3403591"/>
-            <a:ext cx="4063990" cy="698498"/>
+            <a:pPr algn="l" indent="0" marL="0">
+              <a:buNone/>
+            </a:pPr>
+            <a:r>
+              <a:rPr lang="en-US" sz="750" b="1" spc="100" kern="0" dirty="0">
+                <a:solidFill>
+                  <a:srgbClr val="6F6A5C"/>
+                </a:solidFill>
+                <a:latin typeface="Arial" pitchFamily="34" charset="0"/>
+                <a:ea typeface="Arial" pitchFamily="34" charset="-122"/>
+                <a:cs typeface="Arial" pitchFamily="34" charset="-120"/>
+              </a:rPr>
+              <a:t>LINK. · Pilot makelaars · OK Creative Agency</a:t>
+            </a:r>
+            <a:endParaRPr lang="en-US" sz="750" dirty="0"/>
+          </a:p>
+        </p:txBody>
+      </p:sp>
+      <p:sp>
+        <p:nvSpPr>
+          <p:cNvPr id="5" name="Text 2"/>
+          <p:cNvSpPr txBox="1"/>
+          <p:nvPr/>
+        </p:nvSpPr>
+        <p:spPr>
+          <a:xfrm>
+            <a:off x="9677376" y="6381734"/>
+            <a:ext cx="1904995" cy="228599"/>
+          </a:xfrm>
+          <a:prstGeom prst="rect">
+            <a:avLst/>
+          </a:prstGeom>
+          <a:noFill/>
+          <a:ln/>
+        </p:spPr>
+        <p:txBody>
+          <a:bodyPr wrap="square" lIns="0" tIns="0" rIns="0" bIns="0" rtlCol="0" anchor="ctr"/>
+          <a:lstStyle/>
+          <a:p>
+            <a:pPr algn="r" indent="0" marL="0">
+              <a:buNone/>
+            </a:pPr>
+            <a:r>
+              <a:rPr lang="en-US" sz="750" b="1" spc="100" kern="0" dirty="0">
+                <a:solidFill>
+                  <a:srgbClr val="6F6A5C"/>
+                </a:solidFill>
+                <a:latin typeface="Arial" pitchFamily="34" charset="0"/>
+                <a:ea typeface="Arial" pitchFamily="34" charset="-122"/>
+                <a:cs typeface="Arial" pitchFamily="34" charset="-120"/>
+              </a:rPr>
+              <a:t>10 / 12</a:t>
+            </a:r>
+            <a:endParaRPr lang="en-US" sz="750" dirty="0"/>
+          </a:p>
+        </p:txBody>
+      </p:sp>
+      <p:sp>
+        <p:nvSpPr>
+          <p:cNvPr id="6" name="Text 3"/>
+          <p:cNvSpPr txBox="1"/>
+          <p:nvPr/>
+        </p:nvSpPr>
+        <p:spPr>
+          <a:xfrm>
+            <a:off x="609598" y="1206497"/>
+            <a:ext cx="10159975" cy="215899"/>
+          </a:xfrm>
+          <a:prstGeom prst="rect">
+            <a:avLst/>
+          </a:prstGeom>
+          <a:noFill/>
+          <a:ln/>
+        </p:spPr>
+        <p:txBody>
+          <a:bodyPr wrap="square" lIns="0" tIns="0" rIns="0" bIns="0" rtlCol="0" anchor="ctr"/>
+          <a:lstStyle/>
+          <a:p>
+            <a:pPr algn="l" indent="0" marL="0">
+              <a:buNone/>
+            </a:pPr>
+            <a:r>
+              <a:rPr lang="en-US" sz="950" b="1" spc="400" kern="0" dirty="0">
+                <a:solidFill>
+                  <a:srgbClr val="38B6FF"/>
+                </a:solidFill>
+                <a:latin typeface="Arial" pitchFamily="34" charset="0"/>
+                <a:ea typeface="Arial" pitchFamily="34" charset="-122"/>
+                <a:cs typeface="Arial" pitchFamily="34" charset="-120"/>
+              </a:rPr>
+              <a:t>WAT WE VAN OK CREATIVE AGENCY NODIG HEBBEN</a:t>
+            </a:r>
+            <a:endParaRPr lang="en-US" sz="950" dirty="0"/>
+          </a:p>
+        </p:txBody>
+      </p:sp>
+      <p:sp>
+        <p:nvSpPr>
+          <p:cNvPr id="7" name="Text 4"/>
+          <p:cNvSpPr txBox="1"/>
+          <p:nvPr/>
+        </p:nvSpPr>
+        <p:spPr>
+          <a:xfrm>
+            <a:off x="609598" y="1511296"/>
+            <a:ext cx="10972773" cy="1142997"/>
           </a:xfrm>
           <a:prstGeom prst="rect">
             <a:avLst/>
@@ -3247,36 +3090,70 @@
           <a:bodyPr wrap="square" lIns="0" tIns="0" rIns="0" bIns="0" rtlCol="0" anchor="t"/>
           <a:lstStyle/>
           <a:p>
-            <a:pPr indent="0" marL="0">
+            <a:pPr algn="l" indent="0" marL="0">
               <a:lnSpc>
-                <a:spcPct val="135000"/>
+                <a:spcPct val="108000"/>
               </a:lnSpc>
               <a:buNone/>
             </a:pPr>
             <a:r>
-              <a:rPr lang="en-US" sz="1050" dirty="0">
-                <a:solidFill>
-                  <a:srgbClr val="C2C8D2"/>
-                </a:solidFill>
-                <a:latin typeface="Arial" pitchFamily="34" charset="0"/>
-                <a:ea typeface="Arial" pitchFamily="34" charset="-122"/>
-                <a:cs typeface="Arial" pitchFamily="34" charset="-120"/>
-              </a:rPr>
-              <a:t>Anderhalf tot twee uur met Mark of Frits om het verhaal en de doelgroep scherp te krijgen.</a:t>
-            </a:r>
-            <a:endParaRPr lang="en-US" sz="1050" dirty="0"/>
-          </a:p>
-        </p:txBody>
-      </p:sp>
-      <p:sp>
-        <p:nvSpPr>
-          <p:cNvPr id="12" name="Shape 9"/>
+              <a:rPr lang="en-US" sz="3200" b="1" dirty="0">
+                <a:solidFill>
+                  <a:srgbClr val="1C2230"/>
+                </a:solidFill>
+                <a:latin typeface="Arial" pitchFamily="34" charset="0"/>
+                <a:ea typeface="Arial" pitchFamily="34" charset="-122"/>
+                <a:cs typeface="Arial" pitchFamily="34" charset="-120"/>
+              </a:rPr>
+              <a:t>Eén uur </a:t>
+            </a:r>
+            <a:pPr algn="l" indent="0" marL="0">
+              <a:lnSpc>
+                <a:spcPct val="108000"/>
+              </a:lnSpc>
+              <a:buNone/>
+            </a:pPr>
+            <a:r>
+              <a:rPr lang="en-US" sz="3000" i="1" dirty="0">
+                <a:solidFill>
+                  <a:srgbClr val="1C2230"/>
+                </a:solidFill>
+                <a:latin typeface="Georgia" pitchFamily="34" charset="0"/>
+                <a:ea typeface="Georgia" pitchFamily="34" charset="-122"/>
+                <a:cs typeface="Georgia" pitchFamily="34" charset="-120"/>
+              </a:rPr>
+              <a:t>kick-off</a:t>
+            </a:r>
+            <a:pPr algn="l" indent="0" marL="0">
+              <a:lnSpc>
+                <a:spcPct val="108000"/>
+              </a:lnSpc>
+              <a:buNone/>
+            </a:pPr>
+            <a:r>
+              <a:rPr lang="en-US" sz="3200" b="1" dirty="0">
+                <a:solidFill>
+                  <a:srgbClr val="1C2230"/>
+                </a:solidFill>
+                <a:latin typeface="Arial" pitchFamily="34" charset="0"/>
+                <a:ea typeface="Arial" pitchFamily="34" charset="-122"/>
+                <a:cs typeface="Arial" pitchFamily="34" charset="-120"/>
+              </a:rPr>
+              <a:t>, daarna draaien wij.</a:t>
+            </a:r>
+            <a:endParaRPr lang="en-US" sz="3200" dirty="0"/>
+          </a:p>
+        </p:txBody>
+      </p:sp>
+      <p:sp>
+        <p:nvSpPr>
+          <p:cNvPr id="8" name="Shape 5"/>
           <p:cNvSpPr/>
           <p:nvPr/>
         </p:nvSpPr>
         <p:spPr>
           <a:xfrm>
-            <a:off x="6184885" y="2793993"/>
+            <a:off x="609598" y="2793993"/>
             <a:ext cx="5397487" cy="1530346"/>
           </a:xfrm>
           <a:prstGeom prst="roundRect">
@@ -3285,20 +3162,20 @@
             </a:avLst>
           </a:prstGeom>
           <a:solidFill>
-            <a:srgbClr val="F8F4EB"/>
+            <a:srgbClr val="000000"/>
           </a:solidFill>
           <a:ln/>
         </p:spPr>
       </p:sp>
       <p:sp>
         <p:nvSpPr>
-          <p:cNvPr id="13" name="Shape 10"/>
+          <p:cNvPr id="9" name="Shape 6"/>
           <p:cNvSpPr/>
           <p:nvPr/>
         </p:nvSpPr>
         <p:spPr>
           <a:xfrm>
-            <a:off x="6515084" y="3098792"/>
+            <a:off x="939798" y="3098792"/>
             <a:ext cx="380999" cy="380999"/>
           </a:xfrm>
           <a:prstGeom prst="roundRect">
@@ -3314,7 +3191,7 @@
       </p:sp>
       <p:pic>
         <p:nvPicPr>
-          <p:cNvPr id="14" name="Image 1" descr="preencoded.png">    </p:cNvPr>
+          <p:cNvPr id="10" name="Image 1" descr="preencoded.png">    </p:cNvPr>
           <p:cNvPicPr>
             <a:picLocks noChangeAspect="1"/>
           </p:cNvPicPr>
@@ -3328,7 +3205,7 @@
         </p:blipFill>
         <p:spPr>
           <a:xfrm>
-            <a:off x="6610333" y="3194042"/>
+            <a:off x="1035047" y="3194042"/>
             <a:ext cx="190500" cy="190500"/>
           </a:xfrm>
           <a:prstGeom prst="rect">
@@ -3338,13 +3215,13 @@
       </p:pic>
       <p:sp>
         <p:nvSpPr>
-          <p:cNvPr id="15" name="Text 11"/>
-          <p:cNvSpPr txBox="1"/>
-          <p:nvPr/>
-        </p:nvSpPr>
-        <p:spPr>
-          <a:xfrm>
-            <a:off x="7124682" y="3073392"/>
+          <p:cNvPr id="11" name="Text 7"/>
+          <p:cNvSpPr txBox="1"/>
+          <p:nvPr/>
+        </p:nvSpPr>
+        <p:spPr>
+          <a:xfrm>
+            <a:off x="1549396" y="3073392"/>
             <a:ext cx="4127490" cy="279399"/>
           </a:xfrm>
           <a:prstGeom prst="rect">
@@ -3363,13 +3240,13 @@
             <a:r>
               <a:rPr lang="en-US" sz="1450" b="1" dirty="0">
                 <a:solidFill>
-                  <a:srgbClr val="1C2230"/>
-                </a:solidFill>
-                <a:latin typeface="Arial" pitchFamily="34" charset="0"/>
-                <a:ea typeface="Arial" pitchFamily="34" charset="-122"/>
-                <a:cs typeface="Arial" pitchFamily="34" charset="-120"/>
-              </a:rPr>
-              <a:t>Uitsluitlijst</a:t>
+                  <a:srgbClr val="F2EFE6"/>
+                </a:solidFill>
+                <a:latin typeface="Arial" pitchFamily="34" charset="0"/>
+                <a:ea typeface="Arial" pitchFamily="34" charset="-122"/>
+                <a:cs typeface="Arial" pitchFamily="34" charset="-120"/>
+              </a:rPr>
+              <a:t>Kick-off</a:t>
             </a:r>
             <a:endParaRPr lang="en-US" sz="1450" dirty="0"/>
           </a:p>
@@ -3377,13 +3254,13 @@
       </p:sp>
       <p:sp>
         <p:nvSpPr>
-          <p:cNvPr id="16" name="Text 12"/>
-          <p:cNvSpPr txBox="1"/>
-          <p:nvPr/>
-        </p:nvSpPr>
-        <p:spPr>
-          <a:xfrm>
-            <a:off x="7124682" y="3403591"/>
+          <p:cNvPr id="12" name="Text 8"/>
+          <p:cNvSpPr txBox="1"/>
+          <p:nvPr/>
+        </p:nvSpPr>
+        <p:spPr>
+          <a:xfrm>
+            <a:off x="1549396" y="3403591"/>
             <a:ext cx="4063990" cy="698498"/>
           </a:xfrm>
           <a:prstGeom prst="rect">
@@ -3405,13 +3282,13 @@
             <a:r>
               <a:rPr lang="en-US" sz="1050" dirty="0">
                 <a:solidFill>
-                  <a:srgbClr val="6F6A5C"/>
-                </a:solidFill>
-                <a:latin typeface="Arial" pitchFamily="34" charset="0"/>
-                <a:ea typeface="Arial" pitchFamily="34" charset="-122"/>
-                <a:cs typeface="Arial" pitchFamily="34" charset="-120"/>
-              </a:rPr>
-              <a:t>De kantoren die jullie zelf al benaderen, inclusief de twintig van jullie eigen lijst.</a:t>
+                  <a:srgbClr val="C2C8D2"/>
+                </a:solidFill>
+                <a:latin typeface="Arial" pitchFamily="34" charset="0"/>
+                <a:ea typeface="Arial" pitchFamily="34" charset="-122"/>
+                <a:cs typeface="Arial" pitchFamily="34" charset="-120"/>
+              </a:rPr>
+              <a:t>Eén uur van jullie om het verhaal en de doelgroep scherp te krijgen. Daarna kunnen wij aan de slag.</a:t>
             </a:r>
             <a:endParaRPr lang="en-US" sz="1050" dirty="0"/>
           </a:p>
@@ -3419,13 +3296,13 @@
       </p:sp>
       <p:sp>
         <p:nvSpPr>
-          <p:cNvPr id="17" name="Shape 13"/>
+          <p:cNvPr id="13" name="Shape 9"/>
           <p:cNvSpPr/>
           <p:nvPr/>
         </p:nvSpPr>
         <p:spPr>
           <a:xfrm>
-            <a:off x="609598" y="4502139"/>
+            <a:off x="6184885" y="2793993"/>
             <a:ext cx="5397487" cy="1530346"/>
           </a:xfrm>
           <a:prstGeom prst="roundRect">
@@ -3441,13 +3318,13 @@
       </p:sp>
       <p:sp>
         <p:nvSpPr>
-          <p:cNvPr id="18" name="Shape 14"/>
+          <p:cNvPr id="14" name="Shape 10"/>
           <p:cNvSpPr/>
           <p:nvPr/>
         </p:nvSpPr>
         <p:spPr>
           <a:xfrm>
-            <a:off x="939798" y="4806938"/>
+            <a:off x="6515084" y="3098792"/>
             <a:ext cx="380999" cy="380999"/>
           </a:xfrm>
           <a:prstGeom prst="roundRect">
@@ -3463,7 +3340,7 @@
       </p:sp>
       <p:pic>
         <p:nvPicPr>
-          <p:cNvPr id="19" name="Image 2" descr="preencoded.png">    </p:cNvPr>
+          <p:cNvPr id="15" name="Image 2" descr="preencoded.png">    </p:cNvPr>
           <p:cNvPicPr>
             <a:picLocks noChangeAspect="1"/>
           </p:cNvPicPr>
@@ -3477,7 +3354,7 @@
         </p:blipFill>
         <p:spPr>
           <a:xfrm>
-            <a:off x="1035047" y="4902188"/>
+            <a:off x="6610333" y="3194042"/>
             <a:ext cx="190500" cy="190500"/>
           </a:xfrm>
           <a:prstGeom prst="rect">
@@ -3487,13 +3364,13 @@
       </p:pic>
       <p:sp>
         <p:nvSpPr>
-          <p:cNvPr id="20" name="Text 15"/>
-          <p:cNvSpPr txBox="1"/>
-          <p:nvPr/>
-        </p:nvSpPr>
-        <p:spPr>
-          <a:xfrm>
-            <a:off x="1549396" y="4781538"/>
+          <p:cNvPr id="16" name="Text 11"/>
+          <p:cNvSpPr txBox="1"/>
+          <p:nvPr/>
+        </p:nvSpPr>
+        <p:spPr>
+          <a:xfrm>
+            <a:off x="7124682" y="3073392"/>
             <a:ext cx="4127490" cy="279399"/>
           </a:xfrm>
           <a:prstGeom prst="rect">
@@ -3518,7 +3395,7 @@
                 <a:ea typeface="Arial" pitchFamily="34" charset="-122"/>
                 <a:cs typeface="Arial" pitchFamily="34" charset="-120"/>
               </a:rPr>
-              <a:t>Akkoord op het script</a:t>
+              <a:t>Uitsluitlijst</a:t>
             </a:r>
             <a:endParaRPr lang="en-US" sz="1450" dirty="0"/>
           </a:p>
@@ -3526,13 +3403,13 @@
       </p:sp>
       <p:sp>
         <p:nvSpPr>
-          <p:cNvPr id="21" name="Text 16"/>
-          <p:cNvSpPr txBox="1"/>
-          <p:nvPr/>
-        </p:nvSpPr>
-        <p:spPr>
-          <a:xfrm>
-            <a:off x="1549396" y="5111737"/>
+          <p:cNvPr id="17" name="Text 12"/>
+          <p:cNvSpPr txBox="1"/>
+          <p:nvPr/>
+        </p:nvSpPr>
+        <p:spPr>
+          <a:xfrm>
+            <a:off x="7124682" y="3403591"/>
             <a:ext cx="4063990" cy="698498"/>
           </a:xfrm>
           <a:prstGeom prst="rect">
@@ -3560,7 +3437,7 @@
                 <a:ea typeface="Arial" pitchFamily="34" charset="-122"/>
                 <a:cs typeface="Arial" pitchFamily="34" charset="-120"/>
               </a:rPr>
-              <a:t>Wij schrijven het, jullie lezen het door. Zo staat er niets in dat jullie niet zouden zeggen.</a:t>
+              <a:t>De kantoren die jullie zelf al benaderen, inclusief de twintig van jullie eigen lijst.</a:t>
             </a:r>
             <a:endParaRPr lang="en-US" sz="1050" dirty="0"/>
           </a:p>
@@ -3568,13 +3445,13 @@
       </p:sp>
       <p:sp>
         <p:nvSpPr>
-          <p:cNvPr id="22" name="Shape 17"/>
+          <p:cNvPr id="18" name="Shape 13"/>
           <p:cNvSpPr/>
           <p:nvPr/>
         </p:nvSpPr>
         <p:spPr>
           <a:xfrm>
-            <a:off x="6184885" y="4502139"/>
+            <a:off x="609598" y="4502139"/>
             <a:ext cx="5397487" cy="1530346"/>
           </a:xfrm>
           <a:prstGeom prst="roundRect">
@@ -3590,13 +3467,13 @@
       </p:sp>
       <p:sp>
         <p:nvSpPr>
-          <p:cNvPr id="23" name="Shape 18"/>
+          <p:cNvPr id="19" name="Shape 14"/>
           <p:cNvSpPr/>
           <p:nvPr/>
         </p:nvSpPr>
         <p:spPr>
           <a:xfrm>
-            <a:off x="6515084" y="4806938"/>
+            <a:off x="939798" y="4806938"/>
             <a:ext cx="380999" cy="380999"/>
           </a:xfrm>
           <a:prstGeom prst="roundRect">
@@ -3612,7 +3489,7 @@
       </p:sp>
       <p:pic>
         <p:nvPicPr>
-          <p:cNvPr id="24" name="Image 3" descr="preencoded.png">    </p:cNvPr>
+          <p:cNvPr id="20" name="Image 3" descr="preencoded.png">    </p:cNvPr>
           <p:cNvPicPr>
             <a:picLocks noChangeAspect="1"/>
           </p:cNvPicPr>
@@ -3626,6 +3503,155 @@
         </p:blipFill>
         <p:spPr>
           <a:xfrm>
+            <a:off x="1035047" y="4902188"/>
+            <a:ext cx="190500" cy="190500"/>
+          </a:xfrm>
+          <a:prstGeom prst="rect">
+            <a:avLst/>
+          </a:prstGeom>
+        </p:spPr>
+      </p:pic>
+      <p:sp>
+        <p:nvSpPr>
+          <p:cNvPr id="21" name="Text 15"/>
+          <p:cNvSpPr txBox="1"/>
+          <p:nvPr/>
+        </p:nvSpPr>
+        <p:spPr>
+          <a:xfrm>
+            <a:off x="1549396" y="4781538"/>
+            <a:ext cx="4127490" cy="279399"/>
+          </a:xfrm>
+          <a:prstGeom prst="rect">
+            <a:avLst/>
+          </a:prstGeom>
+          <a:noFill/>
+          <a:ln/>
+        </p:spPr>
+        <p:txBody>
+          <a:bodyPr wrap="square" lIns="0" tIns="0" rIns="0" bIns="0" rtlCol="0" anchor="ctr"/>
+          <a:lstStyle/>
+          <a:p>
+            <a:pPr indent="0" marL="0">
+              <a:buNone/>
+            </a:pPr>
+            <a:r>
+              <a:rPr lang="en-US" sz="1450" b="1" dirty="0">
+                <a:solidFill>
+                  <a:srgbClr val="1C2230"/>
+                </a:solidFill>
+                <a:latin typeface="Arial" pitchFamily="34" charset="0"/>
+                <a:ea typeface="Arial" pitchFamily="34" charset="-122"/>
+                <a:cs typeface="Arial" pitchFamily="34" charset="-120"/>
+              </a:rPr>
+              <a:t>Akkoord op het script</a:t>
+            </a:r>
+            <a:endParaRPr lang="en-US" sz="1450" dirty="0"/>
+          </a:p>
+        </p:txBody>
+      </p:sp>
+      <p:sp>
+        <p:nvSpPr>
+          <p:cNvPr id="22" name="Text 16"/>
+          <p:cNvSpPr txBox="1"/>
+          <p:nvPr/>
+        </p:nvSpPr>
+        <p:spPr>
+          <a:xfrm>
+            <a:off x="1549396" y="5111737"/>
+            <a:ext cx="4063990" cy="698498"/>
+          </a:xfrm>
+          <a:prstGeom prst="rect">
+            <a:avLst/>
+          </a:prstGeom>
+          <a:noFill/>
+          <a:ln/>
+        </p:spPr>
+        <p:txBody>
+          <a:bodyPr wrap="square" lIns="0" tIns="0" rIns="0" bIns="0" rtlCol="0" anchor="t"/>
+          <a:lstStyle/>
+          <a:p>
+            <a:pPr indent="0" marL="0">
+              <a:lnSpc>
+                <a:spcPct val="135000"/>
+              </a:lnSpc>
+              <a:buNone/>
+            </a:pPr>
+            <a:r>
+              <a:rPr lang="en-US" sz="1050" dirty="0">
+                <a:solidFill>
+                  <a:srgbClr val="6F6A5C"/>
+                </a:solidFill>
+                <a:latin typeface="Arial" pitchFamily="34" charset="0"/>
+                <a:ea typeface="Arial" pitchFamily="34" charset="-122"/>
+                <a:cs typeface="Arial" pitchFamily="34" charset="-120"/>
+              </a:rPr>
+              <a:t>Wij schrijven het, jullie lezen het door. Zo staat er niets in dat jullie niet zouden zeggen.</a:t>
+            </a:r>
+            <a:endParaRPr lang="en-US" sz="1050" dirty="0"/>
+          </a:p>
+        </p:txBody>
+      </p:sp>
+      <p:sp>
+        <p:nvSpPr>
+          <p:cNvPr id="23" name="Shape 17"/>
+          <p:cNvSpPr/>
+          <p:nvPr/>
+        </p:nvSpPr>
+        <p:spPr>
+          <a:xfrm>
+            <a:off x="6184885" y="4502139"/>
+            <a:ext cx="5397487" cy="1530346"/>
+          </a:xfrm>
+          <a:prstGeom prst="roundRect">
+            <a:avLst>
+              <a:gd name="adj" fmla="val 6639"/>
+            </a:avLst>
+          </a:prstGeom>
+          <a:solidFill>
+            <a:srgbClr val="F8F4EB"/>
+          </a:solidFill>
+          <a:ln/>
+        </p:spPr>
+      </p:sp>
+      <p:sp>
+        <p:nvSpPr>
+          <p:cNvPr id="24" name="Shape 18"/>
+          <p:cNvSpPr/>
+          <p:nvPr/>
+        </p:nvSpPr>
+        <p:spPr>
+          <a:xfrm>
+            <a:off x="6515084" y="4806938"/>
+            <a:ext cx="380999" cy="380999"/>
+          </a:xfrm>
+          <a:prstGeom prst="roundRect">
+            <a:avLst>
+              <a:gd name="adj" fmla="val 23333"/>
+            </a:avLst>
+          </a:prstGeom>
+          <a:solidFill>
+            <a:srgbClr val="DDEBF3"/>
+          </a:solidFill>
+          <a:ln/>
+        </p:spPr>
+      </p:sp>
+      <p:pic>
+        <p:nvPicPr>
+          <p:cNvPr id="25" name="Image 4" descr="preencoded.png">    </p:cNvPr>
+          <p:cNvPicPr>
+            <a:picLocks noChangeAspect="1"/>
+          </p:cNvPicPr>
+          <p:nvPr/>
+        </p:nvPicPr>
+        <p:blipFill>
+          <a:blip r:embed="rId5"/>
+          <a:stretch>
+            <a:fillRect/>
+          </a:stretch>
+        </p:blipFill>
+        <p:spPr>
+          <a:xfrm>
             <a:off x="6610333" y="4902188"/>
             <a:ext cx="190500" cy="190500"/>
           </a:xfrm>
@@ -3636,7 +3662,7 @@
       </p:pic>
       <p:sp>
         <p:nvSpPr>
-          <p:cNvPr id="25" name="Text 19"/>
+          <p:cNvPr id="26" name="Text 19"/>
           <p:cNvSpPr txBox="1"/>
           <p:nvPr/>
         </p:nvSpPr>
@@ -3675,7 +3701,7 @@
       </p:sp>
       <p:sp>
         <p:nvSpPr>
-          <p:cNvPr id="26" name="Text 20"/>
+          <p:cNvPr id="27" name="Text 20"/>
           <p:cNvSpPr txBox="1"/>
           <p:nvPr/>
         </p:nvSpPr>
@@ -3800,224 +3826,9 @@
           </a:p>
         </p:txBody>
       </p:sp>
-      <p:sp>
-        <p:nvSpPr>
-          <p:cNvPr id="3" name="Text 1"/>
-          <p:cNvSpPr txBox="1"/>
-          <p:nvPr/>
-        </p:nvSpPr>
-        <p:spPr>
-          <a:xfrm>
-            <a:off x="609598" y="6381734"/>
-            <a:ext cx="5714986" cy="228599"/>
-          </a:xfrm>
-          <a:prstGeom prst="rect">
-            <a:avLst/>
-          </a:prstGeom>
-          <a:noFill/>
-          <a:ln/>
-        </p:spPr>
-        <p:txBody>
-          <a:bodyPr wrap="square" lIns="0" tIns="0" rIns="0" bIns="0" rtlCol="0" anchor="ctr"/>
-          <a:lstStyle/>
-          <a:p>
-            <a:pPr algn="l" indent="0" marL="0">
-              <a:buNone/>
-            </a:pPr>
-            <a:r>
-              <a:rPr lang="en-US" sz="750" b="1" spc="100" kern="0" dirty="0">
-                <a:solidFill>
-                  <a:srgbClr val="6F6A5C"/>
-                </a:solidFill>
-                <a:latin typeface="Arial" pitchFamily="34" charset="0"/>
-                <a:ea typeface="Arial" pitchFamily="34" charset="-122"/>
-                <a:cs typeface="Arial" pitchFamily="34" charset="-120"/>
-              </a:rPr>
-              <a:t>LINK. · Pilot makelaars · OK Creative Agency</a:t>
-            </a:r>
-            <a:endParaRPr lang="en-US" sz="750" dirty="0"/>
-          </a:p>
-        </p:txBody>
-      </p:sp>
-      <p:sp>
-        <p:nvSpPr>
-          <p:cNvPr id="4" name="Text 2"/>
-          <p:cNvSpPr txBox="1"/>
-          <p:nvPr/>
-        </p:nvSpPr>
-        <p:spPr>
-          <a:xfrm>
-            <a:off x="9677376" y="6381734"/>
-            <a:ext cx="1904995" cy="228599"/>
-          </a:xfrm>
-          <a:prstGeom prst="rect">
-            <a:avLst/>
-          </a:prstGeom>
-          <a:noFill/>
-          <a:ln/>
-        </p:spPr>
-        <p:txBody>
-          <a:bodyPr wrap="square" lIns="0" tIns="0" rIns="0" bIns="0" rtlCol="0" anchor="ctr"/>
-          <a:lstStyle/>
-          <a:p>
-            <a:pPr algn="r" indent="0" marL="0">
-              <a:buNone/>
-            </a:pPr>
-            <a:r>
-              <a:rPr lang="en-US" sz="750" b="1" spc="100" kern="0" dirty="0">
-                <a:solidFill>
-                  <a:srgbClr val="6F6A5C"/>
-                </a:solidFill>
-                <a:latin typeface="Arial" pitchFamily="34" charset="0"/>
-                <a:ea typeface="Arial" pitchFamily="34" charset="-122"/>
-                <a:cs typeface="Arial" pitchFamily="34" charset="-120"/>
-              </a:rPr>
-              <a:t>11 / 12</a:t>
-            </a:r>
-            <a:endParaRPr lang="en-US" sz="750" dirty="0"/>
-          </a:p>
-        </p:txBody>
-      </p:sp>
-      <p:sp>
-        <p:nvSpPr>
-          <p:cNvPr id="5" name="Text 3"/>
-          <p:cNvSpPr txBox="1"/>
-          <p:nvPr/>
-        </p:nvSpPr>
-        <p:spPr>
-          <a:xfrm>
-            <a:off x="609598" y="1206497"/>
-            <a:ext cx="10159975" cy="215899"/>
-          </a:xfrm>
-          <a:prstGeom prst="rect">
-            <a:avLst/>
-          </a:prstGeom>
-          <a:noFill/>
-          <a:ln/>
-        </p:spPr>
-        <p:txBody>
-          <a:bodyPr wrap="square" lIns="0" tIns="0" rIns="0" bIns="0" rtlCol="0" anchor="ctr"/>
-          <a:lstStyle/>
-          <a:p>
-            <a:pPr algn="l" indent="0" marL="0">
-              <a:buNone/>
-            </a:pPr>
-            <a:r>
-              <a:rPr lang="en-US" sz="950" b="1" spc="400" kern="0" dirty="0">
-                <a:solidFill>
-                  <a:srgbClr val="38B6FF"/>
-                </a:solidFill>
-                <a:latin typeface="Arial" pitchFamily="34" charset="0"/>
-                <a:ea typeface="Arial" pitchFamily="34" charset="-122"/>
-                <a:cs typeface="Arial" pitchFamily="34" charset="-120"/>
-              </a:rPr>
-              <a:t>SPELREGELS</a:t>
-            </a:r>
-            <a:endParaRPr lang="en-US" sz="950" dirty="0"/>
-          </a:p>
-        </p:txBody>
-      </p:sp>
-      <p:sp>
-        <p:nvSpPr>
-          <p:cNvPr id="6" name="Text 4"/>
-          <p:cNvSpPr txBox="1"/>
-          <p:nvPr/>
-        </p:nvSpPr>
-        <p:spPr>
-          <a:xfrm>
-            <a:off x="609598" y="1511296"/>
-            <a:ext cx="10972773" cy="1142997"/>
-          </a:xfrm>
-          <a:prstGeom prst="rect">
-            <a:avLst/>
-          </a:prstGeom>
-          <a:noFill/>
-          <a:ln/>
-        </p:spPr>
-        <p:txBody>
-          <a:bodyPr wrap="square" lIns="0" tIns="0" rIns="0" bIns="0" rtlCol="0" anchor="t"/>
-          <a:lstStyle/>
-          <a:p>
-            <a:pPr algn="l" indent="0" marL="0">
-              <a:lnSpc>
-                <a:spcPct val="108000"/>
-              </a:lnSpc>
-              <a:buNone/>
-            </a:pPr>
-            <a:r>
-              <a:rPr lang="en-US" sz="3200" b="1" dirty="0">
-                <a:solidFill>
-                  <a:srgbClr val="1C2230"/>
-                </a:solidFill>
-                <a:latin typeface="Arial" pitchFamily="34" charset="0"/>
-                <a:ea typeface="Arial" pitchFamily="34" charset="-122"/>
-                <a:cs typeface="Arial" pitchFamily="34" charset="-120"/>
-              </a:rPr>
-              <a:t>Transparant en zonder </a:t>
-            </a:r>
-            <a:pPr algn="l" indent="0" marL="0">
-              <a:lnSpc>
-                <a:spcPct val="108000"/>
-              </a:lnSpc>
-              <a:buNone/>
-            </a:pPr>
-            <a:r>
-              <a:rPr lang="en-US" sz="3000" i="1" dirty="0">
-                <a:solidFill>
-                  <a:srgbClr val="1C2230"/>
-                </a:solidFill>
-                <a:latin typeface="Georgia" pitchFamily="34" charset="0"/>
-                <a:ea typeface="Georgia" pitchFamily="34" charset="-122"/>
-                <a:cs typeface="Georgia" pitchFamily="34" charset="-120"/>
-              </a:rPr>
-              <a:t>kleine lettertjes</a:t>
-            </a:r>
-            <a:pPr algn="l" indent="0" marL="0">
-              <a:lnSpc>
-                <a:spcPct val="108000"/>
-              </a:lnSpc>
-              <a:buNone/>
-            </a:pPr>
-            <a:r>
-              <a:rPr lang="en-US" sz="3200" b="1" dirty="0">
-                <a:solidFill>
-                  <a:srgbClr val="1C2230"/>
-                </a:solidFill>
-                <a:latin typeface="Arial" pitchFamily="34" charset="0"/>
-                <a:ea typeface="Arial" pitchFamily="34" charset="-122"/>
-                <a:cs typeface="Arial" pitchFamily="34" charset="-120"/>
-              </a:rPr>
-              <a:t>.</a:t>
-            </a:r>
-            <a:endParaRPr lang="en-US" sz="3200" dirty="0"/>
-          </a:p>
-        </p:txBody>
-      </p:sp>
-      <p:sp>
-        <p:nvSpPr>
-          <p:cNvPr id="7" name="Shape 5"/>
-          <p:cNvSpPr/>
-          <p:nvPr/>
-        </p:nvSpPr>
-        <p:spPr>
-          <a:xfrm>
-            <a:off x="609598" y="2819393"/>
-            <a:ext cx="253999" cy="253999"/>
-          </a:xfrm>
-          <a:prstGeom prst="roundRect">
-            <a:avLst>
-              <a:gd name="adj" fmla="val 25000"/>
-            </a:avLst>
-          </a:prstGeom>
-          <a:solidFill>
-            <a:srgbClr val="DDEBF3"/>
-          </a:solidFill>
-          <a:ln/>
-        </p:spPr>
-      </p:sp>
       <p:pic>
         <p:nvPicPr>
-          <p:cNvPr id="8" name="Image 0" descr="preencoded.png">    </p:cNvPr>
+          <p:cNvPr id="3" name="Image 0" descr="/home/user/Test/assets/okcreative-mark.png">    </p:cNvPr>
           <p:cNvPicPr>
             <a:picLocks noChangeAspect="1"/>
           </p:cNvPicPr>
@@ -4031,8 +3842,8 @@
         </p:blipFill>
         <p:spPr>
           <a:xfrm>
-            <a:off x="666748" y="2876543"/>
-            <a:ext cx="139700" cy="139700"/>
+            <a:off x="11226772" y="393699"/>
+            <a:ext cx="355599" cy="355599"/>
           </a:xfrm>
           <a:prstGeom prst="rect">
             <a:avLst/>
@@ -4041,14 +3852,14 @@
       </p:pic>
       <p:sp>
         <p:nvSpPr>
-          <p:cNvPr id="9" name="Text 6"/>
-          <p:cNvSpPr txBox="1"/>
-          <p:nvPr/>
-        </p:nvSpPr>
-        <p:spPr>
-          <a:xfrm>
-            <a:off x="1015997" y="2793993"/>
-            <a:ext cx="4825988" cy="228599"/>
+          <p:cNvPr id="4" name="Text 1"/>
+          <p:cNvSpPr txBox="1"/>
+          <p:nvPr/>
+        </p:nvSpPr>
+        <p:spPr>
+          <a:xfrm>
+            <a:off x="609598" y="6381734"/>
+            <a:ext cx="5714986" cy="228599"/>
           </a:xfrm>
           <a:prstGeom prst="rect">
             <a:avLst/>
@@ -4060,11 +3871,131 @@
           <a:bodyPr wrap="square" lIns="0" tIns="0" rIns="0" bIns="0" rtlCol="0" anchor="ctr"/>
           <a:lstStyle/>
           <a:p>
-            <a:pPr indent="0" marL="0">
-              <a:buNone/>
-            </a:pPr>
-            <a:r>
-              <a:rPr lang="en-US" sz="1200" b="1" dirty="0">
+            <a:pPr algn="l" indent="0" marL="0">
+              <a:buNone/>
+            </a:pPr>
+            <a:r>
+              <a:rPr lang="en-US" sz="750" b="1" spc="100" kern="0" dirty="0">
+                <a:solidFill>
+                  <a:srgbClr val="6F6A5C"/>
+                </a:solidFill>
+                <a:latin typeface="Arial" pitchFamily="34" charset="0"/>
+                <a:ea typeface="Arial" pitchFamily="34" charset="-122"/>
+                <a:cs typeface="Arial" pitchFamily="34" charset="-120"/>
+              </a:rPr>
+              <a:t>LINK. · Pilot makelaars · OK Creative Agency</a:t>
+            </a:r>
+            <a:endParaRPr lang="en-US" sz="750" dirty="0"/>
+          </a:p>
+        </p:txBody>
+      </p:sp>
+      <p:sp>
+        <p:nvSpPr>
+          <p:cNvPr id="5" name="Text 2"/>
+          <p:cNvSpPr txBox="1"/>
+          <p:nvPr/>
+        </p:nvSpPr>
+        <p:spPr>
+          <a:xfrm>
+            <a:off x="9677376" y="6381734"/>
+            <a:ext cx="1904995" cy="228599"/>
+          </a:xfrm>
+          <a:prstGeom prst="rect">
+            <a:avLst/>
+          </a:prstGeom>
+          <a:noFill/>
+          <a:ln/>
+        </p:spPr>
+        <p:txBody>
+          <a:bodyPr wrap="square" lIns="0" tIns="0" rIns="0" bIns="0" rtlCol="0" anchor="ctr"/>
+          <a:lstStyle/>
+          <a:p>
+            <a:pPr algn="r" indent="0" marL="0">
+              <a:buNone/>
+            </a:pPr>
+            <a:r>
+              <a:rPr lang="en-US" sz="750" b="1" spc="100" kern="0" dirty="0">
+                <a:solidFill>
+                  <a:srgbClr val="6F6A5C"/>
+                </a:solidFill>
+                <a:latin typeface="Arial" pitchFamily="34" charset="0"/>
+                <a:ea typeface="Arial" pitchFamily="34" charset="-122"/>
+                <a:cs typeface="Arial" pitchFamily="34" charset="-120"/>
+              </a:rPr>
+              <a:t>11 / 12</a:t>
+            </a:r>
+            <a:endParaRPr lang="en-US" sz="750" dirty="0"/>
+          </a:p>
+        </p:txBody>
+      </p:sp>
+      <p:sp>
+        <p:nvSpPr>
+          <p:cNvPr id="6" name="Text 3"/>
+          <p:cNvSpPr txBox="1"/>
+          <p:nvPr/>
+        </p:nvSpPr>
+        <p:spPr>
+          <a:xfrm>
+            <a:off x="609598" y="1206497"/>
+            <a:ext cx="10159975" cy="215899"/>
+          </a:xfrm>
+          <a:prstGeom prst="rect">
+            <a:avLst/>
+          </a:prstGeom>
+          <a:noFill/>
+          <a:ln/>
+        </p:spPr>
+        <p:txBody>
+          <a:bodyPr wrap="square" lIns="0" tIns="0" rIns="0" bIns="0" rtlCol="0" anchor="ctr"/>
+          <a:lstStyle/>
+          <a:p>
+            <a:pPr algn="l" indent="0" marL="0">
+              <a:buNone/>
+            </a:pPr>
+            <a:r>
+              <a:rPr lang="en-US" sz="950" b="1" spc="400" kern="0" dirty="0">
+                <a:solidFill>
+                  <a:srgbClr val="38B6FF"/>
+                </a:solidFill>
+                <a:latin typeface="Arial" pitchFamily="34" charset="0"/>
+                <a:ea typeface="Arial" pitchFamily="34" charset="-122"/>
+                <a:cs typeface="Arial" pitchFamily="34" charset="-120"/>
+              </a:rPr>
+              <a:t>SPELREGELS</a:t>
+            </a:r>
+            <a:endParaRPr lang="en-US" sz="950" dirty="0"/>
+          </a:p>
+        </p:txBody>
+      </p:sp>
+      <p:sp>
+        <p:nvSpPr>
+          <p:cNvPr id="7" name="Text 4"/>
+          <p:cNvSpPr txBox="1"/>
+          <p:nvPr/>
+        </p:nvSpPr>
+        <p:spPr>
+          <a:xfrm>
+            <a:off x="609598" y="1511296"/>
+            <a:ext cx="10972773" cy="1142997"/>
+          </a:xfrm>
+          <a:prstGeom prst="rect">
+            <a:avLst/>
+          </a:prstGeom>
+          <a:noFill/>
+          <a:ln/>
+        </p:spPr>
+        <p:txBody>
+          <a:bodyPr wrap="square" lIns="0" tIns="0" rIns="0" bIns="0" rtlCol="0" anchor="t"/>
+          <a:lstStyle/>
+          <a:p>
+            <a:pPr algn="l" indent="0" marL="0">
+              <a:lnSpc>
+                <a:spcPct val="108000"/>
+              </a:lnSpc>
+              <a:buNone/>
+            </a:pPr>
+            <a:r>
+              <a:rPr lang="en-US" sz="3200" b="1" dirty="0">
                 <a:solidFill>
                   <a:srgbClr val="1C2230"/>
                 </a:solidFill>
@@ -4072,63 +4003,55 @@
                 <a:ea typeface="Arial" pitchFamily="34" charset="-122"/>
                 <a:cs typeface="Arial" pitchFamily="34" charset="-120"/>
               </a:rPr>
-              <a:t>Eén vaste prijs</a:t>
-            </a:r>
-            <a:endParaRPr lang="en-US" sz="1200" dirty="0"/>
-          </a:p>
-        </p:txBody>
-      </p:sp>
-      <p:sp>
-        <p:nvSpPr>
-          <p:cNvPr id="10" name="Text 7"/>
-          <p:cNvSpPr txBox="1"/>
-          <p:nvPr/>
-        </p:nvSpPr>
-        <p:spPr>
-          <a:xfrm>
-            <a:off x="1015997" y="3035292"/>
-            <a:ext cx="4825988" cy="355599"/>
-          </a:xfrm>
-          <a:prstGeom prst="rect">
-            <a:avLst/>
-          </a:prstGeom>
-          <a:noFill/>
-          <a:ln/>
-        </p:spPr>
-        <p:txBody>
-          <a:bodyPr wrap="square" lIns="0" tIns="0" rIns="0" bIns="0" rtlCol="0" anchor="t"/>
-          <a:lstStyle/>
-          <a:p>
-            <a:pPr indent="0" marL="0">
+              <a:t>Transparant en zonder </a:t>
+            </a:r>
+            <a:pPr algn="l" indent="0" marL="0">
               <a:lnSpc>
-                <a:spcPct val="130000"/>
+                <a:spcPct val="108000"/>
               </a:lnSpc>
               <a:buNone/>
             </a:pPr>
             <a:r>
-              <a:rPr lang="en-US" sz="950" dirty="0">
-                <a:solidFill>
-                  <a:srgbClr val="6F6A5C"/>
-                </a:solidFill>
-                <a:latin typeface="Arial" pitchFamily="34" charset="0"/>
-                <a:ea typeface="Arial" pitchFamily="34" charset="-122"/>
-                <a:cs typeface="Arial" pitchFamily="34" charset="-120"/>
-              </a:rPr>
-              <a:t>€ 4.455 excl. btw voor de hele pilot van twaalf weken.</a:t>
-            </a:r>
-            <a:endParaRPr lang="en-US" sz="950" dirty="0"/>
-          </a:p>
-        </p:txBody>
-      </p:sp>
-      <p:sp>
-        <p:nvSpPr>
-          <p:cNvPr id="11" name="Shape 8"/>
+              <a:rPr lang="en-US" sz="3000" i="1" dirty="0">
+                <a:solidFill>
+                  <a:srgbClr val="1C2230"/>
+                </a:solidFill>
+                <a:latin typeface="Georgia" pitchFamily="34" charset="0"/>
+                <a:ea typeface="Georgia" pitchFamily="34" charset="-122"/>
+                <a:cs typeface="Georgia" pitchFamily="34" charset="-120"/>
+              </a:rPr>
+              <a:t>kleine lettertjes</a:t>
+            </a:r>
+            <a:pPr algn="l" indent="0" marL="0">
+              <a:lnSpc>
+                <a:spcPct val="108000"/>
+              </a:lnSpc>
+              <a:buNone/>
+            </a:pPr>
+            <a:r>
+              <a:rPr lang="en-US" sz="3200" b="1" dirty="0">
+                <a:solidFill>
+                  <a:srgbClr val="1C2230"/>
+                </a:solidFill>
+                <a:latin typeface="Arial" pitchFamily="34" charset="0"/>
+                <a:ea typeface="Arial" pitchFamily="34" charset="-122"/>
+                <a:cs typeface="Arial" pitchFamily="34" charset="-120"/>
+              </a:rPr>
+              <a:t>.</a:t>
+            </a:r>
+            <a:endParaRPr lang="en-US" sz="3200" dirty="0"/>
+          </a:p>
+        </p:txBody>
+      </p:sp>
+      <p:sp>
+        <p:nvSpPr>
+          <p:cNvPr id="8" name="Shape 5"/>
           <p:cNvSpPr/>
           <p:nvPr/>
         </p:nvSpPr>
         <p:spPr>
           <a:xfrm>
-            <a:off x="6349984" y="2819393"/>
+            <a:off x="609598" y="2819393"/>
             <a:ext cx="253999" cy="253999"/>
           </a:xfrm>
           <a:prstGeom prst="roundRect">
@@ -4144,7 +4067,7 @@
       </p:sp>
       <p:pic>
         <p:nvPicPr>
-          <p:cNvPr id="12" name="Image 1" descr="preencoded.png">    </p:cNvPr>
+          <p:cNvPr id="9" name="Image 1" descr="preencoded.png">    </p:cNvPr>
           <p:cNvPicPr>
             <a:picLocks noChangeAspect="1"/>
           </p:cNvPicPr>
@@ -4158,7 +4081,7 @@
         </p:blipFill>
         <p:spPr>
           <a:xfrm>
-            <a:off x="6407134" y="2876543"/>
+            <a:off x="666748" y="2876543"/>
             <a:ext cx="139700" cy="139700"/>
           </a:xfrm>
           <a:prstGeom prst="rect">
@@ -4168,13 +4091,13 @@
       </p:pic>
       <p:sp>
         <p:nvSpPr>
-          <p:cNvPr id="13" name="Text 9"/>
-          <p:cNvSpPr txBox="1"/>
-          <p:nvPr/>
-        </p:nvSpPr>
-        <p:spPr>
-          <a:xfrm>
-            <a:off x="6756383" y="2793993"/>
+          <p:cNvPr id="10" name="Text 6"/>
+          <p:cNvSpPr txBox="1"/>
+          <p:nvPr/>
+        </p:nvSpPr>
+        <p:spPr>
+          <a:xfrm>
+            <a:off x="1015997" y="2793993"/>
             <a:ext cx="4825988" cy="228599"/>
           </a:xfrm>
           <a:prstGeom prst="rect">
@@ -4199,7 +4122,7 @@
                 <a:ea typeface="Arial" pitchFamily="34" charset="-122"/>
                 <a:cs typeface="Arial" pitchFamily="34" charset="-120"/>
               </a:rPr>
-              <a:t>Tien afspraken</a:t>
+              <a:t>Eén vaste prijs</a:t>
             </a:r>
             <a:endParaRPr lang="en-US" sz="1200" dirty="0"/>
           </a:p>
@@ -4207,13 +4130,13 @@
       </p:sp>
       <p:sp>
         <p:nvSpPr>
-          <p:cNvPr id="14" name="Text 10"/>
-          <p:cNvSpPr txBox="1"/>
-          <p:nvPr/>
-        </p:nvSpPr>
-        <p:spPr>
-          <a:xfrm>
-            <a:off x="6756383" y="3035292"/>
+          <p:cNvPr id="11" name="Text 7"/>
+          <p:cNvSpPr txBox="1"/>
+          <p:nvPr/>
+        </p:nvSpPr>
+        <p:spPr>
+          <a:xfrm>
+            <a:off x="1015997" y="3035292"/>
             <a:ext cx="4825988" cy="355599"/>
           </a:xfrm>
           <a:prstGeom prst="rect">
@@ -4241,7 +4164,7 @@
                 <a:ea typeface="Arial" pitchFamily="34" charset="-122"/>
                 <a:cs typeface="Arial" pitchFamily="34" charset="-120"/>
               </a:rPr>
-              <a:t>Halen we dat niet binnen twaalf weken, dan bellen we door tot ze er staan.</a:t>
+              <a:t>€ 4.455 excl. btw voor de hele pilot van twaalf weken, normaal € 4.950.</a:t>
             </a:r>
             <a:endParaRPr lang="en-US" sz="950" dirty="0"/>
           </a:p>
@@ -4249,36 +4172,13 @@
       </p:sp>
       <p:sp>
         <p:nvSpPr>
-          <p:cNvPr id="15" name="Shape 11"/>
+          <p:cNvPr id="12" name="Shape 8"/>
           <p:cNvSpPr/>
           <p:nvPr/>
         </p:nvSpPr>
         <p:spPr>
           <a:xfrm>
-            <a:off x="609598" y="3428991"/>
-            <a:ext cx="5232387" cy="0"/>
-          </a:xfrm>
-          <a:prstGeom prst="line">
-            <a:avLst/>
-          </a:prstGeom>
-          <a:noFill/>
-          <a:ln w="6350">
-            <a:solidFill>
-              <a:srgbClr val="C9C2B2"/>
-            </a:solidFill>
-            <a:prstDash val="solid"/>
-          </a:ln>
-        </p:spPr>
-      </p:sp>
-      <p:sp>
-        <p:nvSpPr>
-          <p:cNvPr id="16" name="Shape 12"/>
-          <p:cNvSpPr/>
-          <p:nvPr/>
-        </p:nvSpPr>
-        <p:spPr>
-          <a:xfrm>
-            <a:off x="609598" y="3530591"/>
+            <a:off x="6349984" y="2819393"/>
             <a:ext cx="253999" cy="253999"/>
           </a:xfrm>
           <a:prstGeom prst="roundRect">
@@ -4294,7 +4194,7 @@
       </p:sp>
       <p:pic>
         <p:nvPicPr>
-          <p:cNvPr id="17" name="Image 2" descr="preencoded.png">    </p:cNvPr>
+          <p:cNvPr id="13" name="Image 2" descr="preencoded.png">    </p:cNvPr>
           <p:cNvPicPr>
             <a:picLocks noChangeAspect="1"/>
           </p:cNvPicPr>
@@ -4308,7 +4208,7 @@
         </p:blipFill>
         <p:spPr>
           <a:xfrm>
-            <a:off x="666748" y="3587741"/>
+            <a:off x="6407134" y="2876543"/>
             <a:ext cx="139700" cy="139700"/>
           </a:xfrm>
           <a:prstGeom prst="rect">
@@ -4318,13 +4218,13 @@
       </p:pic>
       <p:sp>
         <p:nvSpPr>
-          <p:cNvPr id="18" name="Text 13"/>
-          <p:cNvSpPr txBox="1"/>
-          <p:nvPr/>
-        </p:nvSpPr>
-        <p:spPr>
-          <a:xfrm>
-            <a:off x="1015997" y="3505191"/>
+          <p:cNvPr id="14" name="Text 9"/>
+          <p:cNvSpPr txBox="1"/>
+          <p:nvPr/>
+        </p:nvSpPr>
+        <p:spPr>
+          <a:xfrm>
+            <a:off x="6756383" y="2793993"/>
             <a:ext cx="4825988" cy="228599"/>
           </a:xfrm>
           <a:prstGeom prst="rect">
@@ -4349,7 +4249,7 @@
                 <a:ea typeface="Arial" pitchFamily="34" charset="-122"/>
                 <a:cs typeface="Arial" pitchFamily="34" charset="-120"/>
               </a:rPr>
-              <a:t>Geen opstartkosten</a:t>
+              <a:t>Tien afspraken</a:t>
             </a:r>
             <a:endParaRPr lang="en-US" sz="1200" dirty="0"/>
           </a:p>
@@ -4357,13 +4257,13 @@
       </p:sp>
       <p:sp>
         <p:nvSpPr>
-          <p:cNvPr id="19" name="Text 14"/>
-          <p:cNvSpPr txBox="1"/>
-          <p:nvPr/>
-        </p:nvSpPr>
-        <p:spPr>
-          <a:xfrm>
-            <a:off x="1015997" y="3746491"/>
+          <p:cNvPr id="15" name="Text 10"/>
+          <p:cNvSpPr txBox="1"/>
+          <p:nvPr/>
+        </p:nvSpPr>
+        <p:spPr>
+          <a:xfrm>
+            <a:off x="6756383" y="3035292"/>
             <a:ext cx="4825988" cy="355599"/>
           </a:xfrm>
           <a:prstGeom prst="rect">
@@ -4391,7 +4291,7 @@
                 <a:ea typeface="Arial" pitchFamily="34" charset="-122"/>
                 <a:cs typeface="Arial" pitchFamily="34" charset="-120"/>
               </a:rPr>
-              <a:t>Kick-off, script, lijst, belsysteem en nummer zitten in de prijs.</a:t>
+              <a:t>Halen we dat niet binnen twaalf weken, dan bellen we door tot ze er staan.</a:t>
             </a:r>
             <a:endParaRPr lang="en-US" sz="950" dirty="0"/>
           </a:p>
@@ -4399,13 +4299,13 @@
       </p:sp>
       <p:sp>
         <p:nvSpPr>
-          <p:cNvPr id="20" name="Shape 15"/>
+          <p:cNvPr id="16" name="Shape 11"/>
           <p:cNvSpPr/>
           <p:nvPr/>
         </p:nvSpPr>
         <p:spPr>
           <a:xfrm>
-            <a:off x="6349984" y="3428991"/>
+            <a:off x="609598" y="3428991"/>
             <a:ext cx="5232387" cy="0"/>
           </a:xfrm>
           <a:prstGeom prst="line">
@@ -4422,13 +4322,13 @@
       </p:sp>
       <p:sp>
         <p:nvSpPr>
-          <p:cNvPr id="21" name="Shape 16"/>
+          <p:cNvPr id="17" name="Shape 12"/>
           <p:cNvSpPr/>
           <p:nvPr/>
         </p:nvSpPr>
         <p:spPr>
           <a:xfrm>
-            <a:off x="6349984" y="3530591"/>
+            <a:off x="609598" y="3530591"/>
             <a:ext cx="253999" cy="253999"/>
           </a:xfrm>
           <a:prstGeom prst="roundRect">
@@ -4444,7 +4344,7 @@
       </p:sp>
       <p:pic>
         <p:nvPicPr>
-          <p:cNvPr id="22" name="Image 3" descr="preencoded.png">    </p:cNvPr>
+          <p:cNvPr id="18" name="Image 3" descr="preencoded.png">    </p:cNvPr>
           <p:cNvPicPr>
             <a:picLocks noChangeAspect="1"/>
           </p:cNvPicPr>
@@ -4458,7 +4358,7 @@
         </p:blipFill>
         <p:spPr>
           <a:xfrm>
-            <a:off x="6407134" y="3587741"/>
+            <a:off x="666748" y="3587741"/>
             <a:ext cx="139700" cy="139700"/>
           </a:xfrm>
           <a:prstGeom prst="rect">
@@ -4468,13 +4368,13 @@
       </p:pic>
       <p:sp>
         <p:nvSpPr>
-          <p:cNvPr id="23" name="Text 17"/>
-          <p:cNvSpPr txBox="1"/>
-          <p:nvPr/>
-        </p:nvSpPr>
-        <p:spPr>
-          <a:xfrm>
-            <a:off x="6756383" y="3505191"/>
+          <p:cNvPr id="19" name="Text 13"/>
+          <p:cNvSpPr txBox="1"/>
+          <p:nvPr/>
+        </p:nvSpPr>
+        <p:spPr>
+          <a:xfrm>
+            <a:off x="1015997" y="3505191"/>
             <a:ext cx="4825988" cy="228599"/>
           </a:xfrm>
           <a:prstGeom prst="rect">
@@ -4499,7 +4399,7 @@
                 <a:ea typeface="Arial" pitchFamily="34" charset="-122"/>
                 <a:cs typeface="Arial" pitchFamily="34" charset="-120"/>
               </a:rPr>
-              <a:t>Geen kosten per afspraak</a:t>
+              <a:t>Geen opstartkosten</a:t>
             </a:r>
             <a:endParaRPr lang="en-US" sz="1200" dirty="0"/>
           </a:p>
@@ -4507,13 +4407,13 @@
       </p:sp>
       <p:sp>
         <p:nvSpPr>
-          <p:cNvPr id="24" name="Text 18"/>
-          <p:cNvSpPr txBox="1"/>
-          <p:nvPr/>
-        </p:nvSpPr>
-        <p:spPr>
-          <a:xfrm>
-            <a:off x="6756383" y="3746491"/>
+          <p:cNvPr id="20" name="Text 14"/>
+          <p:cNvSpPr txBox="1"/>
+          <p:nvPr/>
+        </p:nvSpPr>
+        <p:spPr>
+          <a:xfrm>
+            <a:off x="1015997" y="3746491"/>
             <a:ext cx="4825988" cy="355599"/>
           </a:xfrm>
           <a:prstGeom prst="rect">
@@ -4541,7 +4441,7 @@
                 <a:ea typeface="Arial" pitchFamily="34" charset="-122"/>
                 <a:cs typeface="Arial" pitchFamily="34" charset="-120"/>
               </a:rPr>
-              <a:t>Geen nacalculatie en geen rekening achteraf.</a:t>
+              <a:t>Kick-off, script, lijst, belsysteem en nummer zitten in de prijs.</a:t>
             </a:r>
             <a:endParaRPr lang="en-US" sz="950" dirty="0"/>
           </a:p>
@@ -4549,13 +4449,13 @@
       </p:sp>
       <p:sp>
         <p:nvSpPr>
-          <p:cNvPr id="25" name="Shape 19"/>
+          <p:cNvPr id="21" name="Shape 15"/>
           <p:cNvSpPr/>
           <p:nvPr/>
         </p:nvSpPr>
         <p:spPr>
           <a:xfrm>
-            <a:off x="609598" y="4140190"/>
+            <a:off x="6349984" y="3428991"/>
             <a:ext cx="5232387" cy="0"/>
           </a:xfrm>
           <a:prstGeom prst="line">
@@ -4572,13 +4472,13 @@
       </p:sp>
       <p:sp>
         <p:nvSpPr>
-          <p:cNvPr id="26" name="Shape 20"/>
+          <p:cNvPr id="22" name="Shape 16"/>
           <p:cNvSpPr/>
           <p:nvPr/>
         </p:nvSpPr>
         <p:spPr>
           <a:xfrm>
-            <a:off x="609598" y="4241789"/>
+            <a:off x="6349984" y="3530591"/>
             <a:ext cx="253999" cy="253999"/>
           </a:xfrm>
           <a:prstGeom prst="roundRect">
@@ -4594,7 +4494,7 @@
       </p:sp>
       <p:pic>
         <p:nvPicPr>
-          <p:cNvPr id="27" name="Image 4" descr="preencoded.png">    </p:cNvPr>
+          <p:cNvPr id="23" name="Image 4" descr="preencoded.png">    </p:cNvPr>
           <p:cNvPicPr>
             <a:picLocks noChangeAspect="1"/>
           </p:cNvPicPr>
@@ -4608,7 +4508,7 @@
         </p:blipFill>
         <p:spPr>
           <a:xfrm>
-            <a:off x="666748" y="4298939"/>
+            <a:off x="6407134" y="3587741"/>
             <a:ext cx="139700" cy="139700"/>
           </a:xfrm>
           <a:prstGeom prst="rect">
@@ -4618,13 +4518,13 @@
       </p:pic>
       <p:sp>
         <p:nvSpPr>
-          <p:cNvPr id="28" name="Text 21"/>
-          <p:cNvSpPr txBox="1"/>
-          <p:nvPr/>
-        </p:nvSpPr>
-        <p:spPr>
-          <a:xfrm>
-            <a:off x="1015997" y="4216389"/>
+          <p:cNvPr id="24" name="Text 17"/>
+          <p:cNvSpPr txBox="1"/>
+          <p:nvPr/>
+        </p:nvSpPr>
+        <p:spPr>
+          <a:xfrm>
+            <a:off x="6756383" y="3505191"/>
             <a:ext cx="4825988" cy="228599"/>
           </a:xfrm>
           <a:prstGeom prst="rect">
@@ -4649,7 +4549,7 @@
                 <a:ea typeface="Arial" pitchFamily="34" charset="-122"/>
                 <a:cs typeface="Arial" pitchFamily="34" charset="-120"/>
               </a:rPr>
-              <a:t>Kwalificatie vooraf vastgelegd</a:t>
+              <a:t>Geen kosten per afspraak</a:t>
             </a:r>
             <a:endParaRPr lang="en-US" sz="1200" dirty="0"/>
           </a:p>
@@ -4657,13 +4557,13 @@
       </p:sp>
       <p:sp>
         <p:nvSpPr>
-          <p:cNvPr id="29" name="Text 22"/>
-          <p:cNvSpPr txBox="1"/>
-          <p:nvPr/>
-        </p:nvSpPr>
-        <p:spPr>
-          <a:xfrm>
-            <a:off x="1015997" y="4457689"/>
+          <p:cNvPr id="25" name="Text 18"/>
+          <p:cNvSpPr txBox="1"/>
+          <p:nvPr/>
+        </p:nvSpPr>
+        <p:spPr>
+          <a:xfrm>
+            <a:off x="6756383" y="3746491"/>
             <a:ext cx="4825988" cy="355599"/>
           </a:xfrm>
           <a:prstGeom prst="rect">
@@ -4691,7 +4591,7 @@
                 <a:ea typeface="Arial" pitchFamily="34" charset="-122"/>
                 <a:cs typeface="Arial" pitchFamily="34" charset="-120"/>
               </a:rPr>
-              <a:t>Bij de kick-off bepalen we samen wanneer een afspraak meetelt.</a:t>
+              <a:t>Geen nacalculatie en geen rekening achteraf.</a:t>
             </a:r>
             <a:endParaRPr lang="en-US" sz="950" dirty="0"/>
           </a:p>
@@ -4699,13 +4599,13 @@
       </p:sp>
       <p:sp>
         <p:nvSpPr>
-          <p:cNvPr id="30" name="Shape 23"/>
+          <p:cNvPr id="26" name="Shape 19"/>
           <p:cNvSpPr/>
           <p:nvPr/>
         </p:nvSpPr>
         <p:spPr>
           <a:xfrm>
-            <a:off x="6349984" y="4140190"/>
+            <a:off x="609598" y="4140190"/>
             <a:ext cx="5232387" cy="0"/>
           </a:xfrm>
           <a:prstGeom prst="line">
@@ -4722,13 +4622,13 @@
       </p:sp>
       <p:sp>
         <p:nvSpPr>
-          <p:cNvPr id="31" name="Shape 24"/>
+          <p:cNvPr id="27" name="Shape 20"/>
           <p:cNvSpPr/>
           <p:nvPr/>
         </p:nvSpPr>
         <p:spPr>
           <a:xfrm>
-            <a:off x="6349984" y="4241789"/>
+            <a:off x="609598" y="4241789"/>
             <a:ext cx="253999" cy="253999"/>
           </a:xfrm>
           <a:prstGeom prst="roundRect">
@@ -4744,7 +4644,7 @@
       </p:sp>
       <p:pic>
         <p:nvPicPr>
-          <p:cNvPr id="32" name="Image 5" descr="preencoded.png">    </p:cNvPr>
+          <p:cNvPr id="28" name="Image 5" descr="preencoded.png">    </p:cNvPr>
           <p:cNvPicPr>
             <a:picLocks noChangeAspect="1"/>
           </p:cNvPicPr>
@@ -4758,7 +4658,7 @@
         </p:blipFill>
         <p:spPr>
           <a:xfrm>
-            <a:off x="6407134" y="4298939"/>
+            <a:off x="666748" y="4298939"/>
             <a:ext cx="139700" cy="139700"/>
           </a:xfrm>
           <a:prstGeom prst="rect">
@@ -4768,13 +4668,13 @@
       </p:pic>
       <p:sp>
         <p:nvSpPr>
-          <p:cNvPr id="33" name="Text 25"/>
-          <p:cNvSpPr txBox="1"/>
-          <p:nvPr/>
-        </p:nvSpPr>
-        <p:spPr>
-          <a:xfrm>
-            <a:off x="6756383" y="4216389"/>
+          <p:cNvPr id="29" name="Text 21"/>
+          <p:cNvSpPr txBox="1"/>
+          <p:nvPr/>
+        </p:nvSpPr>
+        <p:spPr>
+          <a:xfrm>
+            <a:off x="1015997" y="4216389"/>
             <a:ext cx="4825988" cy="228599"/>
           </a:xfrm>
           <a:prstGeom prst="rect">
@@ -4799,7 +4699,7 @@
                 <a:ea typeface="Arial" pitchFamily="34" charset="-122"/>
                 <a:cs typeface="Arial" pitchFamily="34" charset="-120"/>
               </a:rPr>
-              <a:t>Bestaande relaties blijven van jullie</a:t>
+              <a:t>Kwalificatie vooraf vastgelegd</a:t>
             </a:r>
             <a:endParaRPr lang="en-US" sz="1200" dirty="0"/>
           </a:p>
@@ -4807,13 +4707,13 @@
       </p:sp>
       <p:sp>
         <p:nvSpPr>
-          <p:cNvPr id="34" name="Text 26"/>
-          <p:cNvSpPr txBox="1"/>
-          <p:nvPr/>
-        </p:nvSpPr>
-        <p:spPr>
-          <a:xfrm>
-            <a:off x="6756383" y="4457689"/>
+          <p:cNvPr id="30" name="Text 22"/>
+          <p:cNvSpPr txBox="1"/>
+          <p:nvPr/>
+        </p:nvSpPr>
+        <p:spPr>
+          <a:xfrm>
+            <a:off x="1015997" y="4457689"/>
             <a:ext cx="4825988" cy="355599"/>
           </a:xfrm>
           <a:prstGeom prst="rect">
@@ -4841,7 +4741,7 @@
                 <a:ea typeface="Arial" pitchFamily="34" charset="-122"/>
                 <a:cs typeface="Arial" pitchFamily="34" charset="-120"/>
               </a:rPr>
-              <a:t>Uitsluitlijst vooraf, die kantoren benaderen wij niet.</a:t>
+              <a:t>Bij de kick-off bepalen we samen wanneer een afspraak meetelt.</a:t>
             </a:r>
             <a:endParaRPr lang="en-US" sz="950" dirty="0"/>
           </a:p>
@@ -4849,13 +4749,13 @@
       </p:sp>
       <p:sp>
         <p:nvSpPr>
-          <p:cNvPr id="35" name="Shape 27"/>
+          <p:cNvPr id="31" name="Shape 23"/>
           <p:cNvSpPr/>
           <p:nvPr/>
         </p:nvSpPr>
         <p:spPr>
           <a:xfrm>
-            <a:off x="609598" y="4851388"/>
+            <a:off x="6349984" y="4140190"/>
             <a:ext cx="5232387" cy="0"/>
           </a:xfrm>
           <a:prstGeom prst="line">
@@ -4872,13 +4772,13 @@
       </p:sp>
       <p:sp>
         <p:nvSpPr>
-          <p:cNvPr id="36" name="Shape 28"/>
+          <p:cNvPr id="32" name="Shape 24"/>
           <p:cNvSpPr/>
           <p:nvPr/>
         </p:nvSpPr>
         <p:spPr>
           <a:xfrm>
-            <a:off x="609598" y="4952988"/>
+            <a:off x="6349984" y="4241789"/>
             <a:ext cx="253999" cy="253999"/>
           </a:xfrm>
           <a:prstGeom prst="roundRect">
@@ -4894,7 +4794,7 @@
       </p:sp>
       <p:pic>
         <p:nvPicPr>
-          <p:cNvPr id="37" name="Image 6" descr="preencoded.png">    </p:cNvPr>
+          <p:cNvPr id="33" name="Image 6" descr="preencoded.png">    </p:cNvPr>
           <p:cNvPicPr>
             <a:picLocks noChangeAspect="1"/>
           </p:cNvPicPr>
@@ -4908,7 +4808,7 @@
         </p:blipFill>
         <p:spPr>
           <a:xfrm>
-            <a:off x="666748" y="5010137"/>
+            <a:off x="6407134" y="4298939"/>
             <a:ext cx="139700" cy="139700"/>
           </a:xfrm>
           <a:prstGeom prst="rect">
@@ -4918,13 +4818,13 @@
       </p:pic>
       <p:sp>
         <p:nvSpPr>
-          <p:cNvPr id="38" name="Text 29"/>
-          <p:cNvSpPr txBox="1"/>
-          <p:nvPr/>
-        </p:nvSpPr>
-        <p:spPr>
-          <a:xfrm>
-            <a:off x="1015997" y="4927588"/>
+          <p:cNvPr id="34" name="Text 25"/>
+          <p:cNvSpPr txBox="1"/>
+          <p:nvPr/>
+        </p:nvSpPr>
+        <p:spPr>
+          <a:xfrm>
+            <a:off x="6756383" y="4216389"/>
             <a:ext cx="4825988" cy="228599"/>
           </a:xfrm>
           <a:prstGeom prst="rect">
@@ -4949,7 +4849,7 @@
                 <a:ea typeface="Arial" pitchFamily="34" charset="-122"/>
                 <a:cs typeface="Arial" pitchFamily="34" charset="-120"/>
               </a:rPr>
-              <a:t>De lijst blijft van jullie</a:t>
+              <a:t>Bestaande relaties blijven van jullie</a:t>
             </a:r>
             <a:endParaRPr lang="en-US" sz="1200" dirty="0"/>
           </a:p>
@@ -4957,13 +4857,13 @@
       </p:sp>
       <p:sp>
         <p:nvSpPr>
-          <p:cNvPr id="39" name="Text 30"/>
-          <p:cNvSpPr txBox="1"/>
-          <p:nvPr/>
-        </p:nvSpPr>
-        <p:spPr>
-          <a:xfrm>
-            <a:off x="1015997" y="5168887"/>
+          <p:cNvPr id="35" name="Text 26"/>
+          <p:cNvSpPr txBox="1"/>
+          <p:nvPr/>
+        </p:nvSpPr>
+        <p:spPr>
+          <a:xfrm>
+            <a:off x="6756383" y="4457689"/>
             <a:ext cx="4825988" cy="355599"/>
           </a:xfrm>
           <a:prstGeom prst="rect">
@@ -4991,7 +4891,7 @@
                 <a:ea typeface="Arial" pitchFamily="34" charset="-122"/>
                 <a:cs typeface="Arial" pitchFamily="34" charset="-120"/>
               </a:rPr>
-              <a:t>Na afloop krijgen jullie de volledige bellijst met status en notities.</a:t>
+              <a:t>Uitsluitlijst vooraf, die kantoren benaderen wij niet.</a:t>
             </a:r>
             <a:endParaRPr lang="en-US" sz="950" dirty="0"/>
           </a:p>
@@ -4999,13 +4899,13 @@
       </p:sp>
       <p:sp>
         <p:nvSpPr>
-          <p:cNvPr id="40" name="Shape 31"/>
+          <p:cNvPr id="36" name="Shape 27"/>
           <p:cNvSpPr/>
           <p:nvPr/>
         </p:nvSpPr>
         <p:spPr>
           <a:xfrm>
-            <a:off x="6349984" y="4851388"/>
+            <a:off x="609598" y="4851388"/>
             <a:ext cx="5232387" cy="0"/>
           </a:xfrm>
           <a:prstGeom prst="line">
@@ -5022,13 +4922,13 @@
       </p:sp>
       <p:sp>
         <p:nvSpPr>
-          <p:cNvPr id="41" name="Shape 32"/>
+          <p:cNvPr id="37" name="Shape 28"/>
           <p:cNvSpPr/>
           <p:nvPr/>
         </p:nvSpPr>
         <p:spPr>
           <a:xfrm>
-            <a:off x="6349984" y="4952988"/>
+            <a:off x="609598" y="4952988"/>
             <a:ext cx="253999" cy="253999"/>
           </a:xfrm>
           <a:prstGeom prst="roundRect">
@@ -5044,7 +4944,7 @@
       </p:sp>
       <p:pic>
         <p:nvPicPr>
-          <p:cNvPr id="42" name="Image 7" descr="preencoded.png">    </p:cNvPr>
+          <p:cNvPr id="38" name="Image 7" descr="preencoded.png">    </p:cNvPr>
           <p:cNvPicPr>
             <a:picLocks noChangeAspect="1"/>
           </p:cNvPicPr>
@@ -5058,6 +4958,156 @@
         </p:blipFill>
         <p:spPr>
           <a:xfrm>
+            <a:off x="666748" y="5010137"/>
+            <a:ext cx="139700" cy="139700"/>
+          </a:xfrm>
+          <a:prstGeom prst="rect">
+            <a:avLst/>
+          </a:prstGeom>
+        </p:spPr>
+      </p:pic>
+      <p:sp>
+        <p:nvSpPr>
+          <p:cNvPr id="39" name="Text 29"/>
+          <p:cNvSpPr txBox="1"/>
+          <p:nvPr/>
+        </p:nvSpPr>
+        <p:spPr>
+          <a:xfrm>
+            <a:off x="1015997" y="4927588"/>
+            <a:ext cx="4825988" cy="228599"/>
+          </a:xfrm>
+          <a:prstGeom prst="rect">
+            <a:avLst/>
+          </a:prstGeom>
+          <a:noFill/>
+          <a:ln/>
+        </p:spPr>
+        <p:txBody>
+          <a:bodyPr wrap="square" lIns="0" tIns="0" rIns="0" bIns="0" rtlCol="0" anchor="ctr"/>
+          <a:lstStyle/>
+          <a:p>
+            <a:pPr indent="0" marL="0">
+              <a:buNone/>
+            </a:pPr>
+            <a:r>
+              <a:rPr lang="en-US" sz="1200" b="1" dirty="0">
+                <a:solidFill>
+                  <a:srgbClr val="1C2230"/>
+                </a:solidFill>
+                <a:latin typeface="Arial" pitchFamily="34" charset="0"/>
+                <a:ea typeface="Arial" pitchFamily="34" charset="-122"/>
+                <a:cs typeface="Arial" pitchFamily="34" charset="-120"/>
+              </a:rPr>
+              <a:t>De lijst blijft van jullie</a:t>
+            </a:r>
+            <a:endParaRPr lang="en-US" sz="1200" dirty="0"/>
+          </a:p>
+        </p:txBody>
+      </p:sp>
+      <p:sp>
+        <p:nvSpPr>
+          <p:cNvPr id="40" name="Text 30"/>
+          <p:cNvSpPr txBox="1"/>
+          <p:nvPr/>
+        </p:nvSpPr>
+        <p:spPr>
+          <a:xfrm>
+            <a:off x="1015997" y="5168887"/>
+            <a:ext cx="4825988" cy="355599"/>
+          </a:xfrm>
+          <a:prstGeom prst="rect">
+            <a:avLst/>
+          </a:prstGeom>
+          <a:noFill/>
+          <a:ln/>
+        </p:spPr>
+        <p:txBody>
+          <a:bodyPr wrap="square" lIns="0" tIns="0" rIns="0" bIns="0" rtlCol="0" anchor="t"/>
+          <a:lstStyle/>
+          <a:p>
+            <a:pPr indent="0" marL="0">
+              <a:lnSpc>
+                <a:spcPct val="130000"/>
+              </a:lnSpc>
+              <a:buNone/>
+            </a:pPr>
+            <a:r>
+              <a:rPr lang="en-US" sz="950" dirty="0">
+                <a:solidFill>
+                  <a:srgbClr val="6F6A5C"/>
+                </a:solidFill>
+                <a:latin typeface="Arial" pitchFamily="34" charset="0"/>
+                <a:ea typeface="Arial" pitchFamily="34" charset="-122"/>
+                <a:cs typeface="Arial" pitchFamily="34" charset="-120"/>
+              </a:rPr>
+              <a:t>Na afloop krijgen jullie de volledige bellijst met status en notities.</a:t>
+            </a:r>
+            <a:endParaRPr lang="en-US" sz="950" dirty="0"/>
+          </a:p>
+        </p:txBody>
+      </p:sp>
+      <p:sp>
+        <p:nvSpPr>
+          <p:cNvPr id="41" name="Shape 31"/>
+          <p:cNvSpPr/>
+          <p:nvPr/>
+        </p:nvSpPr>
+        <p:spPr>
+          <a:xfrm>
+            <a:off x="6349984" y="4851388"/>
+            <a:ext cx="5232387" cy="0"/>
+          </a:xfrm>
+          <a:prstGeom prst="line">
+            <a:avLst/>
+          </a:prstGeom>
+          <a:noFill/>
+          <a:ln w="6350">
+            <a:solidFill>
+              <a:srgbClr val="C9C2B2"/>
+            </a:solidFill>
+            <a:prstDash val="solid"/>
+          </a:ln>
+        </p:spPr>
+      </p:sp>
+      <p:sp>
+        <p:nvSpPr>
+          <p:cNvPr id="42" name="Shape 32"/>
+          <p:cNvSpPr/>
+          <p:nvPr/>
+        </p:nvSpPr>
+        <p:spPr>
+          <a:xfrm>
+            <a:off x="6349984" y="4952988"/>
+            <a:ext cx="253999" cy="253999"/>
+          </a:xfrm>
+          <a:prstGeom prst="roundRect">
+            <a:avLst>
+              <a:gd name="adj" fmla="val 25000"/>
+            </a:avLst>
+          </a:prstGeom>
+          <a:solidFill>
+            <a:srgbClr val="DDEBF3"/>
+          </a:solidFill>
+          <a:ln/>
+        </p:spPr>
+      </p:sp>
+      <p:pic>
+        <p:nvPicPr>
+          <p:cNvPr id="43" name="Image 8" descr="preencoded.png">    </p:cNvPr>
+          <p:cNvPicPr>
+            <a:picLocks noChangeAspect="1"/>
+          </p:cNvPicPr>
+          <p:nvPr/>
+        </p:nvPicPr>
+        <p:blipFill>
+          <a:blip r:embed="rId9"/>
+          <a:stretch>
+            <a:fillRect/>
+          </a:stretch>
+        </p:blipFill>
+        <p:spPr>
+          <a:xfrm>
             <a:off x="6407134" y="5010137"/>
             <a:ext cx="139700" cy="139700"/>
           </a:xfrm>
@@ -5068,7 +5118,7 @@
       </p:pic>
       <p:sp>
         <p:nvSpPr>
-          <p:cNvPr id="43" name="Text 33"/>
+          <p:cNvPr id="44" name="Text 33"/>
           <p:cNvSpPr txBox="1"/>
           <p:nvPr/>
         </p:nvSpPr>
@@ -5107,7 +5157,7 @@
       </p:sp>
       <p:sp>
         <p:nvSpPr>
-          <p:cNvPr id="44" name="Text 34"/>
+          <p:cNvPr id="45" name="Text 34"/>
           <p:cNvSpPr txBox="1"/>
           <p:nvPr/>
         </p:nvSpPr>
@@ -5232,9 +5282,33 @@
           </a:p>
         </p:txBody>
       </p:sp>
-      <p:sp>
-        <p:nvSpPr>
-          <p:cNvPr id="3" name="Text 1"/>
+      <p:pic>
+        <p:nvPicPr>
+          <p:cNvPr id="3" name="Image 0" descr="/home/user/Test/assets/okcreative-mark.png">    </p:cNvPr>
+          <p:cNvPicPr>
+            <a:picLocks noChangeAspect="1"/>
+          </p:cNvPicPr>
+          <p:nvPr/>
+        </p:nvPicPr>
+        <p:blipFill>
+          <a:blip r:embed="rId1"/>
+          <a:stretch>
+            <a:fillRect/>
+          </a:stretch>
+        </p:blipFill>
+        <p:spPr>
+          <a:xfrm>
+            <a:off x="11226772" y="393699"/>
+            <a:ext cx="355599" cy="355599"/>
+          </a:xfrm>
+          <a:prstGeom prst="rect">
+            <a:avLst/>
+          </a:prstGeom>
+        </p:spPr>
+      </p:pic>
+      <p:sp>
+        <p:nvSpPr>
+          <p:cNvPr id="4" name="Text 1"/>
           <p:cNvSpPr txBox="1"/>
           <p:nvPr/>
         </p:nvSpPr>
@@ -5273,7 +5347,7 @@
       </p:sp>
       <p:sp>
         <p:nvSpPr>
-          <p:cNvPr id="4" name="Text 2"/>
+          <p:cNvPr id="5" name="Text 2"/>
           <p:cNvSpPr txBox="1"/>
           <p:nvPr/>
         </p:nvSpPr>
@@ -5312,7 +5386,7 @@
       </p:sp>
       <p:sp>
         <p:nvSpPr>
-          <p:cNvPr id="5" name="Text 3"/>
+          <p:cNvPr id="6" name="Text 3"/>
           <p:cNvSpPr txBox="1"/>
           <p:nvPr/>
         </p:nvSpPr>
@@ -5351,7 +5425,7 @@
       </p:sp>
       <p:sp>
         <p:nvSpPr>
-          <p:cNvPr id="6" name="Text 4"/>
+          <p:cNvPr id="7" name="Text 4"/>
           <p:cNvSpPr txBox="1"/>
           <p:nvPr/>
         </p:nvSpPr>
@@ -5427,7 +5501,7 @@
       </p:sp>
       <p:sp>
         <p:nvSpPr>
-          <p:cNvPr id="7" name="Shape 5"/>
+          <p:cNvPr id="8" name="Shape 5"/>
           <p:cNvSpPr/>
           <p:nvPr/>
         </p:nvSpPr>
@@ -5449,7 +5523,7 @@
       </p:sp>
       <p:sp>
         <p:nvSpPr>
-          <p:cNvPr id="8" name="Text 6"/>
+          <p:cNvPr id="9" name="Text 6"/>
           <p:cNvSpPr txBox="1"/>
           <p:nvPr/>
         </p:nvSpPr>
@@ -5488,7 +5562,7 @@
       </p:sp>
       <p:sp>
         <p:nvSpPr>
-          <p:cNvPr id="9" name="Text 7"/>
+          <p:cNvPr id="10" name="Text 7"/>
           <p:cNvSpPr txBox="1"/>
           <p:nvPr/>
         </p:nvSpPr>
@@ -5527,7 +5601,7 @@
       </p:sp>
       <p:sp>
         <p:nvSpPr>
-          <p:cNvPr id="10" name="Text 8"/>
+          <p:cNvPr id="11" name="Text 8"/>
           <p:cNvSpPr txBox="1"/>
           <p:nvPr/>
         </p:nvSpPr>
@@ -5569,7 +5643,7 @@
       </p:sp>
       <p:sp>
         <p:nvSpPr>
-          <p:cNvPr id="11" name="Shape 9"/>
+          <p:cNvPr id="12" name="Shape 9"/>
           <p:cNvSpPr/>
           <p:nvPr/>
         </p:nvSpPr>
@@ -5591,7 +5665,7 @@
       </p:sp>
       <p:sp>
         <p:nvSpPr>
-          <p:cNvPr id="12" name="Text 10"/>
+          <p:cNvPr id="13" name="Text 10"/>
           <p:cNvSpPr txBox="1"/>
           <p:nvPr/>
         </p:nvSpPr>
@@ -5630,7 +5704,7 @@
       </p:sp>
       <p:sp>
         <p:nvSpPr>
-          <p:cNvPr id="13" name="Text 11"/>
+          <p:cNvPr id="14" name="Text 11"/>
           <p:cNvSpPr txBox="1"/>
           <p:nvPr/>
         </p:nvSpPr>
@@ -5669,7 +5743,7 @@
       </p:sp>
       <p:sp>
         <p:nvSpPr>
-          <p:cNvPr id="14" name="Text 12"/>
+          <p:cNvPr id="15" name="Text 12"/>
           <p:cNvSpPr txBox="1"/>
           <p:nvPr/>
         </p:nvSpPr>
@@ -5703,7 +5777,7 @@
                 <a:ea typeface="Arial" pitchFamily="34" charset="-122"/>
                 <a:cs typeface="Arial" pitchFamily="34" charset="-120"/>
               </a:rPr>
-              <a:t>Anderhalf tot twee uur met Mark of Frits, plus de uitsluitlijst.</a:t>
+              <a:t>Eén uur van jullie, plus de uitsluitlijst.</a:t>
             </a:r>
             <a:endParaRPr lang="en-US" sz="1100" dirty="0"/>
           </a:p>
@@ -5711,7 +5785,7 @@
       </p:sp>
       <p:sp>
         <p:nvSpPr>
-          <p:cNvPr id="15" name="Shape 13"/>
+          <p:cNvPr id="16" name="Shape 13"/>
           <p:cNvSpPr/>
           <p:nvPr/>
         </p:nvSpPr>
@@ -5733,7 +5807,7 @@
       </p:sp>
       <p:sp>
         <p:nvSpPr>
-          <p:cNvPr id="16" name="Text 14"/>
+          <p:cNvPr id="17" name="Text 14"/>
           <p:cNvSpPr txBox="1"/>
           <p:nvPr/>
         </p:nvSpPr>
@@ -5772,7 +5846,7 @@
       </p:sp>
       <p:sp>
         <p:nvSpPr>
-          <p:cNvPr id="17" name="Text 15"/>
+          <p:cNvPr id="18" name="Text 15"/>
           <p:cNvSpPr txBox="1"/>
           <p:nvPr/>
         </p:nvSpPr>
@@ -5811,7 +5885,7 @@
       </p:sp>
       <p:sp>
         <p:nvSpPr>
-          <p:cNvPr id="18" name="Text 16"/>
+          <p:cNvPr id="19" name="Text 16"/>
           <p:cNvSpPr txBox="1"/>
           <p:nvPr/>
         </p:nvSpPr>
@@ -5853,7 +5927,7 @@
       </p:sp>
       <p:sp>
         <p:nvSpPr>
-          <p:cNvPr id="19" name="Shape 17"/>
+          <p:cNvPr id="20" name="Shape 17"/>
           <p:cNvSpPr/>
           <p:nvPr/>
         </p:nvSpPr>
@@ -5880,7 +5954,7 @@
       </p:sp>
       <p:sp>
         <p:nvSpPr>
-          <p:cNvPr id="20" name="Text 18"/>
+          <p:cNvPr id="21" name="Text 18"/>
           <p:cNvSpPr txBox="1"/>
           <p:nvPr/>
         </p:nvSpPr>
@@ -5919,7 +5993,7 @@
       </p:sp>
       <p:sp>
         <p:nvSpPr>
-          <p:cNvPr id="21" name="Text 19"/>
+          <p:cNvPr id="22" name="Text 19"/>
           <p:cNvSpPr txBox="1"/>
           <p:nvPr/>
         </p:nvSpPr>
@@ -5958,7 +6032,7 @@
       </p:sp>
       <p:sp>
         <p:nvSpPr>
-          <p:cNvPr id="22" name="Text 20"/>
+          <p:cNvPr id="23" name="Text 20"/>
           <p:cNvSpPr txBox="1"/>
           <p:nvPr/>
         </p:nvSpPr>
@@ -5997,7 +6071,7 @@
       </p:sp>
       <p:sp>
         <p:nvSpPr>
-          <p:cNvPr id="23" name="Text 21"/>
+          <p:cNvPr id="24" name="Text 21"/>
           <p:cNvSpPr txBox="1"/>
           <p:nvPr/>
         </p:nvSpPr>
@@ -6036,7 +6110,7 @@
       </p:sp>
       <p:sp>
         <p:nvSpPr>
-          <p:cNvPr id="24" name="Text 22"/>
+          <p:cNvPr id="25" name="Text 22"/>
           <p:cNvSpPr txBox="1"/>
           <p:nvPr/>
         </p:nvSpPr>
@@ -6158,9 +6232,33 @@
           </a:p>
         </p:txBody>
       </p:sp>
-      <p:sp>
-        <p:nvSpPr>
-          <p:cNvPr id="3" name="Text 1"/>
+      <p:pic>
+        <p:nvPicPr>
+          <p:cNvPr id="3" name="Image 0" descr="/home/user/Test/assets/okcreative-mark.png">    </p:cNvPr>
+          <p:cNvPicPr>
+            <a:picLocks noChangeAspect="1"/>
+          </p:cNvPicPr>
+          <p:nvPr/>
+        </p:nvPicPr>
+        <p:blipFill>
+          <a:blip r:embed="rId1"/>
+          <a:stretch>
+            <a:fillRect/>
+          </a:stretch>
+        </p:blipFill>
+        <p:spPr>
+          <a:xfrm>
+            <a:off x="11226772" y="393699"/>
+            <a:ext cx="355599" cy="355599"/>
+          </a:xfrm>
+          <a:prstGeom prst="rect">
+            <a:avLst/>
+          </a:prstGeom>
+        </p:spPr>
+      </p:pic>
+      <p:sp>
+        <p:nvSpPr>
+          <p:cNvPr id="4" name="Text 1"/>
           <p:cNvSpPr txBox="1"/>
           <p:nvPr/>
         </p:nvSpPr>
@@ -6199,7 +6297,7 @@
       </p:sp>
       <p:sp>
         <p:nvSpPr>
-          <p:cNvPr id="4" name="Text 2"/>
+          <p:cNvPr id="5" name="Text 2"/>
           <p:cNvSpPr txBox="1"/>
           <p:nvPr/>
         </p:nvSpPr>
@@ -6238,7 +6336,7 @@
       </p:sp>
       <p:sp>
         <p:nvSpPr>
-          <p:cNvPr id="5" name="Text 3"/>
+          <p:cNvPr id="6" name="Text 3"/>
           <p:cNvSpPr txBox="1"/>
           <p:nvPr/>
         </p:nvSpPr>
@@ -6277,7 +6375,7 @@
       </p:sp>
       <p:sp>
         <p:nvSpPr>
-          <p:cNvPr id="6" name="Text 4"/>
+          <p:cNvPr id="7" name="Text 4"/>
           <p:cNvSpPr txBox="1"/>
           <p:nvPr/>
         </p:nvSpPr>
@@ -6353,7 +6451,7 @@
       </p:sp>
       <p:sp>
         <p:nvSpPr>
-          <p:cNvPr id="7" name="Text 5"/>
+          <p:cNvPr id="8" name="Text 5"/>
           <p:cNvSpPr txBox="1"/>
           <p:nvPr/>
         </p:nvSpPr>
@@ -6418,7 +6516,7 @@
       </p:sp>
       <p:sp>
         <p:nvSpPr>
-          <p:cNvPr id="8" name="Shape 6"/>
+          <p:cNvPr id="9" name="Shape 6"/>
           <p:cNvSpPr/>
           <p:nvPr/>
         </p:nvSpPr>
@@ -6440,7 +6538,7 @@
       </p:sp>
       <p:sp>
         <p:nvSpPr>
-          <p:cNvPr id="9" name="Text 7"/>
+          <p:cNvPr id="10" name="Text 7"/>
           <p:cNvSpPr txBox="1"/>
           <p:nvPr/>
         </p:nvSpPr>
@@ -6479,7 +6577,7 @@
       </p:sp>
       <p:sp>
         <p:nvSpPr>
-          <p:cNvPr id="10" name="Text 8"/>
+          <p:cNvPr id="11" name="Text 8"/>
           <p:cNvSpPr txBox="1"/>
           <p:nvPr/>
         </p:nvSpPr>
@@ -6518,7 +6616,7 @@
       </p:sp>
       <p:sp>
         <p:nvSpPr>
-          <p:cNvPr id="11" name="Text 9"/>
+          <p:cNvPr id="12" name="Text 9"/>
           <p:cNvSpPr txBox="1"/>
           <p:nvPr/>
         </p:nvSpPr>
@@ -6560,7 +6658,7 @@
       </p:sp>
       <p:sp>
         <p:nvSpPr>
-          <p:cNvPr id="12" name="Shape 10"/>
+          <p:cNvPr id="13" name="Shape 10"/>
           <p:cNvSpPr/>
           <p:nvPr/>
         </p:nvSpPr>
@@ -6582,7 +6680,7 @@
       </p:sp>
       <p:sp>
         <p:nvSpPr>
-          <p:cNvPr id="13" name="Text 11"/>
+          <p:cNvPr id="14" name="Text 11"/>
           <p:cNvSpPr txBox="1"/>
           <p:nvPr/>
         </p:nvSpPr>
@@ -6621,7 +6719,7 @@
       </p:sp>
       <p:sp>
         <p:nvSpPr>
-          <p:cNvPr id="14" name="Text 12"/>
+          <p:cNvPr id="15" name="Text 12"/>
           <p:cNvSpPr txBox="1"/>
           <p:nvPr/>
         </p:nvSpPr>
@@ -6660,7 +6758,7 @@
       </p:sp>
       <p:sp>
         <p:nvSpPr>
-          <p:cNvPr id="15" name="Text 13"/>
+          <p:cNvPr id="16" name="Text 13"/>
           <p:cNvSpPr txBox="1"/>
           <p:nvPr/>
         </p:nvSpPr>
@@ -6785,246 +6883,9 @@
           </a:p>
         </p:txBody>
       </p:sp>
-      <p:sp>
-        <p:nvSpPr>
-          <p:cNvPr id="3" name="Text 1"/>
-          <p:cNvSpPr txBox="1"/>
-          <p:nvPr/>
-        </p:nvSpPr>
-        <p:spPr>
-          <a:xfrm>
-            <a:off x="609598" y="6381734"/>
-            <a:ext cx="5714986" cy="228599"/>
-          </a:xfrm>
-          <a:prstGeom prst="rect">
-            <a:avLst/>
-          </a:prstGeom>
-          <a:noFill/>
-          <a:ln/>
-        </p:spPr>
-        <p:txBody>
-          <a:bodyPr wrap="square" lIns="0" tIns="0" rIns="0" bIns="0" rtlCol="0" anchor="ctr"/>
-          <a:lstStyle/>
-          <a:p>
-            <a:pPr algn="l" indent="0" marL="0">
-              <a:buNone/>
-            </a:pPr>
-            <a:r>
-              <a:rPr lang="en-US" sz="750" b="1" spc="100" kern="0" dirty="0">
-                <a:solidFill>
-                  <a:srgbClr val="6F6A5C"/>
-                </a:solidFill>
-                <a:latin typeface="Arial" pitchFamily="34" charset="0"/>
-                <a:ea typeface="Arial" pitchFamily="34" charset="-122"/>
-                <a:cs typeface="Arial" pitchFamily="34" charset="-120"/>
-              </a:rPr>
-              <a:t>LINK. · Pilot makelaars · OK Creative Agency</a:t>
-            </a:r>
-            <a:endParaRPr lang="en-US" sz="750" dirty="0"/>
-          </a:p>
-        </p:txBody>
-      </p:sp>
-      <p:sp>
-        <p:nvSpPr>
-          <p:cNvPr id="4" name="Text 2"/>
-          <p:cNvSpPr txBox="1"/>
-          <p:nvPr/>
-        </p:nvSpPr>
-        <p:spPr>
-          <a:xfrm>
-            <a:off x="9677376" y="6381734"/>
-            <a:ext cx="1904995" cy="228599"/>
-          </a:xfrm>
-          <a:prstGeom prst="rect">
-            <a:avLst/>
-          </a:prstGeom>
-          <a:noFill/>
-          <a:ln/>
-        </p:spPr>
-        <p:txBody>
-          <a:bodyPr wrap="square" lIns="0" tIns="0" rIns="0" bIns="0" rtlCol="0" anchor="ctr"/>
-          <a:lstStyle/>
-          <a:p>
-            <a:pPr algn="r" indent="0" marL="0">
-              <a:buNone/>
-            </a:pPr>
-            <a:r>
-              <a:rPr lang="en-US" sz="750" b="1" spc="100" kern="0" dirty="0">
-                <a:solidFill>
-                  <a:srgbClr val="6F6A5C"/>
-                </a:solidFill>
-                <a:latin typeface="Arial" pitchFamily="34" charset="0"/>
-                <a:ea typeface="Arial" pitchFamily="34" charset="-122"/>
-                <a:cs typeface="Arial" pitchFamily="34" charset="-120"/>
-              </a:rPr>
-              <a:t>3 / 12</a:t>
-            </a:r>
-            <a:endParaRPr lang="en-US" sz="750" dirty="0"/>
-          </a:p>
-        </p:txBody>
-      </p:sp>
-      <p:sp>
-        <p:nvSpPr>
-          <p:cNvPr id="5" name="Text 3"/>
-          <p:cNvSpPr txBox="1"/>
-          <p:nvPr/>
-        </p:nvSpPr>
-        <p:spPr>
-          <a:xfrm>
-            <a:off x="609598" y="1206497"/>
-            <a:ext cx="10159975" cy="215899"/>
-          </a:xfrm>
-          <a:prstGeom prst="rect">
-            <a:avLst/>
-          </a:prstGeom>
-          <a:noFill/>
-          <a:ln/>
-        </p:spPr>
-        <p:txBody>
-          <a:bodyPr wrap="square" lIns="0" tIns="0" rIns="0" bIns="0" rtlCol="0" anchor="ctr"/>
-          <a:lstStyle/>
-          <a:p>
-            <a:pPr algn="l" indent="0" marL="0">
-              <a:buNone/>
-            </a:pPr>
-            <a:r>
-              <a:rPr lang="en-US" sz="950" b="1" spc="400" kern="0" dirty="0">
-                <a:solidFill>
-                  <a:srgbClr val="38B6FF"/>
-                </a:solidFill>
-                <a:latin typeface="Arial" pitchFamily="34" charset="0"/>
-                <a:ea typeface="Arial" pitchFamily="34" charset="-122"/>
-                <a:cs typeface="Arial" pitchFamily="34" charset="-120"/>
-              </a:rPr>
-              <a:t>DE AANLEIDING</a:t>
-            </a:r>
-            <a:endParaRPr lang="en-US" sz="950" dirty="0"/>
-          </a:p>
-        </p:txBody>
-      </p:sp>
-      <p:sp>
-        <p:nvSpPr>
-          <p:cNvPr id="6" name="Text 4"/>
-          <p:cNvSpPr txBox="1"/>
-          <p:nvPr/>
-        </p:nvSpPr>
-        <p:spPr>
-          <a:xfrm>
-            <a:off x="609598" y="1511296"/>
-            <a:ext cx="10972773" cy="1142997"/>
-          </a:xfrm>
-          <a:prstGeom prst="rect">
-            <a:avLst/>
-          </a:prstGeom>
-          <a:noFill/>
-          <a:ln/>
-        </p:spPr>
-        <p:txBody>
-          <a:bodyPr wrap="square" lIns="0" tIns="0" rIns="0" bIns="0" rtlCol="0" anchor="t"/>
-          <a:lstStyle/>
-          <a:p>
-            <a:pPr algn="l" indent="0" marL="0">
-              <a:lnSpc>
-                <a:spcPct val="108000"/>
-              </a:lnSpc>
-              <a:buNone/>
-            </a:pPr>
-            <a:r>
-              <a:rPr lang="en-US" sz="3200" b="1" dirty="0">
-                <a:solidFill>
-                  <a:srgbClr val="1C2230"/>
-                </a:solidFill>
-                <a:latin typeface="Arial" pitchFamily="34" charset="0"/>
-                <a:ea typeface="Arial" pitchFamily="34" charset="-122"/>
-                <a:cs typeface="Arial" pitchFamily="34" charset="-120"/>
-              </a:rPr>
-              <a:t>Jullie hebben de haak al </a:t>
-            </a:r>
-            <a:pPr algn="l" indent="0" marL="0">
-              <a:lnSpc>
-                <a:spcPct val="108000"/>
-              </a:lnSpc>
-              <a:buNone/>
-            </a:pPr>
-            <a:r>
-              <a:rPr lang="en-US" sz="3000" i="1" dirty="0">
-                <a:solidFill>
-                  <a:srgbClr val="1C2230"/>
-                </a:solidFill>
-                <a:latin typeface="Georgia" pitchFamily="34" charset="0"/>
-                <a:ea typeface="Georgia" pitchFamily="34" charset="-122"/>
-                <a:cs typeface="Georgia" pitchFamily="34" charset="-120"/>
-              </a:rPr>
-              <a:t>gevonden</a:t>
-            </a:r>
-            <a:pPr algn="l" indent="0" marL="0">
-              <a:lnSpc>
-                <a:spcPct val="108000"/>
-              </a:lnSpc>
-              <a:buNone/>
-            </a:pPr>
-            <a:r>
-              <a:rPr lang="en-US" sz="3200" b="1" dirty="0">
-                <a:solidFill>
-                  <a:srgbClr val="1C2230"/>
-                </a:solidFill>
-                <a:latin typeface="Arial" pitchFamily="34" charset="0"/>
-                <a:ea typeface="Arial" pitchFamily="34" charset="-122"/>
-                <a:cs typeface="Arial" pitchFamily="34" charset="-120"/>
-              </a:rPr>
-              <a:t>.</a:t>
-            </a:r>
-            <a:endParaRPr lang="en-US" sz="3200" dirty="0"/>
-          </a:p>
-        </p:txBody>
-      </p:sp>
-      <p:sp>
-        <p:nvSpPr>
-          <p:cNvPr id="7" name="Shape 5"/>
-          <p:cNvSpPr/>
-          <p:nvPr/>
-        </p:nvSpPr>
-        <p:spPr>
-          <a:xfrm>
-            <a:off x="609598" y="2793993"/>
-            <a:ext cx="2628893" cy="3238492"/>
-          </a:xfrm>
-          <a:prstGeom prst="roundRect">
-            <a:avLst>
-              <a:gd name="adj" fmla="val 3865"/>
-            </a:avLst>
-          </a:prstGeom>
-          <a:solidFill>
-            <a:srgbClr val="F8F4EB"/>
-          </a:solidFill>
-          <a:ln/>
-        </p:spPr>
-      </p:sp>
-      <p:sp>
-        <p:nvSpPr>
-          <p:cNvPr id="8" name="Shape 6"/>
-          <p:cNvSpPr/>
-          <p:nvPr/>
-        </p:nvSpPr>
-        <p:spPr>
-          <a:xfrm>
-            <a:off x="863598" y="3073392"/>
-            <a:ext cx="380999" cy="380999"/>
-          </a:xfrm>
-          <a:prstGeom prst="roundRect">
-            <a:avLst>
-              <a:gd name="adj" fmla="val 23333"/>
-            </a:avLst>
-          </a:prstGeom>
-          <a:solidFill>
-            <a:srgbClr val="DDEBF3"/>
-          </a:solidFill>
-          <a:ln/>
-        </p:spPr>
-      </p:sp>
       <p:pic>
         <p:nvPicPr>
-          <p:cNvPr id="9" name="Image 0" descr="preencoded.png">    </p:cNvPr>
+          <p:cNvPr id="3" name="Image 0" descr="/home/user/Test/assets/okcreative-mark.png">    </p:cNvPr>
           <p:cNvPicPr>
             <a:picLocks noChangeAspect="1"/>
           </p:cNvPicPr>
@@ -7038,8 +6899,8 @@
         </p:blipFill>
         <p:spPr>
           <a:xfrm>
-            <a:off x="958848" y="3168642"/>
-            <a:ext cx="190500" cy="190500"/>
+            <a:off x="11226772" y="393699"/>
+            <a:ext cx="355599" cy="355599"/>
           </a:xfrm>
           <a:prstGeom prst="rect">
             <a:avLst/>
@@ -7048,14 +6909,131 @@
       </p:pic>
       <p:sp>
         <p:nvSpPr>
-          <p:cNvPr id="10" name="Text 7"/>
-          <p:cNvSpPr txBox="1"/>
-          <p:nvPr/>
-        </p:nvSpPr>
-        <p:spPr>
-          <a:xfrm>
-            <a:off x="863598" y="3632191"/>
-            <a:ext cx="2120895" cy="533399"/>
+          <p:cNvPr id="4" name="Text 1"/>
+          <p:cNvSpPr txBox="1"/>
+          <p:nvPr/>
+        </p:nvSpPr>
+        <p:spPr>
+          <a:xfrm>
+            <a:off x="609598" y="6381734"/>
+            <a:ext cx="5714986" cy="228599"/>
+          </a:xfrm>
+          <a:prstGeom prst="rect">
+            <a:avLst/>
+          </a:prstGeom>
+          <a:noFill/>
+          <a:ln/>
+        </p:spPr>
+        <p:txBody>
+          <a:bodyPr wrap="square" lIns="0" tIns="0" rIns="0" bIns="0" rtlCol="0" anchor="ctr"/>
+          <a:lstStyle/>
+          <a:p>
+            <a:pPr algn="l" indent="0" marL="0">
+              <a:buNone/>
+            </a:pPr>
+            <a:r>
+              <a:rPr lang="en-US" sz="750" b="1" spc="100" kern="0" dirty="0">
+                <a:solidFill>
+                  <a:srgbClr val="6F6A5C"/>
+                </a:solidFill>
+                <a:latin typeface="Arial" pitchFamily="34" charset="0"/>
+                <a:ea typeface="Arial" pitchFamily="34" charset="-122"/>
+                <a:cs typeface="Arial" pitchFamily="34" charset="-120"/>
+              </a:rPr>
+              <a:t>LINK. · Pilot makelaars · OK Creative Agency</a:t>
+            </a:r>
+            <a:endParaRPr lang="en-US" sz="750" dirty="0"/>
+          </a:p>
+        </p:txBody>
+      </p:sp>
+      <p:sp>
+        <p:nvSpPr>
+          <p:cNvPr id="5" name="Text 2"/>
+          <p:cNvSpPr txBox="1"/>
+          <p:nvPr/>
+        </p:nvSpPr>
+        <p:spPr>
+          <a:xfrm>
+            <a:off x="9677376" y="6381734"/>
+            <a:ext cx="1904995" cy="228599"/>
+          </a:xfrm>
+          <a:prstGeom prst="rect">
+            <a:avLst/>
+          </a:prstGeom>
+          <a:noFill/>
+          <a:ln/>
+        </p:spPr>
+        <p:txBody>
+          <a:bodyPr wrap="square" lIns="0" tIns="0" rIns="0" bIns="0" rtlCol="0" anchor="ctr"/>
+          <a:lstStyle/>
+          <a:p>
+            <a:pPr algn="r" indent="0" marL="0">
+              <a:buNone/>
+            </a:pPr>
+            <a:r>
+              <a:rPr lang="en-US" sz="750" b="1" spc="100" kern="0" dirty="0">
+                <a:solidFill>
+                  <a:srgbClr val="6F6A5C"/>
+                </a:solidFill>
+                <a:latin typeface="Arial" pitchFamily="34" charset="0"/>
+                <a:ea typeface="Arial" pitchFamily="34" charset="-122"/>
+                <a:cs typeface="Arial" pitchFamily="34" charset="-120"/>
+              </a:rPr>
+              <a:t>3 / 12</a:t>
+            </a:r>
+            <a:endParaRPr lang="en-US" sz="750" dirty="0"/>
+          </a:p>
+        </p:txBody>
+      </p:sp>
+      <p:sp>
+        <p:nvSpPr>
+          <p:cNvPr id="6" name="Text 3"/>
+          <p:cNvSpPr txBox="1"/>
+          <p:nvPr/>
+        </p:nvSpPr>
+        <p:spPr>
+          <a:xfrm>
+            <a:off x="609598" y="1206497"/>
+            <a:ext cx="10159975" cy="215899"/>
+          </a:xfrm>
+          <a:prstGeom prst="rect">
+            <a:avLst/>
+          </a:prstGeom>
+          <a:noFill/>
+          <a:ln/>
+        </p:spPr>
+        <p:txBody>
+          <a:bodyPr wrap="square" lIns="0" tIns="0" rIns="0" bIns="0" rtlCol="0" anchor="ctr"/>
+          <a:lstStyle/>
+          <a:p>
+            <a:pPr algn="l" indent="0" marL="0">
+              <a:buNone/>
+            </a:pPr>
+            <a:r>
+              <a:rPr lang="en-US" sz="950" b="1" spc="400" kern="0" dirty="0">
+                <a:solidFill>
+                  <a:srgbClr val="38B6FF"/>
+                </a:solidFill>
+                <a:latin typeface="Arial" pitchFamily="34" charset="0"/>
+                <a:ea typeface="Arial" pitchFamily="34" charset="-122"/>
+                <a:cs typeface="Arial" pitchFamily="34" charset="-120"/>
+              </a:rPr>
+              <a:t>DE AANLEIDING</a:t>
+            </a:r>
+            <a:endParaRPr lang="en-US" sz="950" dirty="0"/>
+          </a:p>
+        </p:txBody>
+      </p:sp>
+      <p:sp>
+        <p:nvSpPr>
+          <p:cNvPr id="7" name="Text 4"/>
+          <p:cNvSpPr txBox="1"/>
+          <p:nvPr/>
+        </p:nvSpPr>
+        <p:spPr>
+          <a:xfrm>
+            <a:off x="609598" y="1511296"/>
+            <a:ext cx="10972773" cy="1142997"/>
           </a:xfrm>
           <a:prstGeom prst="rect">
             <a:avLst/>
@@ -7067,14 +7045,14 @@
           <a:bodyPr wrap="square" lIns="0" tIns="0" rIns="0" bIns="0" rtlCol="0" anchor="t"/>
           <a:lstStyle/>
           <a:p>
-            <a:pPr indent="0" marL="0">
+            <a:pPr algn="l" indent="0" marL="0">
               <a:lnSpc>
-                <a:spcPct val="115000"/>
+                <a:spcPct val="108000"/>
               </a:lnSpc>
               <a:buNone/>
             </a:pPr>
             <a:r>
-              <a:rPr lang="en-US" sz="1350" b="1" dirty="0">
+              <a:rPr lang="en-US" sz="3200" b="1" dirty="0">
                 <a:solidFill>
                   <a:srgbClr val="1C2230"/>
                 </a:solidFill>
@@ -7082,63 +7060,55 @@
                 <a:ea typeface="Arial" pitchFamily="34" charset="-122"/>
                 <a:cs typeface="Arial" pitchFamily="34" charset="-120"/>
               </a:rPr>
-              <a:t>Woningaanbod zonder filters</a:t>
-            </a:r>
-            <a:endParaRPr lang="en-US" sz="1350" dirty="0"/>
-          </a:p>
-        </p:txBody>
-      </p:sp>
-      <p:sp>
-        <p:nvSpPr>
-          <p:cNvPr id="11" name="Text 8"/>
-          <p:cNvSpPr txBox="1"/>
-          <p:nvPr/>
-        </p:nvSpPr>
-        <p:spPr>
-          <a:xfrm>
-            <a:off x="863598" y="4203689"/>
-            <a:ext cx="2120895" cy="1587496"/>
-          </a:xfrm>
-          <a:prstGeom prst="rect">
-            <a:avLst/>
-          </a:prstGeom>
-          <a:noFill/>
-          <a:ln/>
-        </p:spPr>
-        <p:txBody>
-          <a:bodyPr wrap="square" lIns="0" tIns="0" rIns="0" bIns="0" rtlCol="0" anchor="t"/>
-          <a:lstStyle/>
-          <a:p>
-            <a:pPr indent="0" marL="0">
+              <a:t>Jullie hebben de haak al </a:t>
+            </a:r>
+            <a:pPr algn="l" indent="0" marL="0">
               <a:lnSpc>
-                <a:spcPct val="135000"/>
+                <a:spcPct val="108000"/>
               </a:lnSpc>
               <a:buNone/>
             </a:pPr>
             <a:r>
-              <a:rPr lang="en-US" sz="950" dirty="0">
-                <a:solidFill>
-                  <a:srgbClr val="6F6A5C"/>
-                </a:solidFill>
-                <a:latin typeface="Arial" pitchFamily="34" charset="0"/>
-                <a:ea typeface="Arial" pitchFamily="34" charset="-122"/>
-                <a:cs typeface="Arial" pitchFamily="34" charset="-120"/>
-              </a:rPr>
-              <a:t>Dertien pagina's doorklikken zonder één filter. Dat kost de bezoeker geduld en de makelaar een lead. Dit kwam op jullie eigen lijst keer op keer terug.</a:t>
-            </a:r>
-            <a:endParaRPr lang="en-US" sz="950" dirty="0"/>
-          </a:p>
-        </p:txBody>
-      </p:sp>
-      <p:sp>
-        <p:nvSpPr>
-          <p:cNvPr id="12" name="Shape 9"/>
+              <a:rPr lang="en-US" sz="3000" i="1" dirty="0">
+                <a:solidFill>
+                  <a:srgbClr val="1C2230"/>
+                </a:solidFill>
+                <a:latin typeface="Georgia" pitchFamily="34" charset="0"/>
+                <a:ea typeface="Georgia" pitchFamily="34" charset="-122"/>
+                <a:cs typeface="Georgia" pitchFamily="34" charset="-120"/>
+              </a:rPr>
+              <a:t>gevonden</a:t>
+            </a:r>
+            <a:pPr algn="l" indent="0" marL="0">
+              <a:lnSpc>
+                <a:spcPct val="108000"/>
+              </a:lnSpc>
+              <a:buNone/>
+            </a:pPr>
+            <a:r>
+              <a:rPr lang="en-US" sz="3200" b="1" dirty="0">
+                <a:solidFill>
+                  <a:srgbClr val="1C2230"/>
+                </a:solidFill>
+                <a:latin typeface="Arial" pitchFamily="34" charset="0"/>
+                <a:ea typeface="Arial" pitchFamily="34" charset="-122"/>
+                <a:cs typeface="Arial" pitchFamily="34" charset="-120"/>
+              </a:rPr>
+              <a:t>.</a:t>
+            </a:r>
+            <a:endParaRPr lang="en-US" sz="3200" dirty="0"/>
+          </a:p>
+        </p:txBody>
+      </p:sp>
+      <p:sp>
+        <p:nvSpPr>
+          <p:cNvPr id="8" name="Shape 5"/>
           <p:cNvSpPr/>
           <p:nvPr/>
         </p:nvSpPr>
         <p:spPr>
           <a:xfrm>
-            <a:off x="3390892" y="2793993"/>
+            <a:off x="609598" y="2793993"/>
             <a:ext cx="2628893" cy="3238492"/>
           </a:xfrm>
           <a:prstGeom prst="roundRect">
@@ -7154,13 +7124,13 @@
       </p:sp>
       <p:sp>
         <p:nvSpPr>
-          <p:cNvPr id="13" name="Shape 10"/>
+          <p:cNvPr id="9" name="Shape 6"/>
           <p:cNvSpPr/>
           <p:nvPr/>
         </p:nvSpPr>
         <p:spPr>
           <a:xfrm>
-            <a:off x="3644891" y="3073392"/>
+            <a:off x="863598" y="3073392"/>
             <a:ext cx="380999" cy="380999"/>
           </a:xfrm>
           <a:prstGeom prst="roundRect">
@@ -7176,7 +7146,7 @@
       </p:sp>
       <p:pic>
         <p:nvPicPr>
-          <p:cNvPr id="14" name="Image 1" descr="preencoded.png">    </p:cNvPr>
+          <p:cNvPr id="10" name="Image 1" descr="preencoded.png">    </p:cNvPr>
           <p:cNvPicPr>
             <a:picLocks noChangeAspect="1"/>
           </p:cNvPicPr>
@@ -7190,7 +7160,7 @@
         </p:blipFill>
         <p:spPr>
           <a:xfrm>
-            <a:off x="3740141" y="3168642"/>
+            <a:off x="958848" y="3168642"/>
             <a:ext cx="190500" cy="190500"/>
           </a:xfrm>
           <a:prstGeom prst="rect">
@@ -7200,13 +7170,13 @@
       </p:pic>
       <p:sp>
         <p:nvSpPr>
-          <p:cNvPr id="15" name="Text 11"/>
-          <p:cNvSpPr txBox="1"/>
-          <p:nvPr/>
-        </p:nvSpPr>
-        <p:spPr>
-          <a:xfrm>
-            <a:off x="3644891" y="3632191"/>
+          <p:cNvPr id="11" name="Text 7"/>
+          <p:cNvSpPr txBox="1"/>
+          <p:nvPr/>
+        </p:nvSpPr>
+        <p:spPr>
+          <a:xfrm>
+            <a:off x="863598" y="3632191"/>
             <a:ext cx="2120895" cy="533399"/>
           </a:xfrm>
           <a:prstGeom prst="rect">
@@ -7234,7 +7204,7 @@
                 <a:ea typeface="Arial" pitchFamily="34" charset="-122"/>
                 <a:cs typeface="Arial" pitchFamily="34" charset="-120"/>
               </a:rPr>
-              <a:t>Trage, onoverzichtelijke sites</a:t>
+              <a:t>Woningaanbod zonder filters</a:t>
             </a:r>
             <a:endParaRPr lang="en-US" sz="1350" dirty="0"/>
           </a:p>
@@ -7242,13 +7212,13 @@
       </p:sp>
       <p:sp>
         <p:nvSpPr>
-          <p:cNvPr id="16" name="Text 12"/>
-          <p:cNvSpPr txBox="1"/>
-          <p:nvPr/>
-        </p:nvSpPr>
-        <p:spPr>
-          <a:xfrm>
-            <a:off x="3644891" y="4203689"/>
+          <p:cNvPr id="12" name="Text 8"/>
+          <p:cNvSpPr txBox="1"/>
+          <p:nvPr/>
+        </p:nvSpPr>
+        <p:spPr>
+          <a:xfrm>
+            <a:off x="863598" y="4203689"/>
             <a:ext cx="2120895" cy="1587496"/>
           </a:xfrm>
           <a:prstGeom prst="rect">
@@ -7276,7 +7246,7 @@
                 <a:ea typeface="Arial" pitchFamily="34" charset="-122"/>
                 <a:cs typeface="Arial" pitchFamily="34" charset="-120"/>
               </a:rPr>
-              <a:t>Beelden die later laden, aanbod dat door elkaar staat, beschikbaar en verkocht naast elkaar. Mooi gemaakt, maar niet gebouwd voor de zoeker.</a:t>
+              <a:t>Dertien pagina's doorklikken zonder één filter. Dat kost de bezoeker geduld en de makelaar een lead. Dit kwam op jullie eigen lijst keer op keer terug.</a:t>
             </a:r>
             <a:endParaRPr lang="en-US" sz="950" dirty="0"/>
           </a:p>
@@ -7284,13 +7254,13 @@
       </p:sp>
       <p:sp>
         <p:nvSpPr>
-          <p:cNvPr id="17" name="Shape 13"/>
+          <p:cNvPr id="13" name="Shape 9"/>
           <p:cNvSpPr/>
           <p:nvPr/>
         </p:nvSpPr>
         <p:spPr>
           <a:xfrm>
-            <a:off x="6172185" y="2793993"/>
+            <a:off x="3390892" y="2793993"/>
             <a:ext cx="2628893" cy="3238492"/>
           </a:xfrm>
           <a:prstGeom prst="roundRect">
@@ -7306,13 +7276,13 @@
       </p:sp>
       <p:sp>
         <p:nvSpPr>
-          <p:cNvPr id="18" name="Shape 14"/>
+          <p:cNvPr id="14" name="Shape 10"/>
           <p:cNvSpPr/>
           <p:nvPr/>
         </p:nvSpPr>
         <p:spPr>
           <a:xfrm>
-            <a:off x="6426184" y="3073392"/>
+            <a:off x="3644891" y="3073392"/>
             <a:ext cx="380999" cy="380999"/>
           </a:xfrm>
           <a:prstGeom prst="roundRect">
@@ -7328,7 +7298,7 @@
       </p:sp>
       <p:pic>
         <p:nvPicPr>
-          <p:cNvPr id="19" name="Image 2" descr="preencoded.png">    </p:cNvPr>
+          <p:cNvPr id="15" name="Image 2" descr="preencoded.png">    </p:cNvPr>
           <p:cNvPicPr>
             <a:picLocks noChangeAspect="1"/>
           </p:cNvPicPr>
@@ -7342,7 +7312,7 @@
         </p:blipFill>
         <p:spPr>
           <a:xfrm>
-            <a:off x="6521434" y="3168642"/>
+            <a:off x="3740141" y="3168642"/>
             <a:ext cx="190500" cy="190500"/>
           </a:xfrm>
           <a:prstGeom prst="rect">
@@ -7352,13 +7322,13 @@
       </p:pic>
       <p:sp>
         <p:nvSpPr>
-          <p:cNvPr id="20" name="Text 15"/>
-          <p:cNvSpPr txBox="1"/>
-          <p:nvPr/>
-        </p:nvSpPr>
-        <p:spPr>
-          <a:xfrm>
-            <a:off x="6426184" y="3632191"/>
+          <p:cNvPr id="16" name="Text 11"/>
+          <p:cNvSpPr txBox="1"/>
+          <p:nvPr/>
+        </p:nvSpPr>
+        <p:spPr>
+          <a:xfrm>
+            <a:off x="3644891" y="3632191"/>
             <a:ext cx="2120895" cy="533399"/>
           </a:xfrm>
           <a:prstGeom prst="rect">
@@ -7386,7 +7356,7 @@
                 <a:ea typeface="Arial" pitchFamily="34" charset="-122"/>
                 <a:cs typeface="Arial" pitchFamily="34" charset="-120"/>
               </a:rPr>
-              <a:t>Vindbaarheid die niet klopt</a:t>
+              <a:t>Trage, onoverzichtelijke sites</a:t>
             </a:r>
             <a:endParaRPr lang="en-US" sz="1350" dirty="0"/>
           </a:p>
@@ -7394,13 +7364,13 @@
       </p:sp>
       <p:sp>
         <p:nvSpPr>
-          <p:cNvPr id="21" name="Text 16"/>
-          <p:cNvSpPr txBox="1"/>
-          <p:nvPr/>
-        </p:nvSpPr>
-        <p:spPr>
-          <a:xfrm>
-            <a:off x="6426184" y="4203689"/>
+          <p:cNvPr id="17" name="Text 12"/>
+          <p:cNvSpPr txBox="1"/>
+          <p:nvPr/>
+        </p:nvSpPr>
+        <p:spPr>
+          <a:xfrm>
+            <a:off x="3644891" y="4203689"/>
             <a:ext cx="2120895" cy="1587496"/>
           </a:xfrm>
           <a:prstGeom prst="rect">
@@ -7428,7 +7398,7 @@
                 <a:ea typeface="Arial" pitchFamily="34" charset="-122"/>
                 <a:cs typeface="Arial" pitchFamily="34" charset="-120"/>
               </a:rPr>
-              <a:t>URL-structuren en SEO die niet meebewegen met waar iemand op zoekt. Zichtbaar in één blik, en daarmee een concreet gespreksonderwerp.</a:t>
+              <a:t>Beelden die later laden, aanbod dat door elkaar staat, beschikbaar en verkocht naast elkaar. Mooi gemaakt, maar niet gebouwd voor de zoeker.</a:t>
             </a:r>
             <a:endParaRPr lang="en-US" sz="950" dirty="0"/>
           </a:p>
@@ -7436,13 +7406,13 @@
       </p:sp>
       <p:sp>
         <p:nvSpPr>
-          <p:cNvPr id="22" name="Shape 17"/>
+          <p:cNvPr id="18" name="Shape 13"/>
           <p:cNvSpPr/>
           <p:nvPr/>
         </p:nvSpPr>
         <p:spPr>
           <a:xfrm>
-            <a:off x="8953478" y="2793993"/>
+            <a:off x="6172185" y="2793993"/>
             <a:ext cx="2628893" cy="3238492"/>
           </a:xfrm>
           <a:prstGeom prst="roundRect">
@@ -7451,20 +7421,20 @@
             </a:avLst>
           </a:prstGeom>
           <a:solidFill>
-            <a:srgbClr val="000000"/>
+            <a:srgbClr val="F8F4EB"/>
           </a:solidFill>
           <a:ln/>
         </p:spPr>
       </p:sp>
       <p:sp>
         <p:nvSpPr>
-          <p:cNvPr id="23" name="Shape 18"/>
+          <p:cNvPr id="19" name="Shape 14"/>
           <p:cNvSpPr/>
           <p:nvPr/>
         </p:nvSpPr>
         <p:spPr>
           <a:xfrm>
-            <a:off x="9207477" y="3073392"/>
+            <a:off x="6426184" y="3073392"/>
             <a:ext cx="380999" cy="380999"/>
           </a:xfrm>
           <a:prstGeom prst="roundRect">
@@ -7473,14 +7443,14 @@
             </a:avLst>
           </a:prstGeom>
           <a:solidFill>
-            <a:srgbClr val="203C55"/>
+            <a:srgbClr val="DDEBF3"/>
           </a:solidFill>
           <a:ln/>
         </p:spPr>
       </p:sp>
       <p:pic>
         <p:nvPicPr>
-          <p:cNvPr id="24" name="Image 3" descr="preencoded.png">    </p:cNvPr>
+          <p:cNvPr id="20" name="Image 3" descr="preencoded.png">    </p:cNvPr>
           <p:cNvPicPr>
             <a:picLocks noChangeAspect="1"/>
           </p:cNvPicPr>
@@ -7494,7 +7464,7 @@
         </p:blipFill>
         <p:spPr>
           <a:xfrm>
-            <a:off x="9302727" y="3168642"/>
+            <a:off x="6521434" y="3168642"/>
             <a:ext cx="190500" cy="190500"/>
           </a:xfrm>
           <a:prstGeom prst="rect">
@@ -7504,13 +7474,13 @@
       </p:pic>
       <p:sp>
         <p:nvSpPr>
-          <p:cNvPr id="25" name="Text 19"/>
-          <p:cNvSpPr txBox="1"/>
-          <p:nvPr/>
-        </p:nvSpPr>
-        <p:spPr>
-          <a:xfrm>
-            <a:off x="9207477" y="3632191"/>
+          <p:cNvPr id="21" name="Text 15"/>
+          <p:cNvSpPr txBox="1"/>
+          <p:nvPr/>
+        </p:nvSpPr>
+        <p:spPr>
+          <a:xfrm>
+            <a:off x="6426184" y="3632191"/>
             <a:ext cx="2120895" cy="533399"/>
           </a:xfrm>
           <a:prstGeom prst="rect">
@@ -7532,6 +7502,158 @@
             <a:r>
               <a:rPr lang="en-US" sz="1350" b="1" dirty="0">
                 <a:solidFill>
+                  <a:srgbClr val="1C2230"/>
+                </a:solidFill>
+                <a:latin typeface="Arial" pitchFamily="34" charset="0"/>
+                <a:ea typeface="Arial" pitchFamily="34" charset="-122"/>
+                <a:cs typeface="Arial" pitchFamily="34" charset="-120"/>
+              </a:rPr>
+              <a:t>Vindbaarheid die niet klopt</a:t>
+            </a:r>
+            <a:endParaRPr lang="en-US" sz="1350" dirty="0"/>
+          </a:p>
+        </p:txBody>
+      </p:sp>
+      <p:sp>
+        <p:nvSpPr>
+          <p:cNvPr id="22" name="Text 16"/>
+          <p:cNvSpPr txBox="1"/>
+          <p:nvPr/>
+        </p:nvSpPr>
+        <p:spPr>
+          <a:xfrm>
+            <a:off x="6426184" y="4203689"/>
+            <a:ext cx="2120895" cy="1587496"/>
+          </a:xfrm>
+          <a:prstGeom prst="rect">
+            <a:avLst/>
+          </a:prstGeom>
+          <a:noFill/>
+          <a:ln/>
+        </p:spPr>
+        <p:txBody>
+          <a:bodyPr wrap="square" lIns="0" tIns="0" rIns="0" bIns="0" rtlCol="0" anchor="t"/>
+          <a:lstStyle/>
+          <a:p>
+            <a:pPr indent="0" marL="0">
+              <a:lnSpc>
+                <a:spcPct val="135000"/>
+              </a:lnSpc>
+              <a:buNone/>
+            </a:pPr>
+            <a:r>
+              <a:rPr lang="en-US" sz="950" dirty="0">
+                <a:solidFill>
+                  <a:srgbClr val="6F6A5C"/>
+                </a:solidFill>
+                <a:latin typeface="Arial" pitchFamily="34" charset="0"/>
+                <a:ea typeface="Arial" pitchFamily="34" charset="-122"/>
+                <a:cs typeface="Arial" pitchFamily="34" charset="-120"/>
+              </a:rPr>
+              <a:t>URL-structuren en SEO die niet meebewegen met waar iemand op zoekt. Zichtbaar in één blik, en daarmee een concreet gespreksonderwerp.</a:t>
+            </a:r>
+            <a:endParaRPr lang="en-US" sz="950" dirty="0"/>
+          </a:p>
+        </p:txBody>
+      </p:sp>
+      <p:sp>
+        <p:nvSpPr>
+          <p:cNvPr id="23" name="Shape 17"/>
+          <p:cNvSpPr/>
+          <p:nvPr/>
+        </p:nvSpPr>
+        <p:spPr>
+          <a:xfrm>
+            <a:off x="8953478" y="2793993"/>
+            <a:ext cx="2628893" cy="3238492"/>
+          </a:xfrm>
+          <a:prstGeom prst="roundRect">
+            <a:avLst>
+              <a:gd name="adj" fmla="val 3865"/>
+            </a:avLst>
+          </a:prstGeom>
+          <a:solidFill>
+            <a:srgbClr val="000000"/>
+          </a:solidFill>
+          <a:ln/>
+        </p:spPr>
+      </p:sp>
+      <p:sp>
+        <p:nvSpPr>
+          <p:cNvPr id="24" name="Shape 18"/>
+          <p:cNvSpPr/>
+          <p:nvPr/>
+        </p:nvSpPr>
+        <p:spPr>
+          <a:xfrm>
+            <a:off x="9207477" y="3073392"/>
+            <a:ext cx="380999" cy="380999"/>
+          </a:xfrm>
+          <a:prstGeom prst="roundRect">
+            <a:avLst>
+              <a:gd name="adj" fmla="val 23333"/>
+            </a:avLst>
+          </a:prstGeom>
+          <a:solidFill>
+            <a:srgbClr val="203C55"/>
+          </a:solidFill>
+          <a:ln/>
+        </p:spPr>
+      </p:sp>
+      <p:pic>
+        <p:nvPicPr>
+          <p:cNvPr id="25" name="Image 4" descr="preencoded.png">    </p:cNvPr>
+          <p:cNvPicPr>
+            <a:picLocks noChangeAspect="1"/>
+          </p:cNvPicPr>
+          <p:nvPr/>
+        </p:nvPicPr>
+        <p:blipFill>
+          <a:blip r:embed="rId5"/>
+          <a:stretch>
+            <a:fillRect/>
+          </a:stretch>
+        </p:blipFill>
+        <p:spPr>
+          <a:xfrm>
+            <a:off x="9302727" y="3168642"/>
+            <a:ext cx="190500" cy="190500"/>
+          </a:xfrm>
+          <a:prstGeom prst="rect">
+            <a:avLst/>
+          </a:prstGeom>
+        </p:spPr>
+      </p:pic>
+      <p:sp>
+        <p:nvSpPr>
+          <p:cNvPr id="26" name="Text 19"/>
+          <p:cNvSpPr txBox="1"/>
+          <p:nvPr/>
+        </p:nvSpPr>
+        <p:spPr>
+          <a:xfrm>
+            <a:off x="9207477" y="3632191"/>
+            <a:ext cx="2120895" cy="533399"/>
+          </a:xfrm>
+          <a:prstGeom prst="rect">
+            <a:avLst/>
+          </a:prstGeom>
+          <a:noFill/>
+          <a:ln/>
+        </p:spPr>
+        <p:txBody>
+          <a:bodyPr wrap="square" lIns="0" tIns="0" rIns="0" bIns="0" rtlCol="0" anchor="t"/>
+          <a:lstStyle/>
+          <a:p>
+            <a:pPr indent="0" marL="0">
+              <a:lnSpc>
+                <a:spcPct val="115000"/>
+              </a:lnSpc>
+              <a:buNone/>
+            </a:pPr>
+            <a:r>
+              <a:rPr lang="en-US" sz="1350" b="1" dirty="0">
+                <a:solidFill>
                   <a:srgbClr val="FFFFFF"/>
                 </a:solidFill>
                 <a:latin typeface="Arial" pitchFamily="34" charset="0"/>
@@ -7546,7 +7668,7 @@
       </p:sp>
       <p:sp>
         <p:nvSpPr>
-          <p:cNvPr id="26" name="Text 20"/>
+          <p:cNvPr id="27" name="Text 20"/>
           <p:cNvSpPr txBox="1"/>
           <p:nvPr/>
         </p:nvSpPr>
@@ -7671,202 +7793,9 @@
           </a:p>
         </p:txBody>
       </p:sp>
-      <p:sp>
-        <p:nvSpPr>
-          <p:cNvPr id="3" name="Text 1"/>
-          <p:cNvSpPr txBox="1"/>
-          <p:nvPr/>
-        </p:nvSpPr>
-        <p:spPr>
-          <a:xfrm>
-            <a:off x="609598" y="6381734"/>
-            <a:ext cx="5714986" cy="228599"/>
-          </a:xfrm>
-          <a:prstGeom prst="rect">
-            <a:avLst/>
-          </a:prstGeom>
-          <a:noFill/>
-          <a:ln/>
-        </p:spPr>
-        <p:txBody>
-          <a:bodyPr wrap="square" lIns="0" tIns="0" rIns="0" bIns="0" rtlCol="0" anchor="ctr"/>
-          <a:lstStyle/>
-          <a:p>
-            <a:pPr algn="l" indent="0" marL="0">
-              <a:buNone/>
-            </a:pPr>
-            <a:r>
-              <a:rPr lang="en-US" sz="750" b="1" spc="100" kern="0" dirty="0">
-                <a:solidFill>
-                  <a:srgbClr val="BDC3CE"/>
-                </a:solidFill>
-                <a:latin typeface="Arial" pitchFamily="34" charset="0"/>
-                <a:ea typeface="Arial" pitchFamily="34" charset="-122"/>
-                <a:cs typeface="Arial" pitchFamily="34" charset="-120"/>
-              </a:rPr>
-              <a:t>LINK. · Pilot makelaars · OK Creative Agency</a:t>
-            </a:r>
-            <a:endParaRPr lang="en-US" sz="750" dirty="0"/>
-          </a:p>
-        </p:txBody>
-      </p:sp>
-      <p:sp>
-        <p:nvSpPr>
-          <p:cNvPr id="4" name="Text 2"/>
-          <p:cNvSpPr txBox="1"/>
-          <p:nvPr/>
-        </p:nvSpPr>
-        <p:spPr>
-          <a:xfrm>
-            <a:off x="9677376" y="6381734"/>
-            <a:ext cx="1904995" cy="228599"/>
-          </a:xfrm>
-          <a:prstGeom prst="rect">
-            <a:avLst/>
-          </a:prstGeom>
-          <a:noFill/>
-          <a:ln/>
-        </p:spPr>
-        <p:txBody>
-          <a:bodyPr wrap="square" lIns="0" tIns="0" rIns="0" bIns="0" rtlCol="0" anchor="ctr"/>
-          <a:lstStyle/>
-          <a:p>
-            <a:pPr algn="r" indent="0" marL="0">
-              <a:buNone/>
-            </a:pPr>
-            <a:r>
-              <a:rPr lang="en-US" sz="750" b="1" spc="100" kern="0" dirty="0">
-                <a:solidFill>
-                  <a:srgbClr val="BDC3CE"/>
-                </a:solidFill>
-                <a:latin typeface="Arial" pitchFamily="34" charset="0"/>
-                <a:ea typeface="Arial" pitchFamily="34" charset="-122"/>
-                <a:cs typeface="Arial" pitchFamily="34" charset="-120"/>
-              </a:rPr>
-              <a:t>4 / 12</a:t>
-            </a:r>
-            <a:endParaRPr lang="en-US" sz="750" dirty="0"/>
-          </a:p>
-        </p:txBody>
-      </p:sp>
-      <p:sp>
-        <p:nvSpPr>
-          <p:cNvPr id="5" name="Text 3"/>
-          <p:cNvSpPr txBox="1"/>
-          <p:nvPr/>
-        </p:nvSpPr>
-        <p:spPr>
-          <a:xfrm>
-            <a:off x="609598" y="1206497"/>
-            <a:ext cx="10159975" cy="215899"/>
-          </a:xfrm>
-          <a:prstGeom prst="rect">
-            <a:avLst/>
-          </a:prstGeom>
-          <a:noFill/>
-          <a:ln/>
-        </p:spPr>
-        <p:txBody>
-          <a:bodyPr wrap="square" lIns="0" tIns="0" rIns="0" bIns="0" rtlCol="0" anchor="ctr"/>
-          <a:lstStyle/>
-          <a:p>
-            <a:pPr algn="l" indent="0" marL="0">
-              <a:buNone/>
-            </a:pPr>
-            <a:r>
-              <a:rPr lang="en-US" sz="950" b="1" spc="400" kern="0" dirty="0">
-                <a:solidFill>
-                  <a:srgbClr val="38B6FF"/>
-                </a:solidFill>
-                <a:latin typeface="Arial" pitchFamily="34" charset="0"/>
-                <a:ea typeface="Arial" pitchFamily="34" charset="-122"/>
-                <a:cs typeface="Arial" pitchFamily="34" charset="-120"/>
-              </a:rPr>
-              <a:t>HET POTENTIEEL</a:t>
-            </a:r>
-            <a:endParaRPr lang="en-US" sz="950" dirty="0"/>
-          </a:p>
-        </p:txBody>
-      </p:sp>
-      <p:sp>
-        <p:nvSpPr>
-          <p:cNvPr id="6" name="Text 4"/>
-          <p:cNvSpPr txBox="1"/>
-          <p:nvPr/>
-        </p:nvSpPr>
-        <p:spPr>
-          <a:xfrm>
-            <a:off x="609598" y="1511296"/>
-            <a:ext cx="10972773" cy="1142997"/>
-          </a:xfrm>
-          <a:prstGeom prst="rect">
-            <a:avLst/>
-          </a:prstGeom>
-          <a:noFill/>
-          <a:ln/>
-        </p:spPr>
-        <p:txBody>
-          <a:bodyPr wrap="square" lIns="0" tIns="0" rIns="0" bIns="0" rtlCol="0" anchor="t"/>
-          <a:lstStyle/>
-          <a:p>
-            <a:pPr algn="l" indent="0" marL="0">
-              <a:lnSpc>
-                <a:spcPct val="108000"/>
-              </a:lnSpc>
-              <a:buNone/>
-            </a:pPr>
-            <a:r>
-              <a:rPr lang="en-US" sz="3200" b="1" dirty="0">
-                <a:solidFill>
-                  <a:srgbClr val="F2EFE6"/>
-                </a:solidFill>
-                <a:latin typeface="Arial" pitchFamily="34" charset="0"/>
-                <a:ea typeface="Arial" pitchFamily="34" charset="-122"/>
-                <a:cs typeface="Arial" pitchFamily="34" charset="-120"/>
-              </a:rPr>
-              <a:t>Twintig kantoren in één hoek. </a:t>
-            </a:r>
-            <a:pPr algn="l" indent="0" marL="0">
-              <a:lnSpc>
-                <a:spcPct val="108000"/>
-              </a:lnSpc>
-              <a:buNone/>
-            </a:pPr>
-            <a:r>
-              <a:rPr lang="en-US" sz="3000" i="1" dirty="0">
-                <a:solidFill>
-                  <a:srgbClr val="F2EFE6"/>
-                </a:solidFill>
-                <a:latin typeface="Georgia" pitchFamily="34" charset="0"/>
-                <a:ea typeface="Georgia" pitchFamily="34" charset="-122"/>
-                <a:cs typeface="Georgia" pitchFamily="34" charset="-120"/>
-              </a:rPr>
-              <a:t>Vijfduizend</a:t>
-            </a:r>
-            <a:pPr algn="l" indent="0" marL="0">
-              <a:lnSpc>
-                <a:spcPct val="108000"/>
-              </a:lnSpc>
-              <a:buNone/>
-            </a:pPr>
-            <a:r>
-              <a:rPr lang="en-US" sz="3200" b="1" dirty="0">
-                <a:solidFill>
-                  <a:srgbClr val="F2EFE6"/>
-                </a:solidFill>
-                <a:latin typeface="Arial" pitchFamily="34" charset="0"/>
-                <a:ea typeface="Arial" pitchFamily="34" charset="-122"/>
-                <a:cs typeface="Arial" pitchFamily="34" charset="-120"/>
-              </a:rPr>
-              <a:t> in het land.</a:t>
-            </a:r>
-            <a:endParaRPr lang="en-US" sz="3200" dirty="0"/>
-          </a:p>
-        </p:txBody>
-      </p:sp>
       <p:pic>
         <p:nvPicPr>
-          <p:cNvPr id="7" name="Image 0" descr="/home/user/Test/assets/kaart-makelaars.png">    </p:cNvPr>
+          <p:cNvPr id="3" name="Image 0" descr="/home/user/Test/assets/okcreative-mark.png">    </p:cNvPr>
           <p:cNvPicPr>
             <a:picLocks noChangeAspect="1"/>
           </p:cNvPicPr>
@@ -7880,6 +7809,223 @@
         </p:blipFill>
         <p:spPr>
           <a:xfrm>
+            <a:off x="11226772" y="393699"/>
+            <a:ext cx="355599" cy="355599"/>
+          </a:xfrm>
+          <a:prstGeom prst="rect">
+            <a:avLst/>
+          </a:prstGeom>
+        </p:spPr>
+      </p:pic>
+      <p:sp>
+        <p:nvSpPr>
+          <p:cNvPr id="4" name="Text 1"/>
+          <p:cNvSpPr txBox="1"/>
+          <p:nvPr/>
+        </p:nvSpPr>
+        <p:spPr>
+          <a:xfrm>
+            <a:off x="609598" y="6381734"/>
+            <a:ext cx="5714986" cy="228599"/>
+          </a:xfrm>
+          <a:prstGeom prst="rect">
+            <a:avLst/>
+          </a:prstGeom>
+          <a:noFill/>
+          <a:ln/>
+        </p:spPr>
+        <p:txBody>
+          <a:bodyPr wrap="square" lIns="0" tIns="0" rIns="0" bIns="0" rtlCol="0" anchor="ctr"/>
+          <a:lstStyle/>
+          <a:p>
+            <a:pPr algn="l" indent="0" marL="0">
+              <a:buNone/>
+            </a:pPr>
+            <a:r>
+              <a:rPr lang="en-US" sz="750" b="1" spc="100" kern="0" dirty="0">
+                <a:solidFill>
+                  <a:srgbClr val="BDC3CE"/>
+                </a:solidFill>
+                <a:latin typeface="Arial" pitchFamily="34" charset="0"/>
+                <a:ea typeface="Arial" pitchFamily="34" charset="-122"/>
+                <a:cs typeface="Arial" pitchFamily="34" charset="-120"/>
+              </a:rPr>
+              <a:t>LINK. · Pilot makelaars · OK Creative Agency</a:t>
+            </a:r>
+            <a:endParaRPr lang="en-US" sz="750" dirty="0"/>
+          </a:p>
+        </p:txBody>
+      </p:sp>
+      <p:sp>
+        <p:nvSpPr>
+          <p:cNvPr id="5" name="Text 2"/>
+          <p:cNvSpPr txBox="1"/>
+          <p:nvPr/>
+        </p:nvSpPr>
+        <p:spPr>
+          <a:xfrm>
+            <a:off x="9677376" y="6381734"/>
+            <a:ext cx="1904995" cy="228599"/>
+          </a:xfrm>
+          <a:prstGeom prst="rect">
+            <a:avLst/>
+          </a:prstGeom>
+          <a:noFill/>
+          <a:ln/>
+        </p:spPr>
+        <p:txBody>
+          <a:bodyPr wrap="square" lIns="0" tIns="0" rIns="0" bIns="0" rtlCol="0" anchor="ctr"/>
+          <a:lstStyle/>
+          <a:p>
+            <a:pPr algn="r" indent="0" marL="0">
+              <a:buNone/>
+            </a:pPr>
+            <a:r>
+              <a:rPr lang="en-US" sz="750" b="1" spc="100" kern="0" dirty="0">
+                <a:solidFill>
+                  <a:srgbClr val="BDC3CE"/>
+                </a:solidFill>
+                <a:latin typeface="Arial" pitchFamily="34" charset="0"/>
+                <a:ea typeface="Arial" pitchFamily="34" charset="-122"/>
+                <a:cs typeface="Arial" pitchFamily="34" charset="-120"/>
+              </a:rPr>
+              <a:t>4 / 12</a:t>
+            </a:r>
+            <a:endParaRPr lang="en-US" sz="750" dirty="0"/>
+          </a:p>
+        </p:txBody>
+      </p:sp>
+      <p:sp>
+        <p:nvSpPr>
+          <p:cNvPr id="6" name="Text 3"/>
+          <p:cNvSpPr txBox="1"/>
+          <p:nvPr/>
+        </p:nvSpPr>
+        <p:spPr>
+          <a:xfrm>
+            <a:off x="609598" y="1206497"/>
+            <a:ext cx="10159975" cy="215899"/>
+          </a:xfrm>
+          <a:prstGeom prst="rect">
+            <a:avLst/>
+          </a:prstGeom>
+          <a:noFill/>
+          <a:ln/>
+        </p:spPr>
+        <p:txBody>
+          <a:bodyPr wrap="square" lIns="0" tIns="0" rIns="0" bIns="0" rtlCol="0" anchor="ctr"/>
+          <a:lstStyle/>
+          <a:p>
+            <a:pPr algn="l" indent="0" marL="0">
+              <a:buNone/>
+            </a:pPr>
+            <a:r>
+              <a:rPr lang="en-US" sz="950" b="1" spc="400" kern="0" dirty="0">
+                <a:solidFill>
+                  <a:srgbClr val="38B6FF"/>
+                </a:solidFill>
+                <a:latin typeface="Arial" pitchFamily="34" charset="0"/>
+                <a:ea typeface="Arial" pitchFamily="34" charset="-122"/>
+                <a:cs typeface="Arial" pitchFamily="34" charset="-120"/>
+              </a:rPr>
+              <a:t>HET POTENTIEEL</a:t>
+            </a:r>
+            <a:endParaRPr lang="en-US" sz="950" dirty="0"/>
+          </a:p>
+        </p:txBody>
+      </p:sp>
+      <p:sp>
+        <p:nvSpPr>
+          <p:cNvPr id="7" name="Text 4"/>
+          <p:cNvSpPr txBox="1"/>
+          <p:nvPr/>
+        </p:nvSpPr>
+        <p:spPr>
+          <a:xfrm>
+            <a:off x="609598" y="1511296"/>
+            <a:ext cx="10972773" cy="1142997"/>
+          </a:xfrm>
+          <a:prstGeom prst="rect">
+            <a:avLst/>
+          </a:prstGeom>
+          <a:noFill/>
+          <a:ln/>
+        </p:spPr>
+        <p:txBody>
+          <a:bodyPr wrap="square" lIns="0" tIns="0" rIns="0" bIns="0" rtlCol="0" anchor="t"/>
+          <a:lstStyle/>
+          <a:p>
+            <a:pPr algn="l" indent="0" marL="0">
+              <a:lnSpc>
+                <a:spcPct val="108000"/>
+              </a:lnSpc>
+              <a:buNone/>
+            </a:pPr>
+            <a:r>
+              <a:rPr lang="en-US" sz="3200" b="1" dirty="0">
+                <a:solidFill>
+                  <a:srgbClr val="F2EFE6"/>
+                </a:solidFill>
+                <a:latin typeface="Arial" pitchFamily="34" charset="0"/>
+                <a:ea typeface="Arial" pitchFamily="34" charset="-122"/>
+                <a:cs typeface="Arial" pitchFamily="34" charset="-120"/>
+              </a:rPr>
+              <a:t>Twintig kantoren in één hoek. </a:t>
+            </a:r>
+            <a:pPr algn="l" indent="0" marL="0">
+              <a:lnSpc>
+                <a:spcPct val="108000"/>
+              </a:lnSpc>
+              <a:buNone/>
+            </a:pPr>
+            <a:r>
+              <a:rPr lang="en-US" sz="3000" i="1" dirty="0">
+                <a:solidFill>
+                  <a:srgbClr val="F2EFE6"/>
+                </a:solidFill>
+                <a:latin typeface="Georgia" pitchFamily="34" charset="0"/>
+                <a:ea typeface="Georgia" pitchFamily="34" charset="-122"/>
+                <a:cs typeface="Georgia" pitchFamily="34" charset="-120"/>
+              </a:rPr>
+              <a:t>Vijfduizend</a:t>
+            </a:r>
+            <a:pPr algn="l" indent="0" marL="0">
+              <a:lnSpc>
+                <a:spcPct val="108000"/>
+              </a:lnSpc>
+              <a:buNone/>
+            </a:pPr>
+            <a:r>
+              <a:rPr lang="en-US" sz="3200" b="1" dirty="0">
+                <a:solidFill>
+                  <a:srgbClr val="F2EFE6"/>
+                </a:solidFill>
+                <a:latin typeface="Arial" pitchFamily="34" charset="0"/>
+                <a:ea typeface="Arial" pitchFamily="34" charset="-122"/>
+                <a:cs typeface="Arial" pitchFamily="34" charset="-120"/>
+              </a:rPr>
+              <a:t> in het land.</a:t>
+            </a:r>
+            <a:endParaRPr lang="en-US" sz="3200" dirty="0"/>
+          </a:p>
+        </p:txBody>
+      </p:sp>
+      <p:pic>
+        <p:nvPicPr>
+          <p:cNvPr id="8" name="Image 1" descr="/home/user/Test/assets/kaart-makelaars.png">    </p:cNvPr>
+          <p:cNvPicPr>
+            <a:picLocks noChangeAspect="1"/>
+          </p:cNvPicPr>
+          <p:nvPr/>
+        </p:nvPicPr>
+        <p:blipFill>
+          <a:blip r:embed="rId2"/>
+          <a:stretch>
+            <a:fillRect/>
+          </a:stretch>
+        </p:blipFill>
+        <p:spPr>
+          <a:xfrm>
             <a:off x="8851878" y="2619061"/>
             <a:ext cx="2730493" cy="3347056"/>
           </a:xfrm>
@@ -7890,7 +8036,7 @@
       </p:pic>
       <p:sp>
         <p:nvSpPr>
-          <p:cNvPr id="8" name="Text 5"/>
+          <p:cNvPr id="9" name="Text 5"/>
           <p:cNvSpPr txBox="1"/>
           <p:nvPr/>
         </p:nvSpPr>
@@ -7932,7 +8078,7 @@
       </p:sp>
       <p:sp>
         <p:nvSpPr>
-          <p:cNvPr id="9" name="Text 6"/>
+          <p:cNvPr id="10" name="Text 6"/>
           <p:cNvSpPr txBox="1"/>
           <p:nvPr/>
         </p:nvSpPr>
@@ -7974,7 +8120,7 @@
       </p:sp>
       <p:sp>
         <p:nvSpPr>
-          <p:cNvPr id="10" name="Text 7"/>
+          <p:cNvPr id="11" name="Text 7"/>
           <p:cNvSpPr txBox="1"/>
           <p:nvPr/>
         </p:nvSpPr>
@@ -8013,7 +8159,7 @@
       </p:sp>
       <p:sp>
         <p:nvSpPr>
-          <p:cNvPr id="11" name="Text 8"/>
+          <p:cNvPr id="12" name="Text 8"/>
           <p:cNvSpPr txBox="1"/>
           <p:nvPr/>
         </p:nvSpPr>
@@ -8055,7 +8201,7 @@
       </p:sp>
       <p:sp>
         <p:nvSpPr>
-          <p:cNvPr id="12" name="Text 9"/>
+          <p:cNvPr id="13" name="Text 9"/>
           <p:cNvSpPr txBox="1"/>
           <p:nvPr/>
         </p:nvSpPr>
@@ -8094,7 +8240,7 @@
       </p:sp>
       <p:sp>
         <p:nvSpPr>
-          <p:cNvPr id="13" name="Text 10"/>
+          <p:cNvPr id="14" name="Text 10"/>
           <p:cNvSpPr txBox="1"/>
           <p:nvPr/>
         </p:nvSpPr>
@@ -8136,7 +8282,7 @@
       </p:sp>
       <p:sp>
         <p:nvSpPr>
-          <p:cNvPr id="14" name="Text 11"/>
+          <p:cNvPr id="15" name="Text 11"/>
           <p:cNvSpPr txBox="1"/>
           <p:nvPr/>
         </p:nvSpPr>
@@ -8175,7 +8321,7 @@
       </p:sp>
       <p:sp>
         <p:nvSpPr>
-          <p:cNvPr id="15" name="Text 12"/>
+          <p:cNvPr id="16" name="Text 12"/>
           <p:cNvSpPr txBox="1"/>
           <p:nvPr/>
         </p:nvSpPr>
@@ -8300,9 +8446,33 @@
           </a:p>
         </p:txBody>
       </p:sp>
-      <p:sp>
-        <p:nvSpPr>
-          <p:cNvPr id="3" name="Text 1"/>
+      <p:pic>
+        <p:nvPicPr>
+          <p:cNvPr id="3" name="Image 0" descr="/home/user/Test/assets/okcreative-mark.png">    </p:cNvPr>
+          <p:cNvPicPr>
+            <a:picLocks noChangeAspect="1"/>
+          </p:cNvPicPr>
+          <p:nvPr/>
+        </p:nvPicPr>
+        <p:blipFill>
+          <a:blip r:embed="rId1"/>
+          <a:stretch>
+            <a:fillRect/>
+          </a:stretch>
+        </p:blipFill>
+        <p:spPr>
+          <a:xfrm>
+            <a:off x="11226772" y="393699"/>
+            <a:ext cx="355599" cy="355599"/>
+          </a:xfrm>
+          <a:prstGeom prst="rect">
+            <a:avLst/>
+          </a:prstGeom>
+        </p:spPr>
+      </p:pic>
+      <p:sp>
+        <p:nvSpPr>
+          <p:cNvPr id="4" name="Text 1"/>
           <p:cNvSpPr txBox="1"/>
           <p:nvPr/>
         </p:nvSpPr>
@@ -8341,7 +8511,7 @@
       </p:sp>
       <p:sp>
         <p:nvSpPr>
-          <p:cNvPr id="4" name="Text 2"/>
+          <p:cNvPr id="5" name="Text 2"/>
           <p:cNvSpPr txBox="1"/>
           <p:nvPr/>
         </p:nvSpPr>
@@ -8380,7 +8550,7 @@
       </p:sp>
       <p:sp>
         <p:nvSpPr>
-          <p:cNvPr id="5" name="Text 3"/>
+          <p:cNvPr id="6" name="Text 3"/>
           <p:cNvSpPr txBox="1"/>
           <p:nvPr/>
         </p:nvSpPr>
@@ -8419,7 +8589,7 @@
       </p:sp>
       <p:sp>
         <p:nvSpPr>
-          <p:cNvPr id="6" name="Text 4"/>
+          <p:cNvPr id="7" name="Text 4"/>
           <p:cNvSpPr txBox="1"/>
           <p:nvPr/>
         </p:nvSpPr>
@@ -8495,7 +8665,7 @@
       </p:sp>
       <p:sp>
         <p:nvSpPr>
-          <p:cNvPr id="7" name="Shape 5"/>
+          <p:cNvPr id="8" name="Shape 5"/>
           <p:cNvSpPr/>
           <p:nvPr/>
         </p:nvSpPr>
@@ -8517,7 +8687,7 @@
       </p:sp>
       <p:sp>
         <p:nvSpPr>
-          <p:cNvPr id="8" name="Text 6"/>
+          <p:cNvPr id="9" name="Text 6"/>
           <p:cNvSpPr txBox="1"/>
           <p:nvPr/>
         </p:nvSpPr>
@@ -8556,7 +8726,7 @@
       </p:sp>
       <p:sp>
         <p:nvSpPr>
-          <p:cNvPr id="9" name="Text 7"/>
+          <p:cNvPr id="10" name="Text 7"/>
           <p:cNvSpPr txBox="1"/>
           <p:nvPr/>
         </p:nvSpPr>
@@ -8595,7 +8765,7 @@
       </p:sp>
       <p:sp>
         <p:nvSpPr>
-          <p:cNvPr id="10" name="Text 8"/>
+          <p:cNvPr id="11" name="Text 8"/>
           <p:cNvSpPr txBox="1"/>
           <p:nvPr/>
         </p:nvSpPr>
@@ -8629,7 +8799,7 @@
                 <a:ea typeface="Arial" pitchFamily="34" charset="-122"/>
                 <a:cs typeface="Arial" pitchFamily="34" charset="-120"/>
               </a:rPr>
-              <a:t>Met de hand, door Mark en Swaan, naast al het andere werk.</a:t>
+              <a:t>Met de hand opgebouwd, naast al het andere werk.</a:t>
             </a:r>
             <a:endParaRPr lang="en-US" sz="950" dirty="0"/>
           </a:p>
@@ -8637,7 +8807,7 @@
       </p:sp>
       <p:sp>
         <p:nvSpPr>
-          <p:cNvPr id="11" name="Shape 9"/>
+          <p:cNvPr id="12" name="Shape 9"/>
           <p:cNvSpPr/>
           <p:nvPr/>
         </p:nvSpPr>
@@ -8659,7 +8829,7 @@
       </p:sp>
       <p:sp>
         <p:nvSpPr>
-          <p:cNvPr id="12" name="Text 10"/>
+          <p:cNvPr id="13" name="Text 10"/>
           <p:cNvSpPr txBox="1"/>
           <p:nvPr/>
         </p:nvSpPr>
@@ -8698,7 +8868,7 @@
       </p:sp>
       <p:sp>
         <p:nvSpPr>
-          <p:cNvPr id="13" name="Text 11"/>
+          <p:cNvPr id="14" name="Text 11"/>
           <p:cNvSpPr txBox="1"/>
           <p:nvPr/>
         </p:nvSpPr>
@@ -8737,7 +8907,7 @@
       </p:sp>
       <p:sp>
         <p:nvSpPr>
-          <p:cNvPr id="14" name="Text 12"/>
+          <p:cNvPr id="15" name="Text 12"/>
           <p:cNvSpPr txBox="1"/>
           <p:nvPr/>
         </p:nvSpPr>
@@ -8779,7 +8949,7 @@
       </p:sp>
       <p:sp>
         <p:nvSpPr>
-          <p:cNvPr id="15" name="Shape 13"/>
+          <p:cNvPr id="16" name="Shape 13"/>
           <p:cNvSpPr/>
           <p:nvPr/>
         </p:nvSpPr>
@@ -8801,7 +8971,7 @@
       </p:sp>
       <p:sp>
         <p:nvSpPr>
-          <p:cNvPr id="16" name="Text 14"/>
+          <p:cNvPr id="17" name="Text 14"/>
           <p:cNvSpPr txBox="1"/>
           <p:nvPr/>
         </p:nvSpPr>
@@ -8840,7 +9010,7 @@
       </p:sp>
       <p:sp>
         <p:nvSpPr>
-          <p:cNvPr id="17" name="Text 15"/>
+          <p:cNvPr id="18" name="Text 15"/>
           <p:cNvSpPr txBox="1"/>
           <p:nvPr/>
         </p:nvSpPr>
@@ -8879,7 +9049,7 @@
       </p:sp>
       <p:sp>
         <p:nvSpPr>
-          <p:cNvPr id="18" name="Text 16"/>
+          <p:cNvPr id="19" name="Text 16"/>
           <p:cNvSpPr txBox="1"/>
           <p:nvPr/>
         </p:nvSpPr>
@@ -8921,7 +9091,7 @@
       </p:sp>
       <p:sp>
         <p:nvSpPr>
-          <p:cNvPr id="19" name="Shape 17"/>
+          <p:cNvPr id="20" name="Shape 17"/>
           <p:cNvSpPr/>
           <p:nvPr/>
         </p:nvSpPr>
@@ -8943,7 +9113,7 @@
       </p:sp>
       <p:sp>
         <p:nvSpPr>
-          <p:cNvPr id="20" name="Text 18"/>
+          <p:cNvPr id="21" name="Text 18"/>
           <p:cNvSpPr txBox="1"/>
           <p:nvPr/>
         </p:nvSpPr>
@@ -8982,7 +9152,7 @@
       </p:sp>
       <p:sp>
         <p:nvSpPr>
-          <p:cNvPr id="21" name="Text 19"/>
+          <p:cNvPr id="22" name="Text 19"/>
           <p:cNvSpPr txBox="1"/>
           <p:nvPr/>
         </p:nvSpPr>
@@ -9021,7 +9191,7 @@
       </p:sp>
       <p:sp>
         <p:nvSpPr>
-          <p:cNvPr id="22" name="Text 20"/>
+          <p:cNvPr id="23" name="Text 20"/>
           <p:cNvSpPr txBox="1"/>
           <p:nvPr/>
         </p:nvSpPr>
@@ -9063,7 +9233,7 @@
       </p:sp>
       <p:sp>
         <p:nvSpPr>
-          <p:cNvPr id="23" name="Shape 21"/>
+          <p:cNvPr id="24" name="Shape 21"/>
           <p:cNvSpPr/>
           <p:nvPr/>
         </p:nvSpPr>
@@ -9083,7 +9253,7 @@
       </p:sp>
       <p:sp>
         <p:nvSpPr>
-          <p:cNvPr id="24" name="Text 22"/>
+          <p:cNvPr id="25" name="Text 22"/>
           <p:cNvSpPr txBox="1"/>
           <p:nvPr/>
         </p:nvSpPr>
@@ -9205,246 +9375,9 @@
           </a:p>
         </p:txBody>
       </p:sp>
-      <p:sp>
-        <p:nvSpPr>
-          <p:cNvPr id="3" name="Text 1"/>
-          <p:cNvSpPr txBox="1"/>
-          <p:nvPr/>
-        </p:nvSpPr>
-        <p:spPr>
-          <a:xfrm>
-            <a:off x="609598" y="6381734"/>
-            <a:ext cx="5714986" cy="228599"/>
-          </a:xfrm>
-          <a:prstGeom prst="rect">
-            <a:avLst/>
-          </a:prstGeom>
-          <a:noFill/>
-          <a:ln/>
-        </p:spPr>
-        <p:txBody>
-          <a:bodyPr wrap="square" lIns="0" tIns="0" rIns="0" bIns="0" rtlCol="0" anchor="ctr"/>
-          <a:lstStyle/>
-          <a:p>
-            <a:pPr algn="l" indent="0" marL="0">
-              <a:buNone/>
-            </a:pPr>
-            <a:r>
-              <a:rPr lang="en-US" sz="750" b="1" spc="100" kern="0" dirty="0">
-                <a:solidFill>
-                  <a:srgbClr val="6F6A5C"/>
-                </a:solidFill>
-                <a:latin typeface="Arial" pitchFamily="34" charset="0"/>
-                <a:ea typeface="Arial" pitchFamily="34" charset="-122"/>
-                <a:cs typeface="Arial" pitchFamily="34" charset="-120"/>
-              </a:rPr>
-              <a:t>LINK. · Pilot makelaars · OK Creative Agency</a:t>
-            </a:r>
-            <a:endParaRPr lang="en-US" sz="750" dirty="0"/>
-          </a:p>
-        </p:txBody>
-      </p:sp>
-      <p:sp>
-        <p:nvSpPr>
-          <p:cNvPr id="4" name="Text 2"/>
-          <p:cNvSpPr txBox="1"/>
-          <p:nvPr/>
-        </p:nvSpPr>
-        <p:spPr>
-          <a:xfrm>
-            <a:off x="9677376" y="6381734"/>
-            <a:ext cx="1904995" cy="228599"/>
-          </a:xfrm>
-          <a:prstGeom prst="rect">
-            <a:avLst/>
-          </a:prstGeom>
-          <a:noFill/>
-          <a:ln/>
-        </p:spPr>
-        <p:txBody>
-          <a:bodyPr wrap="square" lIns="0" tIns="0" rIns="0" bIns="0" rtlCol="0" anchor="ctr"/>
-          <a:lstStyle/>
-          <a:p>
-            <a:pPr algn="r" indent="0" marL="0">
-              <a:buNone/>
-            </a:pPr>
-            <a:r>
-              <a:rPr lang="en-US" sz="750" b="1" spc="100" kern="0" dirty="0">
-                <a:solidFill>
-                  <a:srgbClr val="6F6A5C"/>
-                </a:solidFill>
-                <a:latin typeface="Arial" pitchFamily="34" charset="0"/>
-                <a:ea typeface="Arial" pitchFamily="34" charset="-122"/>
-                <a:cs typeface="Arial" pitchFamily="34" charset="-120"/>
-              </a:rPr>
-              <a:t>6 / 12</a:t>
-            </a:r>
-            <a:endParaRPr lang="en-US" sz="750" dirty="0"/>
-          </a:p>
-        </p:txBody>
-      </p:sp>
-      <p:sp>
-        <p:nvSpPr>
-          <p:cNvPr id="5" name="Text 3"/>
-          <p:cNvSpPr txBox="1"/>
-          <p:nvPr/>
-        </p:nvSpPr>
-        <p:spPr>
-          <a:xfrm>
-            <a:off x="609598" y="1206497"/>
-            <a:ext cx="10159975" cy="215899"/>
-          </a:xfrm>
-          <a:prstGeom prst="rect">
-            <a:avLst/>
-          </a:prstGeom>
-          <a:noFill/>
-          <a:ln/>
-        </p:spPr>
-        <p:txBody>
-          <a:bodyPr wrap="square" lIns="0" tIns="0" rIns="0" bIns="0" rtlCol="0" anchor="ctr"/>
-          <a:lstStyle/>
-          <a:p>
-            <a:pPr algn="l" indent="0" marL="0">
-              <a:buNone/>
-            </a:pPr>
-            <a:r>
-              <a:rPr lang="en-US" sz="950" b="1" spc="400" kern="0" dirty="0">
-                <a:solidFill>
-                  <a:srgbClr val="38B6FF"/>
-                </a:solidFill>
-                <a:latin typeface="Arial" pitchFamily="34" charset="0"/>
-                <a:ea typeface="Arial" pitchFamily="34" charset="-122"/>
-                <a:cs typeface="Arial" pitchFamily="34" charset="-120"/>
-              </a:rPr>
-              <a:t>WAT WIJ DOEN</a:t>
-            </a:r>
-            <a:endParaRPr lang="en-US" sz="950" dirty="0"/>
-          </a:p>
-        </p:txBody>
-      </p:sp>
-      <p:sp>
-        <p:nvSpPr>
-          <p:cNvPr id="6" name="Text 4"/>
-          <p:cNvSpPr txBox="1"/>
-          <p:nvPr/>
-        </p:nvSpPr>
-        <p:spPr>
-          <a:xfrm>
-            <a:off x="609598" y="1511296"/>
-            <a:ext cx="10972773" cy="1142997"/>
-          </a:xfrm>
-          <a:prstGeom prst="rect">
-            <a:avLst/>
-          </a:prstGeom>
-          <a:noFill/>
-          <a:ln/>
-        </p:spPr>
-        <p:txBody>
-          <a:bodyPr wrap="square" lIns="0" tIns="0" rIns="0" bIns="0" rtlCol="0" anchor="t"/>
-          <a:lstStyle/>
-          <a:p>
-            <a:pPr algn="l" indent="0" marL="0">
-              <a:lnSpc>
-                <a:spcPct val="108000"/>
-              </a:lnSpc>
-              <a:buNone/>
-            </a:pPr>
-            <a:r>
-              <a:rPr lang="en-US" sz="3200" b="1" dirty="0">
-                <a:solidFill>
-                  <a:srgbClr val="1C2230"/>
-                </a:solidFill>
-                <a:latin typeface="Arial" pitchFamily="34" charset="0"/>
-                <a:ea typeface="Arial" pitchFamily="34" charset="-122"/>
-                <a:cs typeface="Arial" pitchFamily="34" charset="-120"/>
-              </a:rPr>
-              <a:t>Eén team dat belt, opvolgt en </a:t>
-            </a:r>
-            <a:pPr algn="l" indent="0" marL="0">
-              <a:lnSpc>
-                <a:spcPct val="108000"/>
-              </a:lnSpc>
-              <a:buNone/>
-            </a:pPr>
-            <a:r>
-              <a:rPr lang="en-US" sz="3000" i="1" dirty="0">
-                <a:solidFill>
-                  <a:srgbClr val="1C2230"/>
-                </a:solidFill>
-                <a:latin typeface="Georgia" pitchFamily="34" charset="0"/>
-                <a:ea typeface="Georgia" pitchFamily="34" charset="-122"/>
-                <a:cs typeface="Georgia" pitchFamily="34" charset="-120"/>
-              </a:rPr>
-              <a:t>afspraken levert</a:t>
-            </a:r>
-            <a:pPr algn="l" indent="0" marL="0">
-              <a:lnSpc>
-                <a:spcPct val="108000"/>
-              </a:lnSpc>
-              <a:buNone/>
-            </a:pPr>
-            <a:r>
-              <a:rPr lang="en-US" sz="3200" b="1" dirty="0">
-                <a:solidFill>
-                  <a:srgbClr val="1C2230"/>
-                </a:solidFill>
-                <a:latin typeface="Arial" pitchFamily="34" charset="0"/>
-                <a:ea typeface="Arial" pitchFamily="34" charset="-122"/>
-                <a:cs typeface="Arial" pitchFamily="34" charset="-120"/>
-              </a:rPr>
-              <a:t>.</a:t>
-            </a:r>
-            <a:endParaRPr lang="en-US" sz="3200" dirty="0"/>
-          </a:p>
-        </p:txBody>
-      </p:sp>
-      <p:sp>
-        <p:nvSpPr>
-          <p:cNvPr id="7" name="Shape 5"/>
-          <p:cNvSpPr/>
-          <p:nvPr/>
-        </p:nvSpPr>
-        <p:spPr>
-          <a:xfrm>
-            <a:off x="609598" y="2793993"/>
-            <a:ext cx="2628893" cy="3238492"/>
-          </a:xfrm>
-          <a:prstGeom prst="roundRect">
-            <a:avLst>
-              <a:gd name="adj" fmla="val 3865"/>
-            </a:avLst>
-          </a:prstGeom>
-          <a:solidFill>
-            <a:srgbClr val="F8F4EB"/>
-          </a:solidFill>
-          <a:ln/>
-        </p:spPr>
-      </p:sp>
-      <p:sp>
-        <p:nvSpPr>
-          <p:cNvPr id="8" name="Shape 6"/>
-          <p:cNvSpPr/>
-          <p:nvPr/>
-        </p:nvSpPr>
-        <p:spPr>
-          <a:xfrm>
-            <a:off x="863598" y="3073392"/>
-            <a:ext cx="380999" cy="380999"/>
-          </a:xfrm>
-          <a:prstGeom prst="roundRect">
-            <a:avLst>
-              <a:gd name="adj" fmla="val 23333"/>
-            </a:avLst>
-          </a:prstGeom>
-          <a:solidFill>
-            <a:srgbClr val="DDEBF3"/>
-          </a:solidFill>
-          <a:ln/>
-        </p:spPr>
-      </p:sp>
       <p:pic>
         <p:nvPicPr>
-          <p:cNvPr id="9" name="Image 0" descr="preencoded.png">    </p:cNvPr>
+          <p:cNvPr id="3" name="Image 0" descr="/home/user/Test/assets/okcreative-mark.png">    </p:cNvPr>
           <p:cNvPicPr>
             <a:picLocks noChangeAspect="1"/>
           </p:cNvPicPr>
@@ -9458,8 +9391,8 @@
         </p:blipFill>
         <p:spPr>
           <a:xfrm>
-            <a:off x="958848" y="3168642"/>
-            <a:ext cx="190500" cy="190500"/>
+            <a:off x="11226772" y="393699"/>
+            <a:ext cx="355599" cy="355599"/>
           </a:xfrm>
           <a:prstGeom prst="rect">
             <a:avLst/>
@@ -9468,14 +9401,131 @@
       </p:pic>
       <p:sp>
         <p:nvSpPr>
-          <p:cNvPr id="10" name="Text 7"/>
-          <p:cNvSpPr txBox="1"/>
-          <p:nvPr/>
-        </p:nvSpPr>
-        <p:spPr>
-          <a:xfrm>
-            <a:off x="863598" y="3632191"/>
-            <a:ext cx="2120895" cy="533399"/>
+          <p:cNvPr id="4" name="Text 1"/>
+          <p:cNvSpPr txBox="1"/>
+          <p:nvPr/>
+        </p:nvSpPr>
+        <p:spPr>
+          <a:xfrm>
+            <a:off x="609598" y="6381734"/>
+            <a:ext cx="5714986" cy="228599"/>
+          </a:xfrm>
+          <a:prstGeom prst="rect">
+            <a:avLst/>
+          </a:prstGeom>
+          <a:noFill/>
+          <a:ln/>
+        </p:spPr>
+        <p:txBody>
+          <a:bodyPr wrap="square" lIns="0" tIns="0" rIns="0" bIns="0" rtlCol="0" anchor="ctr"/>
+          <a:lstStyle/>
+          <a:p>
+            <a:pPr algn="l" indent="0" marL="0">
+              <a:buNone/>
+            </a:pPr>
+            <a:r>
+              <a:rPr lang="en-US" sz="750" b="1" spc="100" kern="0" dirty="0">
+                <a:solidFill>
+                  <a:srgbClr val="6F6A5C"/>
+                </a:solidFill>
+                <a:latin typeface="Arial" pitchFamily="34" charset="0"/>
+                <a:ea typeface="Arial" pitchFamily="34" charset="-122"/>
+                <a:cs typeface="Arial" pitchFamily="34" charset="-120"/>
+              </a:rPr>
+              <a:t>LINK. · Pilot makelaars · OK Creative Agency</a:t>
+            </a:r>
+            <a:endParaRPr lang="en-US" sz="750" dirty="0"/>
+          </a:p>
+        </p:txBody>
+      </p:sp>
+      <p:sp>
+        <p:nvSpPr>
+          <p:cNvPr id="5" name="Text 2"/>
+          <p:cNvSpPr txBox="1"/>
+          <p:nvPr/>
+        </p:nvSpPr>
+        <p:spPr>
+          <a:xfrm>
+            <a:off x="9677376" y="6381734"/>
+            <a:ext cx="1904995" cy="228599"/>
+          </a:xfrm>
+          <a:prstGeom prst="rect">
+            <a:avLst/>
+          </a:prstGeom>
+          <a:noFill/>
+          <a:ln/>
+        </p:spPr>
+        <p:txBody>
+          <a:bodyPr wrap="square" lIns="0" tIns="0" rIns="0" bIns="0" rtlCol="0" anchor="ctr"/>
+          <a:lstStyle/>
+          <a:p>
+            <a:pPr algn="r" indent="0" marL="0">
+              <a:buNone/>
+            </a:pPr>
+            <a:r>
+              <a:rPr lang="en-US" sz="750" b="1" spc="100" kern="0" dirty="0">
+                <a:solidFill>
+                  <a:srgbClr val="6F6A5C"/>
+                </a:solidFill>
+                <a:latin typeface="Arial" pitchFamily="34" charset="0"/>
+                <a:ea typeface="Arial" pitchFamily="34" charset="-122"/>
+                <a:cs typeface="Arial" pitchFamily="34" charset="-120"/>
+              </a:rPr>
+              <a:t>6 / 12</a:t>
+            </a:r>
+            <a:endParaRPr lang="en-US" sz="750" dirty="0"/>
+          </a:p>
+        </p:txBody>
+      </p:sp>
+      <p:sp>
+        <p:nvSpPr>
+          <p:cNvPr id="6" name="Text 3"/>
+          <p:cNvSpPr txBox="1"/>
+          <p:nvPr/>
+        </p:nvSpPr>
+        <p:spPr>
+          <a:xfrm>
+            <a:off x="609598" y="1206497"/>
+            <a:ext cx="10159975" cy="215899"/>
+          </a:xfrm>
+          <a:prstGeom prst="rect">
+            <a:avLst/>
+          </a:prstGeom>
+          <a:noFill/>
+          <a:ln/>
+        </p:spPr>
+        <p:txBody>
+          <a:bodyPr wrap="square" lIns="0" tIns="0" rIns="0" bIns="0" rtlCol="0" anchor="ctr"/>
+          <a:lstStyle/>
+          <a:p>
+            <a:pPr algn="l" indent="0" marL="0">
+              <a:buNone/>
+            </a:pPr>
+            <a:r>
+              <a:rPr lang="en-US" sz="950" b="1" spc="400" kern="0" dirty="0">
+                <a:solidFill>
+                  <a:srgbClr val="38B6FF"/>
+                </a:solidFill>
+                <a:latin typeface="Arial" pitchFamily="34" charset="0"/>
+                <a:ea typeface="Arial" pitchFamily="34" charset="-122"/>
+                <a:cs typeface="Arial" pitchFamily="34" charset="-120"/>
+              </a:rPr>
+              <a:t>WAT WIJ DOEN</a:t>
+            </a:r>
+            <a:endParaRPr lang="en-US" sz="950" dirty="0"/>
+          </a:p>
+        </p:txBody>
+      </p:sp>
+      <p:sp>
+        <p:nvSpPr>
+          <p:cNvPr id="7" name="Text 4"/>
+          <p:cNvSpPr txBox="1"/>
+          <p:nvPr/>
+        </p:nvSpPr>
+        <p:spPr>
+          <a:xfrm>
+            <a:off x="609598" y="1511296"/>
+            <a:ext cx="10972773" cy="1142997"/>
           </a:xfrm>
           <a:prstGeom prst="rect">
             <a:avLst/>
@@ -9487,14 +9537,14 @@
           <a:bodyPr wrap="square" lIns="0" tIns="0" rIns="0" bIns="0" rtlCol="0" anchor="t"/>
           <a:lstStyle/>
           <a:p>
-            <a:pPr indent="0" marL="0">
+            <a:pPr algn="l" indent="0" marL="0">
               <a:lnSpc>
-                <a:spcPct val="115000"/>
+                <a:spcPct val="108000"/>
               </a:lnSpc>
               <a:buNone/>
             </a:pPr>
             <a:r>
-              <a:rPr lang="en-US" sz="1350" b="1" dirty="0">
+              <a:rPr lang="en-US" sz="3200" b="1" dirty="0">
                 <a:solidFill>
                   <a:srgbClr val="1C2230"/>
                 </a:solidFill>
@@ -9502,63 +9552,55 @@
                 <a:ea typeface="Arial" pitchFamily="34" charset="-122"/>
                 <a:cs typeface="Arial" pitchFamily="34" charset="-120"/>
               </a:rPr>
-              <a:t>Cold calling</a:t>
-            </a:r>
-            <a:endParaRPr lang="en-US" sz="1350" dirty="0"/>
-          </a:p>
-        </p:txBody>
-      </p:sp>
-      <p:sp>
-        <p:nvSpPr>
-          <p:cNvPr id="11" name="Text 8"/>
-          <p:cNvSpPr txBox="1"/>
-          <p:nvPr/>
-        </p:nvSpPr>
-        <p:spPr>
-          <a:xfrm>
-            <a:off x="863598" y="4203689"/>
-            <a:ext cx="2120895" cy="1587496"/>
-          </a:xfrm>
-          <a:prstGeom prst="rect">
-            <a:avLst/>
-          </a:prstGeom>
-          <a:noFill/>
-          <a:ln/>
-        </p:spPr>
-        <p:txBody>
-          <a:bodyPr wrap="square" lIns="0" tIns="0" rIns="0" bIns="0" rtlCol="0" anchor="t"/>
-          <a:lstStyle/>
-          <a:p>
-            <a:pPr indent="0" marL="0">
+              <a:t>Eén team dat belt, opvolgt en </a:t>
+            </a:r>
+            <a:pPr algn="l" indent="0" marL="0">
               <a:lnSpc>
-                <a:spcPct val="135000"/>
+                <a:spcPct val="108000"/>
               </a:lnSpc>
               <a:buNone/>
             </a:pPr>
             <a:r>
-              <a:rPr lang="en-US" sz="950" dirty="0">
-                <a:solidFill>
-                  <a:srgbClr val="6F6A5C"/>
-                </a:solidFill>
-                <a:latin typeface="Arial" pitchFamily="34" charset="0"/>
-                <a:ea typeface="Arial" pitchFamily="34" charset="-122"/>
-                <a:cs typeface="Arial" pitchFamily="34" charset="-120"/>
-              </a:rPr>
-              <a:t>Ervaren B2B-bellers die het gesprek voeren met de eigenaar of de marketingverantwoordelijke. Eigen belsysteem en een nummer op jullie naam.</a:t>
-            </a:r>
-            <a:endParaRPr lang="en-US" sz="950" dirty="0"/>
-          </a:p>
-        </p:txBody>
-      </p:sp>
-      <p:sp>
-        <p:nvSpPr>
-          <p:cNvPr id="12" name="Shape 9"/>
+              <a:rPr lang="en-US" sz="3000" i="1" dirty="0">
+                <a:solidFill>
+                  <a:srgbClr val="1C2230"/>
+                </a:solidFill>
+                <a:latin typeface="Georgia" pitchFamily="34" charset="0"/>
+                <a:ea typeface="Georgia" pitchFamily="34" charset="-122"/>
+                <a:cs typeface="Georgia" pitchFamily="34" charset="-120"/>
+              </a:rPr>
+              <a:t>afspraken levert</a:t>
+            </a:r>
+            <a:pPr algn="l" indent="0" marL="0">
+              <a:lnSpc>
+                <a:spcPct val="108000"/>
+              </a:lnSpc>
+              <a:buNone/>
+            </a:pPr>
+            <a:r>
+              <a:rPr lang="en-US" sz="3200" b="1" dirty="0">
+                <a:solidFill>
+                  <a:srgbClr val="1C2230"/>
+                </a:solidFill>
+                <a:latin typeface="Arial" pitchFamily="34" charset="0"/>
+                <a:ea typeface="Arial" pitchFamily="34" charset="-122"/>
+                <a:cs typeface="Arial" pitchFamily="34" charset="-120"/>
+              </a:rPr>
+              <a:t>.</a:t>
+            </a:r>
+            <a:endParaRPr lang="en-US" sz="3200" dirty="0"/>
+          </a:p>
+        </p:txBody>
+      </p:sp>
+      <p:sp>
+        <p:nvSpPr>
+          <p:cNvPr id="8" name="Shape 5"/>
           <p:cNvSpPr/>
           <p:nvPr/>
         </p:nvSpPr>
         <p:spPr>
           <a:xfrm>
-            <a:off x="3390892" y="2793993"/>
+            <a:off x="609598" y="2793993"/>
             <a:ext cx="2628893" cy="3238492"/>
           </a:xfrm>
           <a:prstGeom prst="roundRect">
@@ -9574,13 +9616,13 @@
       </p:sp>
       <p:sp>
         <p:nvSpPr>
-          <p:cNvPr id="13" name="Shape 10"/>
+          <p:cNvPr id="9" name="Shape 6"/>
           <p:cNvSpPr/>
           <p:nvPr/>
         </p:nvSpPr>
         <p:spPr>
           <a:xfrm>
-            <a:off x="3644891" y="3073392"/>
+            <a:off x="863598" y="3073392"/>
             <a:ext cx="380999" cy="380999"/>
           </a:xfrm>
           <a:prstGeom prst="roundRect">
@@ -9596,7 +9638,7 @@
       </p:sp>
       <p:pic>
         <p:nvPicPr>
-          <p:cNvPr id="14" name="Image 1" descr="preencoded.png">    </p:cNvPr>
+          <p:cNvPr id="10" name="Image 1" descr="preencoded.png">    </p:cNvPr>
           <p:cNvPicPr>
             <a:picLocks noChangeAspect="1"/>
           </p:cNvPicPr>
@@ -9610,7 +9652,7 @@
         </p:blipFill>
         <p:spPr>
           <a:xfrm>
-            <a:off x="3740141" y="3168642"/>
+            <a:off x="958848" y="3168642"/>
             <a:ext cx="190500" cy="190500"/>
           </a:xfrm>
           <a:prstGeom prst="rect">
@@ -9620,13 +9662,13 @@
       </p:pic>
       <p:sp>
         <p:nvSpPr>
-          <p:cNvPr id="15" name="Text 11"/>
-          <p:cNvSpPr txBox="1"/>
-          <p:nvPr/>
-        </p:nvSpPr>
-        <p:spPr>
-          <a:xfrm>
-            <a:off x="3644891" y="3632191"/>
+          <p:cNvPr id="11" name="Text 7"/>
+          <p:cNvSpPr txBox="1"/>
+          <p:nvPr/>
+        </p:nvSpPr>
+        <p:spPr>
+          <a:xfrm>
+            <a:off x="863598" y="3632191"/>
             <a:ext cx="2120895" cy="533399"/>
           </a:xfrm>
           <a:prstGeom prst="rect">
@@ -9654,7 +9696,7 @@
                 <a:ea typeface="Arial" pitchFamily="34" charset="-122"/>
                 <a:cs typeface="Arial" pitchFamily="34" charset="-120"/>
               </a:rPr>
-              <a:t>Voorwerk per kantoor</a:t>
+              <a:t>Cold calling</a:t>
             </a:r>
             <a:endParaRPr lang="en-US" sz="1350" dirty="0"/>
           </a:p>
@@ -9662,13 +9704,13 @@
       </p:sp>
       <p:sp>
         <p:nvSpPr>
-          <p:cNvPr id="16" name="Text 12"/>
-          <p:cNvSpPr txBox="1"/>
-          <p:nvPr/>
-        </p:nvSpPr>
-        <p:spPr>
-          <a:xfrm>
-            <a:off x="3644891" y="4203689"/>
+          <p:cNvPr id="12" name="Text 8"/>
+          <p:cNvSpPr txBox="1"/>
+          <p:nvPr/>
+        </p:nvSpPr>
+        <p:spPr>
+          <a:xfrm>
+            <a:off x="863598" y="4203689"/>
             <a:ext cx="2120895" cy="1587496"/>
           </a:xfrm>
           <a:prstGeom prst="rect">
@@ -9696,7 +9738,7 @@
                 <a:ea typeface="Arial" pitchFamily="34" charset="-122"/>
                 <a:cs typeface="Arial" pitchFamily="34" charset="-120"/>
               </a:rPr>
-              <a:t>We kijken voor elk gesprek naar de site: filters, snelheid, aanbod en vindbaarheid. Zo openen we met iets concreets in plaats van een algemeen praatje.</a:t>
+              <a:t>Ervaren B2B-bellers die het gesprek voeren met de eigenaar of de marketingverantwoordelijke. Eigen belsysteem en een nummer op jullie naam.</a:t>
             </a:r>
             <a:endParaRPr lang="en-US" sz="950" dirty="0"/>
           </a:p>
@@ -9704,13 +9746,13 @@
       </p:sp>
       <p:sp>
         <p:nvSpPr>
-          <p:cNvPr id="17" name="Shape 13"/>
+          <p:cNvPr id="13" name="Shape 9"/>
           <p:cNvSpPr/>
           <p:nvPr/>
         </p:nvSpPr>
         <p:spPr>
           <a:xfrm>
-            <a:off x="6172185" y="2793993"/>
+            <a:off x="3390892" y="2793993"/>
             <a:ext cx="2628893" cy="3238492"/>
           </a:xfrm>
           <a:prstGeom prst="roundRect">
@@ -9726,13 +9768,13 @@
       </p:sp>
       <p:sp>
         <p:nvSpPr>
-          <p:cNvPr id="18" name="Shape 14"/>
+          <p:cNvPr id="14" name="Shape 10"/>
           <p:cNvSpPr/>
           <p:nvPr/>
         </p:nvSpPr>
         <p:spPr>
           <a:xfrm>
-            <a:off x="6426184" y="3073392"/>
+            <a:off x="3644891" y="3073392"/>
             <a:ext cx="380999" cy="380999"/>
           </a:xfrm>
           <a:prstGeom prst="roundRect">
@@ -9748,7 +9790,7 @@
       </p:sp>
       <p:pic>
         <p:nvPicPr>
-          <p:cNvPr id="19" name="Image 2" descr="preencoded.png">    </p:cNvPr>
+          <p:cNvPr id="15" name="Image 2" descr="preencoded.png">    </p:cNvPr>
           <p:cNvPicPr>
             <a:picLocks noChangeAspect="1"/>
           </p:cNvPicPr>
@@ -9762,7 +9804,7 @@
         </p:blipFill>
         <p:spPr>
           <a:xfrm>
-            <a:off x="6521434" y="3168642"/>
+            <a:off x="3740141" y="3168642"/>
             <a:ext cx="190500" cy="190500"/>
           </a:xfrm>
           <a:prstGeom prst="rect">
@@ -9772,13 +9814,13 @@
       </p:pic>
       <p:sp>
         <p:nvSpPr>
-          <p:cNvPr id="20" name="Text 15"/>
-          <p:cNvSpPr txBox="1"/>
-          <p:nvPr/>
-        </p:nvSpPr>
-        <p:spPr>
-          <a:xfrm>
-            <a:off x="6426184" y="3632191"/>
+          <p:cNvPr id="16" name="Text 11"/>
+          <p:cNvSpPr txBox="1"/>
+          <p:nvPr/>
+        </p:nvSpPr>
+        <p:spPr>
+          <a:xfrm>
+            <a:off x="3644891" y="3632191"/>
             <a:ext cx="2120895" cy="533399"/>
           </a:xfrm>
           <a:prstGeom prst="rect">
@@ -9806,7 +9848,7 @@
                 <a:ea typeface="Arial" pitchFamily="34" charset="-122"/>
                 <a:cs typeface="Arial" pitchFamily="34" charset="-120"/>
               </a:rPr>
-              <a:t>Opvolging</a:t>
+              <a:t>Voorwerk per kantoor</a:t>
             </a:r>
             <a:endParaRPr lang="en-US" sz="1350" dirty="0"/>
           </a:p>
@@ -9814,13 +9856,13 @@
       </p:sp>
       <p:sp>
         <p:nvSpPr>
-          <p:cNvPr id="21" name="Text 16"/>
-          <p:cNvSpPr txBox="1"/>
-          <p:nvPr/>
-        </p:nvSpPr>
-        <p:spPr>
-          <a:xfrm>
-            <a:off x="6426184" y="4203689"/>
+          <p:cNvPr id="17" name="Text 12"/>
+          <p:cNvSpPr txBox="1"/>
+          <p:nvPr/>
+        </p:nvSpPr>
+        <p:spPr>
+          <a:xfrm>
+            <a:off x="3644891" y="4203689"/>
             <a:ext cx="2120895" cy="1587496"/>
           </a:xfrm>
           <a:prstGeom prst="rect">
@@ -9848,7 +9890,7 @@
                 <a:ea typeface="Arial" pitchFamily="34" charset="-122"/>
                 <a:cs typeface="Arial" pitchFamily="34" charset="-120"/>
               </a:rPr>
-              <a:t>Terugbelafspraken komen echt terug in de lijst. Wie het deck wil zien krijgt het dezelfde dag, en wordt binnen drie werkdagen nagebeld.</a:t>
+              <a:t>We kijken voor elk gesprek naar de site: filters, snelheid, aanbod en vindbaarheid. Zo openen we met iets concreets in plaats van een algemeen praatje.</a:t>
             </a:r>
             <a:endParaRPr lang="en-US" sz="950" dirty="0"/>
           </a:p>
@@ -9856,13 +9898,13 @@
       </p:sp>
       <p:sp>
         <p:nvSpPr>
-          <p:cNvPr id="22" name="Shape 17"/>
+          <p:cNvPr id="18" name="Shape 13"/>
           <p:cNvSpPr/>
           <p:nvPr/>
         </p:nvSpPr>
         <p:spPr>
           <a:xfrm>
-            <a:off x="8953478" y="2793993"/>
+            <a:off x="6172185" y="2793993"/>
             <a:ext cx="2628893" cy="3238492"/>
           </a:xfrm>
           <a:prstGeom prst="roundRect">
@@ -9871,20 +9913,20 @@
             </a:avLst>
           </a:prstGeom>
           <a:solidFill>
-            <a:srgbClr val="000000"/>
+            <a:srgbClr val="F8F4EB"/>
           </a:solidFill>
           <a:ln/>
         </p:spPr>
       </p:sp>
       <p:sp>
         <p:nvSpPr>
-          <p:cNvPr id="23" name="Shape 18"/>
+          <p:cNvPr id="19" name="Shape 14"/>
           <p:cNvSpPr/>
           <p:nvPr/>
         </p:nvSpPr>
         <p:spPr>
           <a:xfrm>
-            <a:off x="9207477" y="3073392"/>
+            <a:off x="6426184" y="3073392"/>
             <a:ext cx="380999" cy="380999"/>
           </a:xfrm>
           <a:prstGeom prst="roundRect">
@@ -9893,14 +9935,14 @@
             </a:avLst>
           </a:prstGeom>
           <a:solidFill>
-            <a:srgbClr val="203C55"/>
+            <a:srgbClr val="DDEBF3"/>
           </a:solidFill>
           <a:ln/>
         </p:spPr>
       </p:sp>
       <p:pic>
         <p:nvPicPr>
-          <p:cNvPr id="24" name="Image 3" descr="preencoded.png">    </p:cNvPr>
+          <p:cNvPr id="20" name="Image 3" descr="preencoded.png">    </p:cNvPr>
           <p:cNvPicPr>
             <a:picLocks noChangeAspect="1"/>
           </p:cNvPicPr>
@@ -9914,7 +9956,7 @@
         </p:blipFill>
         <p:spPr>
           <a:xfrm>
-            <a:off x="9302727" y="3168642"/>
+            <a:off x="6521434" y="3168642"/>
             <a:ext cx="190500" cy="190500"/>
           </a:xfrm>
           <a:prstGeom prst="rect">
@@ -9924,13 +9966,13 @@
       </p:pic>
       <p:sp>
         <p:nvSpPr>
-          <p:cNvPr id="25" name="Text 19"/>
-          <p:cNvSpPr txBox="1"/>
-          <p:nvPr/>
-        </p:nvSpPr>
-        <p:spPr>
-          <a:xfrm>
-            <a:off x="9207477" y="3632191"/>
+          <p:cNvPr id="21" name="Text 15"/>
+          <p:cNvSpPr txBox="1"/>
+          <p:nvPr/>
+        </p:nvSpPr>
+        <p:spPr>
+          <a:xfrm>
+            <a:off x="6426184" y="3632191"/>
             <a:ext cx="2120895" cy="533399"/>
           </a:xfrm>
           <a:prstGeom prst="rect">
@@ -9952,6 +9994,158 @@
             <a:r>
               <a:rPr lang="en-US" sz="1350" b="1" dirty="0">
                 <a:solidFill>
+                  <a:srgbClr val="1C2230"/>
+                </a:solidFill>
+                <a:latin typeface="Arial" pitchFamily="34" charset="0"/>
+                <a:ea typeface="Arial" pitchFamily="34" charset="-122"/>
+                <a:cs typeface="Arial" pitchFamily="34" charset="-120"/>
+              </a:rPr>
+              <a:t>Opvolging</a:t>
+            </a:r>
+            <a:endParaRPr lang="en-US" sz="1350" dirty="0"/>
+          </a:p>
+        </p:txBody>
+      </p:sp>
+      <p:sp>
+        <p:nvSpPr>
+          <p:cNvPr id="22" name="Text 16"/>
+          <p:cNvSpPr txBox="1"/>
+          <p:nvPr/>
+        </p:nvSpPr>
+        <p:spPr>
+          <a:xfrm>
+            <a:off x="6426184" y="4203689"/>
+            <a:ext cx="2120895" cy="1587496"/>
+          </a:xfrm>
+          <a:prstGeom prst="rect">
+            <a:avLst/>
+          </a:prstGeom>
+          <a:noFill/>
+          <a:ln/>
+        </p:spPr>
+        <p:txBody>
+          <a:bodyPr wrap="square" lIns="0" tIns="0" rIns="0" bIns="0" rtlCol="0" anchor="t"/>
+          <a:lstStyle/>
+          <a:p>
+            <a:pPr indent="0" marL="0">
+              <a:lnSpc>
+                <a:spcPct val="135000"/>
+              </a:lnSpc>
+              <a:buNone/>
+            </a:pPr>
+            <a:r>
+              <a:rPr lang="en-US" sz="950" dirty="0">
+                <a:solidFill>
+                  <a:srgbClr val="6F6A5C"/>
+                </a:solidFill>
+                <a:latin typeface="Arial" pitchFamily="34" charset="0"/>
+                <a:ea typeface="Arial" pitchFamily="34" charset="-122"/>
+                <a:cs typeface="Arial" pitchFamily="34" charset="-120"/>
+              </a:rPr>
+              <a:t>Terugbelafspraken komen echt terug in de lijst. Wie het deck wil zien krijgt het dezelfde dag, en wordt binnen drie werkdagen nagebeld.</a:t>
+            </a:r>
+            <a:endParaRPr lang="en-US" sz="950" dirty="0"/>
+          </a:p>
+        </p:txBody>
+      </p:sp>
+      <p:sp>
+        <p:nvSpPr>
+          <p:cNvPr id="23" name="Shape 17"/>
+          <p:cNvSpPr/>
+          <p:nvPr/>
+        </p:nvSpPr>
+        <p:spPr>
+          <a:xfrm>
+            <a:off x="8953478" y="2793993"/>
+            <a:ext cx="2628893" cy="3238492"/>
+          </a:xfrm>
+          <a:prstGeom prst="roundRect">
+            <a:avLst>
+              <a:gd name="adj" fmla="val 3865"/>
+            </a:avLst>
+          </a:prstGeom>
+          <a:solidFill>
+            <a:srgbClr val="000000"/>
+          </a:solidFill>
+          <a:ln/>
+        </p:spPr>
+      </p:sp>
+      <p:sp>
+        <p:nvSpPr>
+          <p:cNvPr id="24" name="Shape 18"/>
+          <p:cNvSpPr/>
+          <p:nvPr/>
+        </p:nvSpPr>
+        <p:spPr>
+          <a:xfrm>
+            <a:off x="9207477" y="3073392"/>
+            <a:ext cx="380999" cy="380999"/>
+          </a:xfrm>
+          <a:prstGeom prst="roundRect">
+            <a:avLst>
+              <a:gd name="adj" fmla="val 23333"/>
+            </a:avLst>
+          </a:prstGeom>
+          <a:solidFill>
+            <a:srgbClr val="203C55"/>
+          </a:solidFill>
+          <a:ln/>
+        </p:spPr>
+      </p:sp>
+      <p:pic>
+        <p:nvPicPr>
+          <p:cNvPr id="25" name="Image 4" descr="preencoded.png">    </p:cNvPr>
+          <p:cNvPicPr>
+            <a:picLocks noChangeAspect="1"/>
+          </p:cNvPicPr>
+          <p:nvPr/>
+        </p:nvPicPr>
+        <p:blipFill>
+          <a:blip r:embed="rId5"/>
+          <a:stretch>
+            <a:fillRect/>
+          </a:stretch>
+        </p:blipFill>
+        <p:spPr>
+          <a:xfrm>
+            <a:off x="9302727" y="3168642"/>
+            <a:ext cx="190500" cy="190500"/>
+          </a:xfrm>
+          <a:prstGeom prst="rect">
+            <a:avLst/>
+          </a:prstGeom>
+        </p:spPr>
+      </p:pic>
+      <p:sp>
+        <p:nvSpPr>
+          <p:cNvPr id="26" name="Text 19"/>
+          <p:cNvSpPr txBox="1"/>
+          <p:nvPr/>
+        </p:nvSpPr>
+        <p:spPr>
+          <a:xfrm>
+            <a:off x="9207477" y="3632191"/>
+            <a:ext cx="2120895" cy="533399"/>
+          </a:xfrm>
+          <a:prstGeom prst="rect">
+            <a:avLst/>
+          </a:prstGeom>
+          <a:noFill/>
+          <a:ln/>
+        </p:spPr>
+        <p:txBody>
+          <a:bodyPr wrap="square" lIns="0" tIns="0" rIns="0" bIns="0" rtlCol="0" anchor="t"/>
+          <a:lstStyle/>
+          <a:p>
+            <a:pPr indent="0" marL="0">
+              <a:lnSpc>
+                <a:spcPct val="115000"/>
+              </a:lnSpc>
+              <a:buNone/>
+            </a:pPr>
+            <a:r>
+              <a:rPr lang="en-US" sz="1350" b="1" dirty="0">
+                <a:solidFill>
                   <a:srgbClr val="FFFFFF"/>
                 </a:solidFill>
                 <a:latin typeface="Arial" pitchFamily="34" charset="0"/>
@@ -9966,7 +10160,7 @@
       </p:sp>
       <p:sp>
         <p:nvSpPr>
-          <p:cNvPr id="26" name="Text 20"/>
+          <p:cNvPr id="27" name="Text 20"/>
           <p:cNvSpPr txBox="1"/>
           <p:nvPr/>
         </p:nvSpPr>
@@ -10091,9 +10285,33 @@
           </a:p>
         </p:txBody>
       </p:sp>
-      <p:sp>
-        <p:nvSpPr>
-          <p:cNvPr id="3" name="Text 1"/>
+      <p:pic>
+        <p:nvPicPr>
+          <p:cNvPr id="3" name="Image 0" descr="/home/user/Test/assets/okcreative-mark.png">    </p:cNvPr>
+          <p:cNvPicPr>
+            <a:picLocks noChangeAspect="1"/>
+          </p:cNvPicPr>
+          <p:nvPr/>
+        </p:nvPicPr>
+        <p:blipFill>
+          <a:blip r:embed="rId1"/>
+          <a:stretch>
+            <a:fillRect/>
+          </a:stretch>
+        </p:blipFill>
+        <p:spPr>
+          <a:xfrm>
+            <a:off x="11226772" y="393699"/>
+            <a:ext cx="355599" cy="355599"/>
+          </a:xfrm>
+          <a:prstGeom prst="rect">
+            <a:avLst/>
+          </a:prstGeom>
+        </p:spPr>
+      </p:pic>
+      <p:sp>
+        <p:nvSpPr>
+          <p:cNvPr id="4" name="Text 1"/>
           <p:cNvSpPr txBox="1"/>
           <p:nvPr/>
         </p:nvSpPr>
@@ -10132,7 +10350,7 @@
       </p:sp>
       <p:sp>
         <p:nvSpPr>
-          <p:cNvPr id="4" name="Text 2"/>
+          <p:cNvPr id="5" name="Text 2"/>
           <p:cNvSpPr txBox="1"/>
           <p:nvPr/>
         </p:nvSpPr>
@@ -10171,7 +10389,7 @@
       </p:sp>
       <p:sp>
         <p:nvSpPr>
-          <p:cNvPr id="5" name="Text 3"/>
+          <p:cNvPr id="6" name="Text 3"/>
           <p:cNvSpPr txBox="1"/>
           <p:nvPr/>
         </p:nvSpPr>
@@ -10210,7 +10428,7 @@
       </p:sp>
       <p:sp>
         <p:nvSpPr>
-          <p:cNvPr id="6" name="Text 4"/>
+          <p:cNvPr id="7" name="Text 4"/>
           <p:cNvSpPr txBox="1"/>
           <p:nvPr/>
         </p:nvSpPr>
@@ -10286,7 +10504,7 @@
       </p:sp>
       <p:sp>
         <p:nvSpPr>
-          <p:cNvPr id="7" name="Shape 5"/>
+          <p:cNvPr id="8" name="Shape 5"/>
           <p:cNvSpPr/>
           <p:nvPr/>
         </p:nvSpPr>
@@ -10308,7 +10526,7 @@
       </p:sp>
       <p:sp>
         <p:nvSpPr>
-          <p:cNvPr id="8" name="Text 6"/>
+          <p:cNvPr id="9" name="Text 6"/>
           <p:cNvSpPr txBox="1"/>
           <p:nvPr/>
         </p:nvSpPr>
@@ -10347,7 +10565,7 @@
       </p:sp>
       <p:sp>
         <p:nvSpPr>
-          <p:cNvPr id="9" name="Shape 7"/>
+          <p:cNvPr id="10" name="Shape 7"/>
           <p:cNvSpPr/>
           <p:nvPr/>
         </p:nvSpPr>
@@ -10372,7 +10590,7 @@
       </p:sp>
       <p:sp>
         <p:nvSpPr>
-          <p:cNvPr id="10" name="Text 8"/>
+          <p:cNvPr id="11" name="Text 8"/>
           <p:cNvSpPr txBox="1"/>
           <p:nvPr/>
         </p:nvSpPr>
@@ -10411,7 +10629,7 @@
       </p:sp>
       <p:sp>
         <p:nvSpPr>
-          <p:cNvPr id="11" name="Text 9"/>
+          <p:cNvPr id="12" name="Text 9"/>
           <p:cNvSpPr txBox="1"/>
           <p:nvPr/>
         </p:nvSpPr>
@@ -10445,7 +10663,7 @@
                 <a:ea typeface="Arial" pitchFamily="34" charset="-122"/>
                 <a:cs typeface="Arial" pitchFamily="34" charset="-120"/>
               </a:rPr>
-              <a:t>Anderhalf tot twee uur. We nemen het verhaal door, scherpen de doelgroep aan en leggen vast wanneer een afspraak meetelt.</a:t>
+              <a:t>Eén uur. We nemen het verhaal door, scherpen de doelgroep aan en leggen vast wanneer een afspraak meetelt.</a:t>
             </a:r>
             <a:endParaRPr lang="en-US" sz="900" dirty="0"/>
           </a:p>
@@ -10453,7 +10671,7 @@
       </p:sp>
       <p:sp>
         <p:nvSpPr>
-          <p:cNvPr id="12" name="Shape 10"/>
+          <p:cNvPr id="13" name="Shape 10"/>
           <p:cNvSpPr/>
           <p:nvPr/>
         </p:nvSpPr>
@@ -10475,7 +10693,7 @@
       </p:sp>
       <p:sp>
         <p:nvSpPr>
-          <p:cNvPr id="13" name="Text 11"/>
+          <p:cNvPr id="14" name="Text 11"/>
           <p:cNvSpPr txBox="1"/>
           <p:nvPr/>
         </p:nvSpPr>
@@ -10514,7 +10732,7 @@
       </p:sp>
       <p:sp>
         <p:nvSpPr>
-          <p:cNvPr id="14" name="Shape 12"/>
+          <p:cNvPr id="15" name="Shape 12"/>
           <p:cNvSpPr/>
           <p:nvPr/>
         </p:nvSpPr>
@@ -10539,7 +10757,7 @@
       </p:sp>
       <p:sp>
         <p:nvSpPr>
-          <p:cNvPr id="15" name="Text 13"/>
+          <p:cNvPr id="16" name="Text 13"/>
           <p:cNvSpPr txBox="1"/>
           <p:nvPr/>
         </p:nvSpPr>
@@ -10578,7 +10796,7 @@
       </p:sp>
       <p:sp>
         <p:nvSpPr>
-          <p:cNvPr id="16" name="Text 14"/>
+          <p:cNvPr id="17" name="Text 14"/>
           <p:cNvSpPr txBox="1"/>
           <p:nvPr/>
         </p:nvSpPr>
@@ -10620,7 +10838,7 @@
       </p:sp>
       <p:sp>
         <p:nvSpPr>
-          <p:cNvPr id="17" name="Shape 15"/>
+          <p:cNvPr id="18" name="Shape 15"/>
           <p:cNvSpPr/>
           <p:nvPr/>
         </p:nvSpPr>
@@ -10642,7 +10860,7 @@
       </p:sp>
       <p:sp>
         <p:nvSpPr>
-          <p:cNvPr id="18" name="Text 16"/>
+          <p:cNvPr id="19" name="Text 16"/>
           <p:cNvSpPr txBox="1"/>
           <p:nvPr/>
         </p:nvSpPr>
@@ -10681,7 +10899,7 @@
       </p:sp>
       <p:sp>
         <p:nvSpPr>
-          <p:cNvPr id="19" name="Shape 17"/>
+          <p:cNvPr id="20" name="Shape 17"/>
           <p:cNvSpPr/>
           <p:nvPr/>
         </p:nvSpPr>
@@ -10706,7 +10924,7 @@
       </p:sp>
       <p:sp>
         <p:nvSpPr>
-          <p:cNvPr id="20" name="Text 18"/>
+          <p:cNvPr id="21" name="Text 18"/>
           <p:cNvSpPr txBox="1"/>
           <p:nvPr/>
         </p:nvSpPr>
@@ -10745,7 +10963,7 @@
       </p:sp>
       <p:sp>
         <p:nvSpPr>
-          <p:cNvPr id="21" name="Text 19"/>
+          <p:cNvPr id="22" name="Text 19"/>
           <p:cNvSpPr txBox="1"/>
           <p:nvPr/>
         </p:nvSpPr>
@@ -10787,7 +11005,7 @@
       </p:sp>
       <p:sp>
         <p:nvSpPr>
-          <p:cNvPr id="22" name="Shape 20"/>
+          <p:cNvPr id="23" name="Shape 20"/>
           <p:cNvSpPr/>
           <p:nvPr/>
         </p:nvSpPr>
@@ -10809,7 +11027,7 @@
       </p:sp>
       <p:sp>
         <p:nvSpPr>
-          <p:cNvPr id="23" name="Text 21"/>
+          <p:cNvPr id="24" name="Text 21"/>
           <p:cNvSpPr txBox="1"/>
           <p:nvPr/>
         </p:nvSpPr>
@@ -10848,7 +11066,7 @@
       </p:sp>
       <p:sp>
         <p:nvSpPr>
-          <p:cNvPr id="24" name="Text 22"/>
+          <p:cNvPr id="25" name="Text 22"/>
           <p:cNvSpPr txBox="1"/>
           <p:nvPr/>
         </p:nvSpPr>
@@ -10887,7 +11105,7 @@
       </p:sp>
       <p:sp>
         <p:nvSpPr>
-          <p:cNvPr id="25" name="Text 23"/>
+          <p:cNvPr id="26" name="Text 23"/>
           <p:cNvSpPr txBox="1"/>
           <p:nvPr/>
         </p:nvSpPr>
@@ -10929,7 +11147,7 @@
       </p:sp>
       <p:sp>
         <p:nvSpPr>
-          <p:cNvPr id="26" name="Shape 24"/>
+          <p:cNvPr id="27" name="Shape 24"/>
           <p:cNvSpPr/>
           <p:nvPr/>
         </p:nvSpPr>
@@ -10956,7 +11174,7 @@
       </p:sp>
       <p:sp>
         <p:nvSpPr>
-          <p:cNvPr id="27" name="Text 25"/>
+          <p:cNvPr id="28" name="Text 25"/>
           <p:cNvSpPr txBox="1"/>
           <p:nvPr/>
         </p:nvSpPr>
@@ -10995,70 +11213,7 @@
       </p:sp>
       <p:pic>
         <p:nvPicPr>
-          <p:cNvPr id="28" name="Image 0" descr="preencoded.png">    </p:cNvPr>
-          <p:cNvPicPr>
-            <a:picLocks noChangeAspect="1"/>
-          </p:cNvPicPr>
-          <p:nvPr/>
-        </p:nvPicPr>
-        <p:blipFill>
-          <a:blip r:embed="rId1"/>
-          <a:stretch>
-            <a:fillRect/>
-          </a:stretch>
-        </p:blipFill>
-        <p:spPr>
-          <a:xfrm>
-            <a:off x="914398" y="5314937"/>
-            <a:ext cx="139700" cy="139700"/>
-          </a:xfrm>
-          <a:prstGeom prst="rect">
-            <a:avLst/>
-          </a:prstGeom>
-        </p:spPr>
-      </p:pic>
-      <p:sp>
-        <p:nvSpPr>
-          <p:cNvPr id="29" name="Text 26"/>
-          <p:cNvSpPr txBox="1"/>
-          <p:nvPr/>
-        </p:nvSpPr>
-        <p:spPr>
-          <a:xfrm>
-            <a:off x="1142997" y="5295887"/>
-            <a:ext cx="5016487" cy="253999"/>
-          </a:xfrm>
-          <a:prstGeom prst="rect">
-            <a:avLst/>
-          </a:prstGeom>
-          <a:noFill/>
-          <a:ln/>
-        </p:spPr>
-        <p:txBody>
-          <a:bodyPr wrap="square" lIns="0" tIns="0" rIns="0" bIns="0" rtlCol="0" anchor="ctr"/>
-          <a:lstStyle/>
-          <a:p>
-            <a:pPr indent="0" marL="0">
-              <a:buNone/>
-            </a:pPr>
-            <a:r>
-              <a:rPr lang="en-US" sz="950" dirty="0">
-                <a:solidFill>
-                  <a:srgbClr val="C2C8D2"/>
-                </a:solidFill>
-                <a:latin typeface="Arial" pitchFamily="34" charset="0"/>
-                <a:ea typeface="Arial" pitchFamily="34" charset="-122"/>
-                <a:cs typeface="Arial" pitchFamily="34" charset="-120"/>
-              </a:rPr>
-              <a:t>Afspraak in de agenda met kantoorinfo, contactpersoon en aanleiding</a:t>
-            </a:r>
-            <a:endParaRPr lang="en-US" sz="950" dirty="0"/>
-          </a:p>
-        </p:txBody>
-      </p:sp>
-      <p:pic>
-        <p:nvPicPr>
-          <p:cNvPr id="30" name="Image 1" descr="preencoded.png">    </p:cNvPr>
+          <p:cNvPr id="29" name="Image 1" descr="preencoded.png">    </p:cNvPr>
           <p:cNvPicPr>
             <a:picLocks noChangeAspect="1"/>
           </p:cNvPicPr>
@@ -11072,7 +11227,7 @@
         </p:blipFill>
         <p:spPr>
           <a:xfrm>
-            <a:off x="6400784" y="5314937"/>
+            <a:off x="914398" y="5314937"/>
             <a:ext cx="139700" cy="139700"/>
           </a:xfrm>
           <a:prstGeom prst="rect">
@@ -11082,13 +11237,13 @@
       </p:pic>
       <p:sp>
         <p:nvSpPr>
-          <p:cNvPr id="31" name="Text 27"/>
-          <p:cNvSpPr txBox="1"/>
-          <p:nvPr/>
-        </p:nvSpPr>
-        <p:spPr>
-          <a:xfrm>
-            <a:off x="6629383" y="5295887"/>
+          <p:cNvPr id="30" name="Text 26"/>
+          <p:cNvSpPr txBox="1"/>
+          <p:nvPr/>
+        </p:nvSpPr>
+        <p:spPr>
+          <a:xfrm>
+            <a:off x="1142997" y="5295887"/>
             <a:ext cx="5016487" cy="253999"/>
           </a:xfrm>
           <a:prstGeom prst="rect">
@@ -11113,7 +11268,7 @@
                 <a:ea typeface="Arial" pitchFamily="34" charset="-122"/>
                 <a:cs typeface="Arial" pitchFamily="34" charset="-120"/>
               </a:rPr>
-              <a:t>Bevestiging naar de prospect uit jullie naam, dezelfde dag</a:t>
+              <a:t>Afspraak in de agenda met kantoorinfo, contactpersoon en aanleiding</a:t>
             </a:r>
             <a:endParaRPr lang="en-US" sz="950" dirty="0"/>
           </a:p>
@@ -11121,7 +11276,7 @@
       </p:sp>
       <p:pic>
         <p:nvPicPr>
-          <p:cNvPr id="32" name="Image 2" descr="preencoded.png">    </p:cNvPr>
+          <p:cNvPr id="31" name="Image 2" descr="preencoded.png">    </p:cNvPr>
           <p:cNvPicPr>
             <a:picLocks noChangeAspect="1"/>
           </p:cNvPicPr>
@@ -11135,7 +11290,7 @@
         </p:blipFill>
         <p:spPr>
           <a:xfrm>
-            <a:off x="914398" y="5619736"/>
+            <a:off x="6400784" y="5314937"/>
             <a:ext cx="139700" cy="139700"/>
           </a:xfrm>
           <a:prstGeom prst="rect">
@@ -11145,13 +11300,13 @@
       </p:pic>
       <p:sp>
         <p:nvSpPr>
-          <p:cNvPr id="33" name="Text 28"/>
-          <p:cNvSpPr txBox="1"/>
-          <p:nvPr/>
-        </p:nvSpPr>
-        <p:spPr>
-          <a:xfrm>
-            <a:off x="1142997" y="5600686"/>
+          <p:cNvPr id="32" name="Text 27"/>
+          <p:cNvSpPr txBox="1"/>
+          <p:nvPr/>
+        </p:nvSpPr>
+        <p:spPr>
+          <a:xfrm>
+            <a:off x="6629383" y="5295887"/>
             <a:ext cx="5016487" cy="253999"/>
           </a:xfrm>
           <a:prstGeom prst="rect">
@@ -11176,7 +11331,7 @@
                 <a:ea typeface="Arial" pitchFamily="34" charset="-122"/>
                 <a:cs typeface="Arial" pitchFamily="34" charset="-120"/>
               </a:rPr>
-              <a:t>Wekelijks rapport in PDF plus alle gespreksnotities</a:t>
+              <a:t>Bevestiging naar de prospect uit jullie naam, dezelfde dag</a:t>
             </a:r>
             <a:endParaRPr lang="en-US" sz="950" dirty="0"/>
           </a:p>
@@ -11184,7 +11339,7 @@
       </p:sp>
       <p:pic>
         <p:nvPicPr>
-          <p:cNvPr id="34" name="Image 3" descr="preencoded.png">    </p:cNvPr>
+          <p:cNvPr id="33" name="Image 3" descr="preencoded.png">    </p:cNvPr>
           <p:cNvPicPr>
             <a:picLocks noChangeAspect="1"/>
           </p:cNvPicPr>
@@ -11198,6 +11353,69 @@
         </p:blipFill>
         <p:spPr>
           <a:xfrm>
+            <a:off x="914398" y="5619736"/>
+            <a:ext cx="139700" cy="139700"/>
+          </a:xfrm>
+          <a:prstGeom prst="rect">
+            <a:avLst/>
+          </a:prstGeom>
+        </p:spPr>
+      </p:pic>
+      <p:sp>
+        <p:nvSpPr>
+          <p:cNvPr id="34" name="Text 28"/>
+          <p:cNvSpPr txBox="1"/>
+          <p:nvPr/>
+        </p:nvSpPr>
+        <p:spPr>
+          <a:xfrm>
+            <a:off x="1142997" y="5600686"/>
+            <a:ext cx="5016487" cy="253999"/>
+          </a:xfrm>
+          <a:prstGeom prst="rect">
+            <a:avLst/>
+          </a:prstGeom>
+          <a:noFill/>
+          <a:ln/>
+        </p:spPr>
+        <p:txBody>
+          <a:bodyPr wrap="square" lIns="0" tIns="0" rIns="0" bIns="0" rtlCol="0" anchor="ctr"/>
+          <a:lstStyle/>
+          <a:p>
+            <a:pPr indent="0" marL="0">
+              <a:buNone/>
+            </a:pPr>
+            <a:r>
+              <a:rPr lang="en-US" sz="950" dirty="0">
+                <a:solidFill>
+                  <a:srgbClr val="C2C8D2"/>
+                </a:solidFill>
+                <a:latin typeface="Arial" pitchFamily="34" charset="0"/>
+                <a:ea typeface="Arial" pitchFamily="34" charset="-122"/>
+                <a:cs typeface="Arial" pitchFamily="34" charset="-120"/>
+              </a:rPr>
+              <a:t>Wekelijks rapport in PDF plus alle gespreksnotities</a:t>
+            </a:r>
+            <a:endParaRPr lang="en-US" sz="950" dirty="0"/>
+          </a:p>
+        </p:txBody>
+      </p:sp>
+      <p:pic>
+        <p:nvPicPr>
+          <p:cNvPr id="35" name="Image 4" descr="preencoded.png">    </p:cNvPr>
+          <p:cNvPicPr>
+            <a:picLocks noChangeAspect="1"/>
+          </p:cNvPicPr>
+          <p:nvPr/>
+        </p:nvPicPr>
+        <p:blipFill>
+          <a:blip r:embed="rId5"/>
+          <a:stretch>
+            <a:fillRect/>
+          </a:stretch>
+        </p:blipFill>
+        <p:spPr>
+          <a:xfrm>
             <a:off x="6400784" y="5619736"/>
             <a:ext cx="139700" cy="139700"/>
           </a:xfrm>
@@ -11208,7 +11426,7 @@
       </p:pic>
       <p:sp>
         <p:nvSpPr>
-          <p:cNvPr id="35" name="Text 29"/>
+          <p:cNvPr id="36" name="Text 29"/>
           <p:cNvSpPr txBox="1"/>
           <p:nvPr/>
         </p:nvSpPr>
@@ -11330,246 +11548,9 @@
           </a:p>
         </p:txBody>
       </p:sp>
-      <p:sp>
-        <p:nvSpPr>
-          <p:cNvPr id="3" name="Text 1"/>
-          <p:cNvSpPr txBox="1"/>
-          <p:nvPr/>
-        </p:nvSpPr>
-        <p:spPr>
-          <a:xfrm>
-            <a:off x="609598" y="6381734"/>
-            <a:ext cx="5714986" cy="228599"/>
-          </a:xfrm>
-          <a:prstGeom prst="rect">
-            <a:avLst/>
-          </a:prstGeom>
-          <a:noFill/>
-          <a:ln/>
-        </p:spPr>
-        <p:txBody>
-          <a:bodyPr wrap="square" lIns="0" tIns="0" rIns="0" bIns="0" rtlCol="0" anchor="ctr"/>
-          <a:lstStyle/>
-          <a:p>
-            <a:pPr algn="l" indent="0" marL="0">
-              <a:buNone/>
-            </a:pPr>
-            <a:r>
-              <a:rPr lang="en-US" sz="750" b="1" spc="100" kern="0" dirty="0">
-                <a:solidFill>
-                  <a:srgbClr val="6F6A5C"/>
-                </a:solidFill>
-                <a:latin typeface="Arial" pitchFamily="34" charset="0"/>
-                <a:ea typeface="Arial" pitchFamily="34" charset="-122"/>
-                <a:cs typeface="Arial" pitchFamily="34" charset="-120"/>
-              </a:rPr>
-              <a:t>LINK. · Pilot makelaars · OK Creative Agency</a:t>
-            </a:r>
-            <a:endParaRPr lang="en-US" sz="750" dirty="0"/>
-          </a:p>
-        </p:txBody>
-      </p:sp>
-      <p:sp>
-        <p:nvSpPr>
-          <p:cNvPr id="4" name="Text 2"/>
-          <p:cNvSpPr txBox="1"/>
-          <p:nvPr/>
-        </p:nvSpPr>
-        <p:spPr>
-          <a:xfrm>
-            <a:off x="9677376" y="6381734"/>
-            <a:ext cx="1904995" cy="228599"/>
-          </a:xfrm>
-          <a:prstGeom prst="rect">
-            <a:avLst/>
-          </a:prstGeom>
-          <a:noFill/>
-          <a:ln/>
-        </p:spPr>
-        <p:txBody>
-          <a:bodyPr wrap="square" lIns="0" tIns="0" rIns="0" bIns="0" rtlCol="0" anchor="ctr"/>
-          <a:lstStyle/>
-          <a:p>
-            <a:pPr algn="r" indent="0" marL="0">
-              <a:buNone/>
-            </a:pPr>
-            <a:r>
-              <a:rPr lang="en-US" sz="750" b="1" spc="100" kern="0" dirty="0">
-                <a:solidFill>
-                  <a:srgbClr val="6F6A5C"/>
-                </a:solidFill>
-                <a:latin typeface="Arial" pitchFamily="34" charset="0"/>
-                <a:ea typeface="Arial" pitchFamily="34" charset="-122"/>
-                <a:cs typeface="Arial" pitchFamily="34" charset="-120"/>
-              </a:rPr>
-              <a:t>8 / 12</a:t>
-            </a:r>
-            <a:endParaRPr lang="en-US" sz="750" dirty="0"/>
-          </a:p>
-        </p:txBody>
-      </p:sp>
-      <p:sp>
-        <p:nvSpPr>
-          <p:cNvPr id="5" name="Text 3"/>
-          <p:cNvSpPr txBox="1"/>
-          <p:nvPr/>
-        </p:nvSpPr>
-        <p:spPr>
-          <a:xfrm>
-            <a:off x="609598" y="1206497"/>
-            <a:ext cx="10159975" cy="215899"/>
-          </a:xfrm>
-          <a:prstGeom prst="rect">
-            <a:avLst/>
-          </a:prstGeom>
-          <a:noFill/>
-          <a:ln/>
-        </p:spPr>
-        <p:txBody>
-          <a:bodyPr wrap="square" lIns="0" tIns="0" rIns="0" bIns="0" rtlCol="0" anchor="ctr"/>
-          <a:lstStyle/>
-          <a:p>
-            <a:pPr algn="l" indent="0" marL="0">
-              <a:buNone/>
-            </a:pPr>
-            <a:r>
-              <a:rPr lang="en-US" sz="950" b="1" spc="400" kern="0" dirty="0">
-                <a:solidFill>
-                  <a:srgbClr val="38B6FF"/>
-                </a:solidFill>
-                <a:latin typeface="Arial" pitchFamily="34" charset="0"/>
-                <a:ea typeface="Arial" pitchFamily="34" charset="-122"/>
-                <a:cs typeface="Arial" pitchFamily="34" charset="-120"/>
-              </a:rPr>
-              <a:t>WAT WIJ EEN GEKWALIFICEERDE AFSPRAAK NOEMEN</a:t>
-            </a:r>
-            <a:endParaRPr lang="en-US" sz="950" dirty="0"/>
-          </a:p>
-        </p:txBody>
-      </p:sp>
-      <p:sp>
-        <p:nvSpPr>
-          <p:cNvPr id="6" name="Text 4"/>
-          <p:cNvSpPr txBox="1"/>
-          <p:nvPr/>
-        </p:nvSpPr>
-        <p:spPr>
-          <a:xfrm>
-            <a:off x="609598" y="1511296"/>
-            <a:ext cx="10972773" cy="1142997"/>
-          </a:xfrm>
-          <a:prstGeom prst="rect">
-            <a:avLst/>
-          </a:prstGeom>
-          <a:noFill/>
-          <a:ln/>
-        </p:spPr>
-        <p:txBody>
-          <a:bodyPr wrap="square" lIns="0" tIns="0" rIns="0" bIns="0" rtlCol="0" anchor="t"/>
-          <a:lstStyle/>
-          <a:p>
-            <a:pPr algn="l" indent="0" marL="0">
-              <a:lnSpc>
-                <a:spcPct val="108000"/>
-              </a:lnSpc>
-              <a:buNone/>
-            </a:pPr>
-            <a:r>
-              <a:rPr lang="en-US" sz="3200" b="1" dirty="0">
-                <a:solidFill>
-                  <a:srgbClr val="1C2230"/>
-                </a:solidFill>
-                <a:latin typeface="Arial" pitchFamily="34" charset="0"/>
-                <a:ea typeface="Arial" pitchFamily="34" charset="-122"/>
-                <a:cs typeface="Arial" pitchFamily="34" charset="-120"/>
-              </a:rPr>
-              <a:t>Geen afspraak om de afspraak. </a:t>
-            </a:r>
-            <a:pPr algn="l" indent="0" marL="0">
-              <a:lnSpc>
-                <a:spcPct val="108000"/>
-              </a:lnSpc>
-              <a:buNone/>
-            </a:pPr>
-            <a:r>
-              <a:rPr lang="en-US" sz="3000" i="1" dirty="0">
-                <a:solidFill>
-                  <a:srgbClr val="1C2230"/>
-                </a:solidFill>
-                <a:latin typeface="Georgia" pitchFamily="34" charset="0"/>
-                <a:ea typeface="Georgia" pitchFamily="34" charset="-122"/>
-                <a:cs typeface="Georgia" pitchFamily="34" charset="-120"/>
-              </a:rPr>
-              <a:t>Drie eisen</a:t>
-            </a:r>
-            <a:pPr algn="l" indent="0" marL="0">
-              <a:lnSpc>
-                <a:spcPct val="108000"/>
-              </a:lnSpc>
-              <a:buNone/>
-            </a:pPr>
-            <a:r>
-              <a:rPr lang="en-US" sz="3200" b="1" dirty="0">
-                <a:solidFill>
-                  <a:srgbClr val="1C2230"/>
-                </a:solidFill>
-                <a:latin typeface="Arial" pitchFamily="34" charset="0"/>
-                <a:ea typeface="Arial" pitchFamily="34" charset="-122"/>
-                <a:cs typeface="Arial" pitchFamily="34" charset="-120"/>
-              </a:rPr>
-              <a:t>.</a:t>
-            </a:r>
-            <a:endParaRPr lang="en-US" sz="3200" dirty="0"/>
-          </a:p>
-        </p:txBody>
-      </p:sp>
-      <p:sp>
-        <p:nvSpPr>
-          <p:cNvPr id="7" name="Shape 5"/>
-          <p:cNvSpPr/>
-          <p:nvPr/>
-        </p:nvSpPr>
-        <p:spPr>
-          <a:xfrm>
-            <a:off x="609598" y="2793993"/>
-            <a:ext cx="3536941" cy="2476494"/>
-          </a:xfrm>
-          <a:prstGeom prst="roundRect">
-            <a:avLst>
-              <a:gd name="adj" fmla="val 4103"/>
-            </a:avLst>
-          </a:prstGeom>
-          <a:solidFill>
-            <a:srgbClr val="F8F4EB"/>
-          </a:solidFill>
-          <a:ln/>
-        </p:spPr>
-      </p:sp>
-      <p:sp>
-        <p:nvSpPr>
-          <p:cNvPr id="8" name="Shape 6"/>
-          <p:cNvSpPr/>
-          <p:nvPr/>
-        </p:nvSpPr>
-        <p:spPr>
-          <a:xfrm>
-            <a:off x="914398" y="3124192"/>
-            <a:ext cx="380999" cy="380999"/>
-          </a:xfrm>
-          <a:prstGeom prst="roundRect">
-            <a:avLst>
-              <a:gd name="adj" fmla="val 23333"/>
-            </a:avLst>
-          </a:prstGeom>
-          <a:solidFill>
-            <a:srgbClr val="DDEBF3"/>
-          </a:solidFill>
-          <a:ln/>
-        </p:spPr>
-      </p:sp>
       <p:pic>
         <p:nvPicPr>
-          <p:cNvPr id="9" name="Image 0" descr="preencoded.png">    </p:cNvPr>
+          <p:cNvPr id="3" name="Image 0" descr="/home/user/Test/assets/okcreative-mark.png">    </p:cNvPr>
           <p:cNvPicPr>
             <a:picLocks noChangeAspect="1"/>
           </p:cNvPicPr>
@@ -11583,8 +11564,8 @@
         </p:blipFill>
         <p:spPr>
           <a:xfrm>
-            <a:off x="1009647" y="3219442"/>
-            <a:ext cx="190500" cy="190500"/>
+            <a:off x="11226772" y="393699"/>
+            <a:ext cx="355599" cy="355599"/>
           </a:xfrm>
           <a:prstGeom prst="rect">
             <a:avLst/>
@@ -11593,14 +11574,14 @@
       </p:pic>
       <p:sp>
         <p:nvSpPr>
-          <p:cNvPr id="10" name="Text 7"/>
-          <p:cNvSpPr txBox="1"/>
-          <p:nvPr/>
-        </p:nvSpPr>
-        <p:spPr>
-          <a:xfrm>
-            <a:off x="914398" y="3708391"/>
-            <a:ext cx="2927343" cy="304799"/>
+          <p:cNvPr id="4" name="Text 1"/>
+          <p:cNvSpPr txBox="1"/>
+          <p:nvPr/>
+        </p:nvSpPr>
+        <p:spPr>
+          <a:xfrm>
+            <a:off x="609598" y="6381734"/>
+            <a:ext cx="5714986" cy="228599"/>
           </a:xfrm>
           <a:prstGeom prst="rect">
             <a:avLst/>
@@ -11612,11 +11593,131 @@
           <a:bodyPr wrap="square" lIns="0" tIns="0" rIns="0" bIns="0" rtlCol="0" anchor="ctr"/>
           <a:lstStyle/>
           <a:p>
-            <a:pPr indent="0" marL="0">
-              <a:buNone/>
-            </a:pPr>
-            <a:r>
-              <a:rPr lang="en-US" sz="1600" b="1" dirty="0">
+            <a:pPr algn="l" indent="0" marL="0">
+              <a:buNone/>
+            </a:pPr>
+            <a:r>
+              <a:rPr lang="en-US" sz="750" b="1" spc="100" kern="0" dirty="0">
+                <a:solidFill>
+                  <a:srgbClr val="6F6A5C"/>
+                </a:solidFill>
+                <a:latin typeface="Arial" pitchFamily="34" charset="0"/>
+                <a:ea typeface="Arial" pitchFamily="34" charset="-122"/>
+                <a:cs typeface="Arial" pitchFamily="34" charset="-120"/>
+              </a:rPr>
+              <a:t>LINK. · Pilot makelaars · OK Creative Agency</a:t>
+            </a:r>
+            <a:endParaRPr lang="en-US" sz="750" dirty="0"/>
+          </a:p>
+        </p:txBody>
+      </p:sp>
+      <p:sp>
+        <p:nvSpPr>
+          <p:cNvPr id="5" name="Text 2"/>
+          <p:cNvSpPr txBox="1"/>
+          <p:nvPr/>
+        </p:nvSpPr>
+        <p:spPr>
+          <a:xfrm>
+            <a:off x="9677376" y="6381734"/>
+            <a:ext cx="1904995" cy="228599"/>
+          </a:xfrm>
+          <a:prstGeom prst="rect">
+            <a:avLst/>
+          </a:prstGeom>
+          <a:noFill/>
+          <a:ln/>
+        </p:spPr>
+        <p:txBody>
+          <a:bodyPr wrap="square" lIns="0" tIns="0" rIns="0" bIns="0" rtlCol="0" anchor="ctr"/>
+          <a:lstStyle/>
+          <a:p>
+            <a:pPr algn="r" indent="0" marL="0">
+              <a:buNone/>
+            </a:pPr>
+            <a:r>
+              <a:rPr lang="en-US" sz="750" b="1" spc="100" kern="0" dirty="0">
+                <a:solidFill>
+                  <a:srgbClr val="6F6A5C"/>
+                </a:solidFill>
+                <a:latin typeface="Arial" pitchFamily="34" charset="0"/>
+                <a:ea typeface="Arial" pitchFamily="34" charset="-122"/>
+                <a:cs typeface="Arial" pitchFamily="34" charset="-120"/>
+              </a:rPr>
+              <a:t>8 / 12</a:t>
+            </a:r>
+            <a:endParaRPr lang="en-US" sz="750" dirty="0"/>
+          </a:p>
+        </p:txBody>
+      </p:sp>
+      <p:sp>
+        <p:nvSpPr>
+          <p:cNvPr id="6" name="Text 3"/>
+          <p:cNvSpPr txBox="1"/>
+          <p:nvPr/>
+        </p:nvSpPr>
+        <p:spPr>
+          <a:xfrm>
+            <a:off x="609598" y="1206497"/>
+            <a:ext cx="10159975" cy="215899"/>
+          </a:xfrm>
+          <a:prstGeom prst="rect">
+            <a:avLst/>
+          </a:prstGeom>
+          <a:noFill/>
+          <a:ln/>
+        </p:spPr>
+        <p:txBody>
+          <a:bodyPr wrap="square" lIns="0" tIns="0" rIns="0" bIns="0" rtlCol="0" anchor="ctr"/>
+          <a:lstStyle/>
+          <a:p>
+            <a:pPr algn="l" indent="0" marL="0">
+              <a:buNone/>
+            </a:pPr>
+            <a:r>
+              <a:rPr lang="en-US" sz="950" b="1" spc="400" kern="0" dirty="0">
+                <a:solidFill>
+                  <a:srgbClr val="38B6FF"/>
+                </a:solidFill>
+                <a:latin typeface="Arial" pitchFamily="34" charset="0"/>
+                <a:ea typeface="Arial" pitchFamily="34" charset="-122"/>
+                <a:cs typeface="Arial" pitchFamily="34" charset="-120"/>
+              </a:rPr>
+              <a:t>WAT WIJ EEN GEKWALIFICEERDE AFSPRAAK NOEMEN</a:t>
+            </a:r>
+            <a:endParaRPr lang="en-US" sz="950" dirty="0"/>
+          </a:p>
+        </p:txBody>
+      </p:sp>
+      <p:sp>
+        <p:nvSpPr>
+          <p:cNvPr id="7" name="Text 4"/>
+          <p:cNvSpPr txBox="1"/>
+          <p:nvPr/>
+        </p:nvSpPr>
+        <p:spPr>
+          <a:xfrm>
+            <a:off x="609598" y="1511296"/>
+            <a:ext cx="10972773" cy="1142997"/>
+          </a:xfrm>
+          <a:prstGeom prst="rect">
+            <a:avLst/>
+          </a:prstGeom>
+          <a:noFill/>
+          <a:ln/>
+        </p:spPr>
+        <p:txBody>
+          <a:bodyPr wrap="square" lIns="0" tIns="0" rIns="0" bIns="0" rtlCol="0" anchor="t"/>
+          <a:lstStyle/>
+          <a:p>
+            <a:pPr algn="l" indent="0" marL="0">
+              <a:lnSpc>
+                <a:spcPct val="108000"/>
+              </a:lnSpc>
+              <a:buNone/>
+            </a:pPr>
+            <a:r>
+              <a:rPr lang="en-US" sz="3200" b="1" dirty="0">
                 <a:solidFill>
                   <a:srgbClr val="1C2230"/>
                 </a:solidFill>
@@ -11624,63 +11725,55 @@
                 <a:ea typeface="Arial" pitchFamily="34" charset="-122"/>
                 <a:cs typeface="Arial" pitchFamily="34" charset="-120"/>
               </a:rPr>
-              <a:t>Fit</a:t>
-            </a:r>
-            <a:endParaRPr lang="en-US" sz="1600" dirty="0"/>
-          </a:p>
-        </p:txBody>
-      </p:sp>
-      <p:sp>
-        <p:nvSpPr>
-          <p:cNvPr id="11" name="Text 8"/>
-          <p:cNvSpPr txBox="1"/>
-          <p:nvPr/>
-        </p:nvSpPr>
-        <p:spPr>
-          <a:xfrm>
-            <a:off x="914398" y="4089390"/>
-            <a:ext cx="2927343" cy="952498"/>
-          </a:xfrm>
-          <a:prstGeom prst="rect">
-            <a:avLst/>
-          </a:prstGeom>
-          <a:noFill/>
-          <a:ln/>
-        </p:spPr>
-        <p:txBody>
-          <a:bodyPr wrap="square" lIns="0" tIns="0" rIns="0" bIns="0" rtlCol="0" anchor="t"/>
-          <a:lstStyle/>
-          <a:p>
-            <a:pPr indent="0" marL="0">
+              <a:t>Geen afspraak om de afspraak. </a:t>
+            </a:r>
+            <a:pPr algn="l" indent="0" marL="0">
               <a:lnSpc>
-                <a:spcPct val="135000"/>
+                <a:spcPct val="108000"/>
               </a:lnSpc>
               <a:buNone/>
             </a:pPr>
             <a:r>
-              <a:rPr lang="en-US" sz="1050" dirty="0">
-                <a:solidFill>
-                  <a:srgbClr val="6F6A5C"/>
-                </a:solidFill>
-                <a:latin typeface="Arial" pitchFamily="34" charset="0"/>
-                <a:ea typeface="Arial" pitchFamily="34" charset="-122"/>
-                <a:cs typeface="Arial" pitchFamily="34" charset="-120"/>
-              </a:rPr>
-              <a:t>Een makelaarskantoor met een eigen website en woningaanbod, groot genoeg om in een vernieuwing te investeren.</a:t>
-            </a:r>
-            <a:endParaRPr lang="en-US" sz="1050" dirty="0"/>
-          </a:p>
-        </p:txBody>
-      </p:sp>
-      <p:sp>
-        <p:nvSpPr>
-          <p:cNvPr id="12" name="Shape 9"/>
+              <a:rPr lang="en-US" sz="3000" i="1" dirty="0">
+                <a:solidFill>
+                  <a:srgbClr val="1C2230"/>
+                </a:solidFill>
+                <a:latin typeface="Georgia" pitchFamily="34" charset="0"/>
+                <a:ea typeface="Georgia" pitchFamily="34" charset="-122"/>
+                <a:cs typeface="Georgia" pitchFamily="34" charset="-120"/>
+              </a:rPr>
+              <a:t>Drie eisen</a:t>
+            </a:r>
+            <a:pPr algn="l" indent="0" marL="0">
+              <a:lnSpc>
+                <a:spcPct val="108000"/>
+              </a:lnSpc>
+              <a:buNone/>
+            </a:pPr>
+            <a:r>
+              <a:rPr lang="en-US" sz="3200" b="1" dirty="0">
+                <a:solidFill>
+                  <a:srgbClr val="1C2230"/>
+                </a:solidFill>
+                <a:latin typeface="Arial" pitchFamily="34" charset="0"/>
+                <a:ea typeface="Arial" pitchFamily="34" charset="-122"/>
+                <a:cs typeface="Arial" pitchFamily="34" charset="-120"/>
+              </a:rPr>
+              <a:t>.</a:t>
+            </a:r>
+            <a:endParaRPr lang="en-US" sz="3200" dirty="0"/>
+          </a:p>
+        </p:txBody>
+      </p:sp>
+      <p:sp>
+        <p:nvSpPr>
+          <p:cNvPr id="8" name="Shape 5"/>
           <p:cNvSpPr/>
           <p:nvPr/>
         </p:nvSpPr>
         <p:spPr>
           <a:xfrm>
-            <a:off x="4324339" y="2793993"/>
+            <a:off x="609598" y="2793993"/>
             <a:ext cx="3536941" cy="2476494"/>
           </a:xfrm>
           <a:prstGeom prst="roundRect">
@@ -11696,13 +11789,13 @@
       </p:sp>
       <p:sp>
         <p:nvSpPr>
-          <p:cNvPr id="13" name="Shape 10"/>
+          <p:cNvPr id="9" name="Shape 6"/>
           <p:cNvSpPr/>
           <p:nvPr/>
         </p:nvSpPr>
         <p:spPr>
           <a:xfrm>
-            <a:off x="4629138" y="3124192"/>
+            <a:off x="914398" y="3124192"/>
             <a:ext cx="380999" cy="380999"/>
           </a:xfrm>
           <a:prstGeom prst="roundRect">
@@ -11718,7 +11811,7 @@
       </p:sp>
       <p:pic>
         <p:nvPicPr>
-          <p:cNvPr id="14" name="Image 1" descr="preencoded.png">    </p:cNvPr>
+          <p:cNvPr id="10" name="Image 1" descr="preencoded.png">    </p:cNvPr>
           <p:cNvPicPr>
             <a:picLocks noChangeAspect="1"/>
           </p:cNvPicPr>
@@ -11732,7 +11825,7 @@
         </p:blipFill>
         <p:spPr>
           <a:xfrm>
-            <a:off x="4724388" y="3219442"/>
+            <a:off x="1009647" y="3219442"/>
             <a:ext cx="190500" cy="190500"/>
           </a:xfrm>
           <a:prstGeom prst="rect">
@@ -11742,13 +11835,13 @@
       </p:pic>
       <p:sp>
         <p:nvSpPr>
-          <p:cNvPr id="15" name="Text 11"/>
-          <p:cNvSpPr txBox="1"/>
-          <p:nvPr/>
-        </p:nvSpPr>
-        <p:spPr>
-          <a:xfrm>
-            <a:off x="4629138" y="3708391"/>
+          <p:cNvPr id="11" name="Text 7"/>
+          <p:cNvSpPr txBox="1"/>
+          <p:nvPr/>
+        </p:nvSpPr>
+        <p:spPr>
+          <a:xfrm>
+            <a:off x="914398" y="3708391"/>
             <a:ext cx="2927343" cy="304799"/>
           </a:xfrm>
           <a:prstGeom prst="rect">
@@ -11773,7 +11866,7 @@
                 <a:ea typeface="Arial" pitchFamily="34" charset="-122"/>
                 <a:cs typeface="Arial" pitchFamily="34" charset="-120"/>
               </a:rPr>
-              <a:t>Aanleiding</a:t>
+              <a:t>Fit</a:t>
             </a:r>
             <a:endParaRPr lang="en-US" sz="1600" dirty="0"/>
           </a:p>
@@ -11781,13 +11874,13 @@
       </p:sp>
       <p:sp>
         <p:nvSpPr>
-          <p:cNvPr id="16" name="Text 12"/>
-          <p:cNvSpPr txBox="1"/>
-          <p:nvPr/>
-        </p:nvSpPr>
-        <p:spPr>
-          <a:xfrm>
-            <a:off x="4629138" y="4089390"/>
+          <p:cNvPr id="12" name="Text 8"/>
+          <p:cNvSpPr txBox="1"/>
+          <p:nvPr/>
+        </p:nvSpPr>
+        <p:spPr>
+          <a:xfrm>
+            <a:off x="914398" y="4089390"/>
             <a:ext cx="2927343" cy="952498"/>
           </a:xfrm>
           <a:prstGeom prst="rect">
@@ -11815,7 +11908,7 @@
                 <a:ea typeface="Arial" pitchFamily="34" charset="-122"/>
                 <a:cs typeface="Arial" pitchFamily="34" charset="-120"/>
               </a:rPr>
-              <a:t>Er is iets concreets: het aanbod is niet te filteren, de site is traag of verouderd, of ze lopen al tegen hun platform aan.</a:t>
+              <a:t>Een makelaarskantoor met een eigen website en woningaanbod, groot genoeg om in een vernieuwing te investeren.</a:t>
             </a:r>
             <a:endParaRPr lang="en-US" sz="1050" dirty="0"/>
           </a:p>
@@ -11823,13 +11916,13 @@
       </p:sp>
       <p:sp>
         <p:nvSpPr>
-          <p:cNvPr id="17" name="Shape 13"/>
+          <p:cNvPr id="13" name="Shape 9"/>
           <p:cNvSpPr/>
           <p:nvPr/>
         </p:nvSpPr>
         <p:spPr>
           <a:xfrm>
-            <a:off x="8039080" y="2793993"/>
+            <a:off x="4324339" y="2793993"/>
             <a:ext cx="3536941" cy="2476494"/>
           </a:xfrm>
           <a:prstGeom prst="roundRect">
@@ -11845,13 +11938,13 @@
       </p:sp>
       <p:sp>
         <p:nvSpPr>
-          <p:cNvPr id="18" name="Shape 14"/>
+          <p:cNvPr id="14" name="Shape 10"/>
           <p:cNvSpPr/>
           <p:nvPr/>
         </p:nvSpPr>
         <p:spPr>
           <a:xfrm>
-            <a:off x="8343879" y="3124192"/>
+            <a:off x="4629138" y="3124192"/>
             <a:ext cx="380999" cy="380999"/>
           </a:xfrm>
           <a:prstGeom prst="roundRect">
@@ -11867,7 +11960,7 @@
       </p:sp>
       <p:pic>
         <p:nvPicPr>
-          <p:cNvPr id="19" name="Image 2" descr="preencoded.png">    </p:cNvPr>
+          <p:cNvPr id="15" name="Image 2" descr="preencoded.png">    </p:cNvPr>
           <p:cNvPicPr>
             <a:picLocks noChangeAspect="1"/>
           </p:cNvPicPr>
@@ -11881,7 +11974,7 @@
         </p:blipFill>
         <p:spPr>
           <a:xfrm>
-            <a:off x="8439129" y="3219442"/>
+            <a:off x="4724388" y="3219442"/>
             <a:ext cx="190500" cy="190500"/>
           </a:xfrm>
           <a:prstGeom prst="rect">
@@ -11891,13 +11984,13 @@
       </p:pic>
       <p:sp>
         <p:nvSpPr>
-          <p:cNvPr id="20" name="Text 15"/>
-          <p:cNvSpPr txBox="1"/>
-          <p:nvPr/>
-        </p:nvSpPr>
-        <p:spPr>
-          <a:xfrm>
-            <a:off x="8343879" y="3708391"/>
+          <p:cNvPr id="16" name="Text 11"/>
+          <p:cNvSpPr txBox="1"/>
+          <p:nvPr/>
+        </p:nvSpPr>
+        <p:spPr>
+          <a:xfrm>
+            <a:off x="4629138" y="3708391"/>
             <a:ext cx="2927343" cy="304799"/>
           </a:xfrm>
           <a:prstGeom prst="rect">
@@ -11922,7 +12015,7 @@
                 <a:ea typeface="Arial" pitchFamily="34" charset="-122"/>
                 <a:cs typeface="Arial" pitchFamily="34" charset="-120"/>
               </a:rPr>
-              <a:t>Beslisser</a:t>
+              <a:t>Aanleiding</a:t>
             </a:r>
             <a:endParaRPr lang="en-US" sz="1600" dirty="0"/>
           </a:p>
@@ -11930,13 +12023,13 @@
       </p:sp>
       <p:sp>
         <p:nvSpPr>
-          <p:cNvPr id="21" name="Text 16"/>
-          <p:cNvSpPr txBox="1"/>
-          <p:nvPr/>
-        </p:nvSpPr>
-        <p:spPr>
-          <a:xfrm>
-            <a:off x="8343879" y="4089390"/>
+          <p:cNvPr id="17" name="Text 12"/>
+          <p:cNvSpPr txBox="1"/>
+          <p:nvPr/>
+        </p:nvSpPr>
+        <p:spPr>
+          <a:xfrm>
+            <a:off x="4629138" y="4089390"/>
             <a:ext cx="2927343" cy="952498"/>
           </a:xfrm>
           <a:prstGeom prst="rect">
@@ -11964,6 +12057,155 @@
                 <a:ea typeface="Arial" pitchFamily="34" charset="-122"/>
                 <a:cs typeface="Arial" pitchFamily="34" charset="-120"/>
               </a:rPr>
+              <a:t>Er is iets concreets: het aanbod is niet te filteren, de site is traag of verouderd, of ze lopen al tegen hun platform aan.</a:t>
+            </a:r>
+            <a:endParaRPr lang="en-US" sz="1050" dirty="0"/>
+          </a:p>
+        </p:txBody>
+      </p:sp>
+      <p:sp>
+        <p:nvSpPr>
+          <p:cNvPr id="18" name="Shape 13"/>
+          <p:cNvSpPr/>
+          <p:nvPr/>
+        </p:nvSpPr>
+        <p:spPr>
+          <a:xfrm>
+            <a:off x="8039080" y="2793993"/>
+            <a:ext cx="3536941" cy="2476494"/>
+          </a:xfrm>
+          <a:prstGeom prst="roundRect">
+            <a:avLst>
+              <a:gd name="adj" fmla="val 4103"/>
+            </a:avLst>
+          </a:prstGeom>
+          <a:solidFill>
+            <a:srgbClr val="F8F4EB"/>
+          </a:solidFill>
+          <a:ln/>
+        </p:spPr>
+      </p:sp>
+      <p:sp>
+        <p:nvSpPr>
+          <p:cNvPr id="19" name="Shape 14"/>
+          <p:cNvSpPr/>
+          <p:nvPr/>
+        </p:nvSpPr>
+        <p:spPr>
+          <a:xfrm>
+            <a:off x="8343879" y="3124192"/>
+            <a:ext cx="380999" cy="380999"/>
+          </a:xfrm>
+          <a:prstGeom prst="roundRect">
+            <a:avLst>
+              <a:gd name="adj" fmla="val 23333"/>
+            </a:avLst>
+          </a:prstGeom>
+          <a:solidFill>
+            <a:srgbClr val="DDEBF3"/>
+          </a:solidFill>
+          <a:ln/>
+        </p:spPr>
+      </p:sp>
+      <p:pic>
+        <p:nvPicPr>
+          <p:cNvPr id="20" name="Image 3" descr="preencoded.png">    </p:cNvPr>
+          <p:cNvPicPr>
+            <a:picLocks noChangeAspect="1"/>
+          </p:cNvPicPr>
+          <p:nvPr/>
+        </p:nvPicPr>
+        <p:blipFill>
+          <a:blip r:embed="rId4"/>
+          <a:stretch>
+            <a:fillRect/>
+          </a:stretch>
+        </p:blipFill>
+        <p:spPr>
+          <a:xfrm>
+            <a:off x="8439129" y="3219442"/>
+            <a:ext cx="190500" cy="190500"/>
+          </a:xfrm>
+          <a:prstGeom prst="rect">
+            <a:avLst/>
+          </a:prstGeom>
+        </p:spPr>
+      </p:pic>
+      <p:sp>
+        <p:nvSpPr>
+          <p:cNvPr id="21" name="Text 15"/>
+          <p:cNvSpPr txBox="1"/>
+          <p:nvPr/>
+        </p:nvSpPr>
+        <p:spPr>
+          <a:xfrm>
+            <a:off x="8343879" y="3708391"/>
+            <a:ext cx="2927343" cy="304799"/>
+          </a:xfrm>
+          <a:prstGeom prst="rect">
+            <a:avLst/>
+          </a:prstGeom>
+          <a:noFill/>
+          <a:ln/>
+        </p:spPr>
+        <p:txBody>
+          <a:bodyPr wrap="square" lIns="0" tIns="0" rIns="0" bIns="0" rtlCol="0" anchor="ctr"/>
+          <a:lstStyle/>
+          <a:p>
+            <a:pPr indent="0" marL="0">
+              <a:buNone/>
+            </a:pPr>
+            <a:r>
+              <a:rPr lang="en-US" sz="1600" b="1" dirty="0">
+                <a:solidFill>
+                  <a:srgbClr val="1C2230"/>
+                </a:solidFill>
+                <a:latin typeface="Arial" pitchFamily="34" charset="0"/>
+                <a:ea typeface="Arial" pitchFamily="34" charset="-122"/>
+                <a:cs typeface="Arial" pitchFamily="34" charset="-120"/>
+              </a:rPr>
+              <a:t>Beslisser</a:t>
+            </a:r>
+            <a:endParaRPr lang="en-US" sz="1600" dirty="0"/>
+          </a:p>
+        </p:txBody>
+      </p:sp>
+      <p:sp>
+        <p:nvSpPr>
+          <p:cNvPr id="22" name="Text 16"/>
+          <p:cNvSpPr txBox="1"/>
+          <p:nvPr/>
+        </p:nvSpPr>
+        <p:spPr>
+          <a:xfrm>
+            <a:off x="8343879" y="4089390"/>
+            <a:ext cx="2927343" cy="952498"/>
+          </a:xfrm>
+          <a:prstGeom prst="rect">
+            <a:avLst/>
+          </a:prstGeom>
+          <a:noFill/>
+          <a:ln/>
+        </p:spPr>
+        <p:txBody>
+          <a:bodyPr wrap="square" lIns="0" tIns="0" rIns="0" bIns="0" rtlCol="0" anchor="t"/>
+          <a:lstStyle/>
+          <a:p>
+            <a:pPr indent="0" marL="0">
+              <a:lnSpc>
+                <a:spcPct val="135000"/>
+              </a:lnSpc>
+              <a:buNone/>
+            </a:pPr>
+            <a:r>
+              <a:rPr lang="en-US" sz="1050" dirty="0">
+                <a:solidFill>
+                  <a:srgbClr val="6F6A5C"/>
+                </a:solidFill>
+                <a:latin typeface="Arial" pitchFamily="34" charset="0"/>
+                <a:ea typeface="Arial" pitchFamily="34" charset="-122"/>
+                <a:cs typeface="Arial" pitchFamily="34" charset="-120"/>
+              </a:rPr>
               <a:t>De eigenaar, directeur of de verantwoordelijke voor marketing. Bij een makelaarskantoor is dat vaak dezelfde persoon.</a:t>
             </a:r>
             <a:endParaRPr lang="en-US" sz="1050" dirty="0"/>
@@ -11972,7 +12214,7 @@
       </p:sp>
       <p:sp>
         <p:nvSpPr>
-          <p:cNvPr id="22" name="Shape 17"/>
+          <p:cNvPr id="23" name="Shape 17"/>
           <p:cNvSpPr/>
           <p:nvPr/>
         </p:nvSpPr>
@@ -11992,7 +12234,7 @@
       </p:sp>
       <p:sp>
         <p:nvSpPr>
-          <p:cNvPr id="23" name="Text 18"/>
+          <p:cNvPr id="24" name="Text 18"/>
           <p:cNvSpPr txBox="1"/>
           <p:nvPr/>
         </p:nvSpPr>
@@ -12114,9 +12356,33 @@
           </a:p>
         </p:txBody>
       </p:sp>
-      <p:sp>
-        <p:nvSpPr>
-          <p:cNvPr id="3" name="Text 1"/>
+      <p:pic>
+        <p:nvPicPr>
+          <p:cNvPr id="3" name="Image 0" descr="/home/user/Test/assets/okcreative-mark.png">    </p:cNvPr>
+          <p:cNvPicPr>
+            <a:picLocks noChangeAspect="1"/>
+          </p:cNvPicPr>
+          <p:nvPr/>
+        </p:nvPicPr>
+        <p:blipFill>
+          <a:blip r:embed="rId1"/>
+          <a:stretch>
+            <a:fillRect/>
+          </a:stretch>
+        </p:blipFill>
+        <p:spPr>
+          <a:xfrm>
+            <a:off x="11226772" y="393699"/>
+            <a:ext cx="355599" cy="355599"/>
+          </a:xfrm>
+          <a:prstGeom prst="rect">
+            <a:avLst/>
+          </a:prstGeom>
+        </p:spPr>
+      </p:pic>
+      <p:sp>
+        <p:nvSpPr>
+          <p:cNvPr id="4" name="Text 1"/>
           <p:cNvSpPr txBox="1"/>
           <p:nvPr/>
         </p:nvSpPr>
@@ -12155,7 +12421,7 @@
       </p:sp>
       <p:sp>
         <p:nvSpPr>
-          <p:cNvPr id="4" name="Text 2"/>
+          <p:cNvPr id="5" name="Text 2"/>
           <p:cNvSpPr txBox="1"/>
           <p:nvPr/>
         </p:nvSpPr>
@@ -12194,7 +12460,7 @@
       </p:sp>
       <p:sp>
         <p:nvSpPr>
-          <p:cNvPr id="5" name="Text 3"/>
+          <p:cNvPr id="6" name="Text 3"/>
           <p:cNvSpPr txBox="1"/>
           <p:nvPr/>
         </p:nvSpPr>
@@ -12233,7 +12499,7 @@
       </p:sp>
       <p:sp>
         <p:nvSpPr>
-          <p:cNvPr id="6" name="Text 4"/>
+          <p:cNvPr id="7" name="Text 4"/>
           <p:cNvSpPr txBox="1"/>
           <p:nvPr/>
         </p:nvSpPr>
@@ -12309,7 +12575,7 @@
       </p:sp>
       <p:sp>
         <p:nvSpPr>
-          <p:cNvPr id="7" name="Shape 5"/>
+          <p:cNvPr id="8" name="Shape 5"/>
           <p:cNvSpPr/>
           <p:nvPr/>
         </p:nvSpPr>
@@ -12336,7 +12602,7 @@
       </p:sp>
       <p:sp>
         <p:nvSpPr>
-          <p:cNvPr id="8" name="Shape 6"/>
+          <p:cNvPr id="9" name="Shape 6"/>
           <p:cNvSpPr/>
           <p:nvPr/>
         </p:nvSpPr>
@@ -12358,7 +12624,7 @@
       </p:sp>
       <p:sp>
         <p:nvSpPr>
-          <p:cNvPr id="9" name="Text 7"/>
+          <p:cNvPr id="10" name="Text 7"/>
           <p:cNvSpPr txBox="1"/>
           <p:nvPr/>
         </p:nvSpPr>
@@ -12397,7 +12663,7 @@
       </p:sp>
       <p:sp>
         <p:nvSpPr>
-          <p:cNvPr id="10" name="Text 8"/>
+          <p:cNvPr id="11" name="Text 8"/>
           <p:cNvSpPr txBox="1"/>
           <p:nvPr/>
         </p:nvSpPr>
@@ -12439,7 +12705,7 @@
       </p:sp>
       <p:sp>
         <p:nvSpPr>
-          <p:cNvPr id="11" name="Text 9"/>
+          <p:cNvPr id="12" name="Text 9"/>
           <p:cNvSpPr txBox="1"/>
           <p:nvPr/>
         </p:nvSpPr>
@@ -12481,7 +12747,7 @@
       </p:sp>
       <p:sp>
         <p:nvSpPr>
-          <p:cNvPr id="12" name="Shape 10"/>
+          <p:cNvPr id="13" name="Shape 10"/>
           <p:cNvSpPr/>
           <p:nvPr/>
         </p:nvSpPr>
@@ -12508,7 +12774,7 @@
       </p:sp>
       <p:sp>
         <p:nvSpPr>
-          <p:cNvPr id="13" name="Shape 11"/>
+          <p:cNvPr id="14" name="Shape 11"/>
           <p:cNvSpPr/>
           <p:nvPr/>
         </p:nvSpPr>
@@ -12530,7 +12796,7 @@
       </p:sp>
       <p:sp>
         <p:nvSpPr>
-          <p:cNvPr id="14" name="Text 12"/>
+          <p:cNvPr id="15" name="Text 12"/>
           <p:cNvSpPr txBox="1"/>
           <p:nvPr/>
         </p:nvSpPr>
@@ -12569,7 +12835,7 @@
       </p:sp>
       <p:sp>
         <p:nvSpPr>
-          <p:cNvPr id="15" name="Text 13"/>
+          <p:cNvPr id="16" name="Text 13"/>
           <p:cNvSpPr txBox="1"/>
           <p:nvPr/>
         </p:nvSpPr>
@@ -12611,7 +12877,7 @@
       </p:sp>
       <p:sp>
         <p:nvSpPr>
-          <p:cNvPr id="16" name="Text 14"/>
+          <p:cNvPr id="17" name="Text 14"/>
           <p:cNvSpPr txBox="1"/>
           <p:nvPr/>
         </p:nvSpPr>
@@ -12653,7 +12919,7 @@
       </p:sp>
       <p:sp>
         <p:nvSpPr>
-          <p:cNvPr id="17" name="Shape 15"/>
+          <p:cNvPr id="18" name="Shape 15"/>
           <p:cNvSpPr/>
           <p:nvPr/>
         </p:nvSpPr>
@@ -12680,7 +12946,7 @@
       </p:sp>
       <p:sp>
         <p:nvSpPr>
-          <p:cNvPr id="18" name="Shape 16"/>
+          <p:cNvPr id="19" name="Shape 16"/>
           <p:cNvSpPr/>
           <p:nvPr/>
         </p:nvSpPr>
@@ -12702,7 +12968,7 @@
       </p:sp>
       <p:sp>
         <p:nvSpPr>
-          <p:cNvPr id="19" name="Text 17"/>
+          <p:cNvPr id="20" name="Text 17"/>
           <p:cNvSpPr txBox="1"/>
           <p:nvPr/>
         </p:nvSpPr>
@@ -12741,7 +13007,7 @@
       </p:sp>
       <p:sp>
         <p:nvSpPr>
-          <p:cNvPr id="20" name="Text 18"/>
+          <p:cNvPr id="21" name="Text 18"/>
           <p:cNvSpPr txBox="1"/>
           <p:nvPr/>
         </p:nvSpPr>
@@ -12783,7 +13049,7 @@
       </p:sp>
       <p:sp>
         <p:nvSpPr>
-          <p:cNvPr id="21" name="Text 19"/>
+          <p:cNvPr id="22" name="Text 19"/>
           <p:cNvSpPr txBox="1"/>
           <p:nvPr/>
         </p:nvSpPr>
@@ -12825,7 +13091,7 @@
       </p:sp>
       <p:sp>
         <p:nvSpPr>
-          <p:cNvPr id="22" name="Shape 20"/>
+          <p:cNvPr id="23" name="Shape 20"/>
           <p:cNvSpPr/>
           <p:nvPr/>
         </p:nvSpPr>
@@ -12852,7 +13118,7 @@
       </p:sp>
       <p:sp>
         <p:nvSpPr>
-          <p:cNvPr id="23" name="Shape 21"/>
+          <p:cNvPr id="24" name="Shape 21"/>
           <p:cNvSpPr/>
           <p:nvPr/>
         </p:nvSpPr>
@@ -12874,7 +13140,7 @@
       </p:sp>
       <p:sp>
         <p:nvSpPr>
-          <p:cNvPr id="24" name="Text 22"/>
+          <p:cNvPr id="25" name="Text 22"/>
           <p:cNvSpPr txBox="1"/>
           <p:nvPr/>
         </p:nvSpPr>
@@ -12913,7 +13179,7 @@
       </p:sp>
       <p:sp>
         <p:nvSpPr>
-          <p:cNvPr id="25" name="Text 23"/>
+          <p:cNvPr id="26" name="Text 23"/>
           <p:cNvSpPr txBox="1"/>
           <p:nvPr/>
         </p:nvSpPr>
@@ -12955,7 +13221,7 @@
       </p:sp>
       <p:sp>
         <p:nvSpPr>
-          <p:cNvPr id="26" name="Text 24"/>
+          <p:cNvPr id="27" name="Text 24"/>
           <p:cNvSpPr txBox="1"/>
           <p:nvPr/>
         </p:nvSpPr>
@@ -12989,7 +13255,7 @@
                 <a:ea typeface="Arial" pitchFamily="34" charset="-122"/>
                 <a:cs typeface="Arial" pitchFamily="34" charset="-120"/>
               </a:rPr>
-              <a:t>Omdat jullie sinds augustus klant zijn en wij jullie verhaal al kennen, gaat er vierhonderdvijfennegentig euro van de prijs af.</a:t>
+              <a:t>We werken sinds augustus met veel plezier met jullie samen en we geloven in deze campagne. Daarom gaat er vierhonderdvijfennegentig euro van de prijs af.</a:t>
             </a:r>
             <a:endParaRPr lang="en-US" sz="875" dirty="0"/>
           </a:p>
@@ -12997,7 +13263,7 @@
       </p:sp>
       <p:sp>
         <p:nvSpPr>
-          <p:cNvPr id="27" name="Shape 25"/>
+          <p:cNvPr id="28" name="Shape 25"/>
           <p:cNvSpPr/>
           <p:nvPr/>
         </p:nvSpPr>
@@ -13019,7 +13285,7 @@
       </p:sp>
       <p:sp>
         <p:nvSpPr>
-          <p:cNvPr id="28" name="Text 26"/>
+          <p:cNvPr id="29" name="Text 26"/>
           <p:cNvSpPr txBox="1"/>
           <p:nvPr/>
         </p:nvSpPr>
@@ -13058,14 +13324,14 @@
       </p:sp>
       <p:sp>
         <p:nvSpPr>
-          <p:cNvPr id="29" name="Text 27"/>
+          <p:cNvPr id="30" name="Text 27"/>
           <p:cNvSpPr txBox="1"/>
           <p:nvPr/>
         </p:nvSpPr>
         <p:spPr>
           <a:xfrm>
             <a:off x="914398" y="5410186"/>
-            <a:ext cx="1904995" cy="406399"/>
+            <a:ext cx="2984493" cy="406399"/>
           </a:xfrm>
           <a:prstGeom prst="rect">
             <a:avLst/>
@@ -13081,6 +13347,34 @@
               <a:buNone/>
             </a:pPr>
             <a:r>
+              <a:rPr lang="en-US" sz="2300" b="1" strike="sngStrike" dirty="0">
+                <a:solidFill>
+                  <a:srgbClr val="2C6B88"/>
+                </a:solidFill>
+                <a:latin typeface="Arial" pitchFamily="34" charset="0"/>
+                <a:ea typeface="Arial" pitchFamily="34" charset="-122"/>
+                <a:cs typeface="Arial" pitchFamily="34" charset="-120"/>
+              </a:rPr>
+              <a:t>€ 4.950</a:t>
+            </a:r>
+            <a:pPr indent="0" marL="0">
+              <a:buNone/>
+            </a:pPr>
+            <a:r>
+              <a:rPr lang="en-US" sz="2300" b="1" dirty="0">
+                <a:solidFill>
+                  <a:srgbClr val="0D1420"/>
+                </a:solidFill>
+                <a:latin typeface="Arial" pitchFamily="34" charset="0"/>
+                <a:ea typeface="Arial" pitchFamily="34" charset="-122"/>
+                <a:cs typeface="Arial" pitchFamily="34" charset="-120"/>
+              </a:rPr>
+              <a:t>  </a:t>
+            </a:r>
+            <a:pPr indent="0" marL="0">
+              <a:buNone/>
+            </a:pPr>
+            <a:r>
               <a:rPr lang="en-US" sz="2900" b="1" dirty="0">
                 <a:solidFill>
                   <a:srgbClr val="0D1420"/>
@@ -13091,20 +13385,20 @@
               </a:rPr>
               <a:t>€ 4.455</a:t>
             </a:r>
-            <a:endParaRPr lang="en-US" sz="2900" dirty="0"/>
-          </a:p>
-        </p:txBody>
-      </p:sp>
-      <p:sp>
-        <p:nvSpPr>
-          <p:cNvPr id="30" name="Text 28"/>
+            <a:endParaRPr lang="en-US" sz="2300" dirty="0"/>
+          </a:p>
+        </p:txBody>
+      </p:sp>
+      <p:sp>
+        <p:nvSpPr>
+          <p:cNvPr id="31" name="Text 28"/>
           <p:cNvSpPr txBox="1"/>
           <p:nvPr/>
         </p:nvSpPr>
         <p:spPr>
           <a:xfrm>
             <a:off x="914398" y="5829285"/>
-            <a:ext cx="2031995" cy="165100"/>
+            <a:ext cx="3111492" cy="165100"/>
           </a:xfrm>
           <a:prstGeom prst="rect">
             <a:avLst/>
@@ -13128,7 +13422,7 @@
                 <a:ea typeface="Arial" pitchFamily="34" charset="-122"/>
                 <a:cs typeface="Arial" pitchFamily="34" charset="-120"/>
               </a:rPr>
-              <a:t>normaal € 4.950, inclusief 10% relatiekorting, excl. btw</a:t>
+              <a:t>€ 495 relatiekorting, excl. btw</a:t>
             </a:r>
             <a:endParaRPr lang="en-US" sz="800" dirty="0"/>
           </a:p>
@@ -13136,13 +13430,13 @@
       </p:sp>
       <p:sp>
         <p:nvSpPr>
-          <p:cNvPr id="31" name="Shape 29"/>
+          <p:cNvPr id="32" name="Shape 29"/>
           <p:cNvSpPr/>
           <p:nvPr/>
         </p:nvSpPr>
         <p:spPr>
           <a:xfrm>
-            <a:off x="3174992" y="5257787"/>
+            <a:off x="4267189" y="5257787"/>
             <a:ext cx="0" cy="673098"/>
           </a:xfrm>
           <a:prstGeom prst="line">
@@ -13161,70 +13455,7 @@
       </p:sp>
       <p:pic>
         <p:nvPicPr>
-          <p:cNvPr id="32" name="Image 0" descr="preencoded.png">    </p:cNvPr>
-          <p:cNvPicPr>
-            <a:picLocks noChangeAspect="1"/>
-          </p:cNvPicPr>
-          <p:nvPr/>
-        </p:nvPicPr>
-        <p:blipFill>
-          <a:blip r:embed="rId1"/>
-          <a:stretch>
-            <a:fillRect/>
-          </a:stretch>
-        </p:blipFill>
-        <p:spPr>
-          <a:xfrm>
-            <a:off x="3530591" y="5276837"/>
-            <a:ext cx="127000" cy="127000"/>
-          </a:xfrm>
-          <a:prstGeom prst="rect">
-            <a:avLst/>
-          </a:prstGeom>
-        </p:spPr>
-      </p:pic>
-      <p:sp>
-        <p:nvSpPr>
-          <p:cNvPr id="33" name="Text 30"/>
-          <p:cNvSpPr txBox="1"/>
-          <p:nvPr/>
-        </p:nvSpPr>
-        <p:spPr>
-          <a:xfrm>
-            <a:off x="3733791" y="5245087"/>
-            <a:ext cx="3555991" cy="215899"/>
-          </a:xfrm>
-          <a:prstGeom prst="rect">
-            <a:avLst/>
-          </a:prstGeom>
-          <a:noFill/>
-          <a:ln/>
-        </p:spPr>
-        <p:txBody>
-          <a:bodyPr wrap="square" lIns="0" tIns="0" rIns="0" bIns="0" rtlCol="0" anchor="ctr"/>
-          <a:lstStyle/>
-          <a:p>
-            <a:pPr indent="0" marL="0">
-              <a:buNone/>
-            </a:pPr>
-            <a:r>
-              <a:rPr lang="en-US" sz="900" b="1" dirty="0">
-                <a:solidFill>
-                  <a:srgbClr val="0D1420"/>
-                </a:solidFill>
-                <a:latin typeface="Arial" pitchFamily="34" charset="0"/>
-                <a:ea typeface="Arial" pitchFamily="34" charset="-122"/>
-                <a:cs typeface="Arial" pitchFamily="34" charset="-120"/>
-              </a:rPr>
-              <a:t>Tien gekwalificeerde afspraken</a:t>
-            </a:r>
-            <a:endParaRPr lang="en-US" sz="900" dirty="0"/>
-          </a:p>
-        </p:txBody>
-      </p:sp>
-      <p:pic>
-        <p:nvPicPr>
-          <p:cNvPr id="34" name="Image 1" descr="preencoded.png">    </p:cNvPr>
+          <p:cNvPr id="33" name="Image 1" descr="preencoded.png">    </p:cNvPr>
           <p:cNvPicPr>
             <a:picLocks noChangeAspect="1"/>
           </p:cNvPicPr>
@@ -13238,7 +13469,7 @@
         </p:blipFill>
         <p:spPr>
           <a:xfrm>
-            <a:off x="7340582" y="5276837"/>
+            <a:off x="4622788" y="5276837"/>
             <a:ext cx="127000" cy="127000"/>
           </a:xfrm>
           <a:prstGeom prst="rect">
@@ -13248,14 +13479,14 @@
       </p:pic>
       <p:sp>
         <p:nvSpPr>
-          <p:cNvPr id="35" name="Text 31"/>
-          <p:cNvSpPr txBox="1"/>
-          <p:nvPr/>
-        </p:nvSpPr>
-        <p:spPr>
-          <a:xfrm>
-            <a:off x="7543781" y="5245087"/>
-            <a:ext cx="3555991" cy="215899"/>
+          <p:cNvPr id="34" name="Text 30"/>
+          <p:cNvSpPr txBox="1"/>
+          <p:nvPr/>
+        </p:nvSpPr>
+        <p:spPr>
+          <a:xfrm>
+            <a:off x="4825988" y="5245087"/>
+            <a:ext cx="3200392" cy="215899"/>
           </a:xfrm>
           <a:prstGeom prst="rect">
             <a:avLst/>
@@ -13279,7 +13510,7 @@
                 <a:ea typeface="Arial" pitchFamily="34" charset="-122"/>
                 <a:cs typeface="Arial" pitchFamily="34" charset="-120"/>
               </a:rPr>
-              <a:t>Kick-off, script en bellijst</a:t>
+              <a:t>Tien gekwalificeerde afspraken</a:t>
             </a:r>
             <a:endParaRPr lang="en-US" sz="900" dirty="0"/>
           </a:p>
@@ -13287,7 +13518,7 @@
       </p:sp>
       <p:pic>
         <p:nvPicPr>
-          <p:cNvPr id="36" name="Image 2" descr="preencoded.png">    </p:cNvPr>
+          <p:cNvPr id="35" name="Image 2" descr="preencoded.png">    </p:cNvPr>
           <p:cNvPicPr>
             <a:picLocks noChangeAspect="1"/>
           </p:cNvPicPr>
@@ -13301,7 +13532,7 @@
         </p:blipFill>
         <p:spPr>
           <a:xfrm>
-            <a:off x="3530591" y="5530836"/>
+            <a:off x="8102580" y="5276837"/>
             <a:ext cx="127000" cy="127000"/>
           </a:xfrm>
           <a:prstGeom prst="rect">
@@ -13311,14 +13542,14 @@
       </p:pic>
       <p:sp>
         <p:nvSpPr>
-          <p:cNvPr id="37" name="Text 32"/>
-          <p:cNvSpPr txBox="1"/>
-          <p:nvPr/>
-        </p:nvSpPr>
-        <p:spPr>
-          <a:xfrm>
-            <a:off x="3733791" y="5499086"/>
-            <a:ext cx="3555991" cy="215899"/>
+          <p:cNvPr id="36" name="Text 31"/>
+          <p:cNvSpPr txBox="1"/>
+          <p:nvPr/>
+        </p:nvSpPr>
+        <p:spPr>
+          <a:xfrm>
+            <a:off x="8305779" y="5245087"/>
+            <a:ext cx="3200392" cy="215899"/>
           </a:xfrm>
           <a:prstGeom prst="rect">
             <a:avLst/>
@@ -13342,7 +13573,7 @@
                 <a:ea typeface="Arial" pitchFamily="34" charset="-122"/>
                 <a:cs typeface="Arial" pitchFamily="34" charset="-120"/>
               </a:rPr>
-              <a:t>Belsysteem en nummer op jullie naam</a:t>
+              <a:t>Tien procent relatiekorting</a:t>
             </a:r>
             <a:endParaRPr lang="en-US" sz="900" dirty="0"/>
           </a:p>
@@ -13350,7 +13581,7 @@
       </p:sp>
       <p:pic>
         <p:nvPicPr>
-          <p:cNvPr id="38" name="Image 3" descr="preencoded.png">    </p:cNvPr>
+          <p:cNvPr id="37" name="Image 3" descr="preencoded.png">    </p:cNvPr>
           <p:cNvPicPr>
             <a:picLocks noChangeAspect="1"/>
           </p:cNvPicPr>
@@ -13364,7 +13595,7 @@
         </p:blipFill>
         <p:spPr>
           <a:xfrm>
-            <a:off x="7340582" y="5530836"/>
+            <a:off x="4622788" y="5530836"/>
             <a:ext cx="127000" cy="127000"/>
           </a:xfrm>
           <a:prstGeom prst="rect">
@@ -13374,14 +13605,14 @@
       </p:pic>
       <p:sp>
         <p:nvSpPr>
-          <p:cNvPr id="39" name="Text 33"/>
-          <p:cNvSpPr txBox="1"/>
-          <p:nvPr/>
-        </p:nvSpPr>
-        <p:spPr>
-          <a:xfrm>
-            <a:off x="7543781" y="5499086"/>
-            <a:ext cx="3555991" cy="215899"/>
+          <p:cNvPr id="38" name="Text 32"/>
+          <p:cNvSpPr txBox="1"/>
+          <p:nvPr/>
+        </p:nvSpPr>
+        <p:spPr>
+          <a:xfrm>
+            <a:off x="4825988" y="5499086"/>
+            <a:ext cx="3200392" cy="215899"/>
           </a:xfrm>
           <a:prstGeom prst="rect">
             <a:avLst/>
@@ -13405,7 +13636,7 @@
                 <a:ea typeface="Arial" pitchFamily="34" charset="-122"/>
                 <a:cs typeface="Arial" pitchFamily="34" charset="-120"/>
               </a:rPr>
-              <a:t>Wekelijkse rapportage</a:t>
+              <a:t>Kick-off, script en bellijst</a:t>
             </a:r>
             <a:endParaRPr lang="en-US" sz="900" dirty="0"/>
           </a:p>
@@ -13413,7 +13644,7 @@
       </p:sp>
       <p:pic>
         <p:nvPicPr>
-          <p:cNvPr id="40" name="Image 4" descr="preencoded.png">    </p:cNvPr>
+          <p:cNvPr id="39" name="Image 4" descr="preencoded.png">    </p:cNvPr>
           <p:cNvPicPr>
             <a:picLocks noChangeAspect="1"/>
           </p:cNvPicPr>
@@ -13427,7 +13658,7 @@
         </p:blipFill>
         <p:spPr>
           <a:xfrm>
-            <a:off x="3530591" y="5784836"/>
+            <a:off x="8102580" y="5530836"/>
             <a:ext cx="127000" cy="127000"/>
           </a:xfrm>
           <a:prstGeom prst="rect">
@@ -13437,14 +13668,14 @@
       </p:pic>
       <p:sp>
         <p:nvSpPr>
-          <p:cNvPr id="41" name="Text 34"/>
-          <p:cNvSpPr txBox="1"/>
-          <p:nvPr/>
-        </p:nvSpPr>
-        <p:spPr>
-          <a:xfrm>
-            <a:off x="3733791" y="5753086"/>
-            <a:ext cx="3555991" cy="215899"/>
+          <p:cNvPr id="40" name="Text 33"/>
+          <p:cNvSpPr txBox="1"/>
+          <p:nvPr/>
+        </p:nvSpPr>
+        <p:spPr>
+          <a:xfrm>
+            <a:off x="8305779" y="5499086"/>
+            <a:ext cx="3200392" cy="215899"/>
           </a:xfrm>
           <a:prstGeom prst="rect">
             <a:avLst/>
@@ -13468,7 +13699,7 @@
                 <a:ea typeface="Arial" pitchFamily="34" charset="-122"/>
                 <a:cs typeface="Arial" pitchFamily="34" charset="-120"/>
               </a:rPr>
-              <a:t>Geen opstartkosten</a:t>
+              <a:t>Belsysteem en nummer op jullie naam</a:t>
             </a:r>
             <a:endParaRPr lang="en-US" sz="900" dirty="0"/>
           </a:p>
@@ -13476,7 +13707,7 @@
       </p:sp>
       <p:pic>
         <p:nvPicPr>
-          <p:cNvPr id="42" name="Image 5" descr="preencoded.png">    </p:cNvPr>
+          <p:cNvPr id="41" name="Image 5" descr="preencoded.png">    </p:cNvPr>
           <p:cNvPicPr>
             <a:picLocks noChangeAspect="1"/>
           </p:cNvPicPr>
@@ -13490,7 +13721,7 @@
         </p:blipFill>
         <p:spPr>
           <a:xfrm>
-            <a:off x="7340582" y="5784836"/>
+            <a:off x="4622788" y="5784836"/>
             <a:ext cx="127000" cy="127000"/>
           </a:xfrm>
           <a:prstGeom prst="rect">
@@ -13500,14 +13731,14 @@
       </p:pic>
       <p:sp>
         <p:nvSpPr>
-          <p:cNvPr id="43" name="Text 35"/>
-          <p:cNvSpPr txBox="1"/>
-          <p:nvPr/>
-        </p:nvSpPr>
-        <p:spPr>
-          <a:xfrm>
-            <a:off x="7543781" y="5753086"/>
-            <a:ext cx="3555991" cy="215899"/>
+          <p:cNvPr id="42" name="Text 34"/>
+          <p:cNvSpPr txBox="1"/>
+          <p:nvPr/>
+        </p:nvSpPr>
+        <p:spPr>
+          <a:xfrm>
+            <a:off x="4825988" y="5753086"/>
+            <a:ext cx="3200392" cy="215899"/>
           </a:xfrm>
           <a:prstGeom prst="rect">
             <a:avLst/>
@@ -13531,7 +13762,70 @@
                 <a:ea typeface="Arial" pitchFamily="34" charset="-122"/>
                 <a:cs typeface="Arial" pitchFamily="34" charset="-120"/>
               </a:rPr>
-              <a:t>Geen kosten per afspraak</a:t>
+              <a:t>Wekelijkse rapportage</a:t>
+            </a:r>
+            <a:endParaRPr lang="en-US" sz="900" dirty="0"/>
+          </a:p>
+        </p:txBody>
+      </p:sp>
+      <p:pic>
+        <p:nvPicPr>
+          <p:cNvPr id="43" name="Image 6" descr="preencoded.png">    </p:cNvPr>
+          <p:cNvPicPr>
+            <a:picLocks noChangeAspect="1"/>
+          </p:cNvPicPr>
+          <p:nvPr/>
+        </p:nvPicPr>
+        <p:blipFill>
+          <a:blip r:embed="rId7"/>
+          <a:stretch>
+            <a:fillRect/>
+          </a:stretch>
+        </p:blipFill>
+        <p:spPr>
+          <a:xfrm>
+            <a:off x="8102580" y="5784836"/>
+            <a:ext cx="127000" cy="127000"/>
+          </a:xfrm>
+          <a:prstGeom prst="rect">
+            <a:avLst/>
+          </a:prstGeom>
+        </p:spPr>
+      </p:pic>
+      <p:sp>
+        <p:nvSpPr>
+          <p:cNvPr id="44" name="Text 35"/>
+          <p:cNvSpPr txBox="1"/>
+          <p:nvPr/>
+        </p:nvSpPr>
+        <p:spPr>
+          <a:xfrm>
+            <a:off x="8305779" y="5753086"/>
+            <a:ext cx="3200392" cy="215899"/>
+          </a:xfrm>
+          <a:prstGeom prst="rect">
+            <a:avLst/>
+          </a:prstGeom>
+          <a:noFill/>
+          <a:ln/>
+        </p:spPr>
+        <p:txBody>
+          <a:bodyPr wrap="square" lIns="0" tIns="0" rIns="0" bIns="0" rtlCol="0" anchor="ctr"/>
+          <a:lstStyle/>
+          <a:p>
+            <a:pPr indent="0" marL="0">
+              <a:buNone/>
+            </a:pPr>
+            <a:r>
+              <a:rPr lang="en-US" sz="900" b="1" dirty="0">
+                <a:solidFill>
+                  <a:srgbClr val="0D1420"/>
+                </a:solidFill>
+                <a:latin typeface="Arial" pitchFamily="34" charset="0"/>
+                <a:ea typeface="Arial" pitchFamily="34" charset="-122"/>
+                <a:cs typeface="Arial" pitchFamily="34" charset="-120"/>
+              </a:rPr>
+              <a:t>Geen opstartkosten en geen kosten per afspraak</a:t>
             </a:r>
             <a:endParaRPr lang="en-US" sz="900" dirty="0"/>
           </a:p>

--- a/output/LINK. pilotvoorstel OK Creative Agency.pptx
+++ b/output/LINK. pilotvoorstel OK Creative Agency.pptx
@@ -2645,7 +2645,7 @@
                 <a:ea typeface="Arial" pitchFamily="34" charset="-122"/>
                 <a:cs typeface="Arial" pitchFamily="34" charset="-120"/>
               </a:rPr>
-              <a:t>Jullie makelaarsverhaal, nu </a:t>
+              <a:t>Jullie propositie werkt. Nu </a:t>
             </a:r>
             <a:pPr algn="l" indent="0" marL="0">
               <a:lnSpc>
@@ -2662,7 +2662,7 @@
                 <a:ea typeface="Georgia" pitchFamily="34" charset="-122"/>
                 <a:cs typeface="Georgia" pitchFamily="34" charset="-120"/>
               </a:rPr>
-              <a:t>op schaal</a:t>
+              <a:t>heel Nederland</a:t>
             </a:r>
             <a:pPr algn="l" indent="0" marL="0">
               <a:lnSpc>
@@ -6488,7 +6488,7 @@
                 <a:ea typeface="Arial" pitchFamily="34" charset="-122"/>
                 <a:cs typeface="Arial" pitchFamily="34" charset="-120"/>
               </a:rPr>
-              <a:t>Sinds augustus bellen wij voor jullie in de zakelijke dienstverlening. In die twaalf weken hebben we 452 directeuren en marketingverantwoordelijken persoonlijk gesproken en veertien afspraken en overdrachten geleverd. We kennen jullie verhaal inmiddels van binnenuit.</a:t>
+              <a:t>Sinds augustus bellen wij voor jullie in de zakelijke dienstverlening. In die tien weken hebben we 452 directeuren en marketingverantwoordelijken persoonlijk gesproken en veertien afspraken en overdrachten geleverd. We kennen jullie verhaal inmiddels van binnenuit.</a:t>
             </a:r>
             <a:endParaRPr lang="en-US" sz="1350" dirty="0"/>
           </a:p>
@@ -7970,7 +7970,7 @@
                 <a:ea typeface="Arial" pitchFamily="34" charset="-122"/>
                 <a:cs typeface="Arial" pitchFamily="34" charset="-120"/>
               </a:rPr>
-              <a:t>Twintig kantoren in één hoek. </a:t>
+              <a:t>Twintig kantoren benaderd. </a:t>
             </a:r>
             <a:pPr algn="l" indent="0" marL="0">
               <a:lnSpc>
@@ -8004,7 +8004,7 @@
                 <a:ea typeface="Arial" pitchFamily="34" charset="-122"/>
                 <a:cs typeface="Arial" pitchFamily="34" charset="-120"/>
               </a:rPr>
-              <a:t> in het land.</a:t>
+              <a:t> te gaan.</a:t>
             </a:r>
             <a:endParaRPr lang="en-US" sz="3200" dirty="0"/>
           </a:p>
@@ -8640,7 +8640,7 @@
                 <a:ea typeface="Georgia" pitchFamily="34" charset="-122"/>
                 <a:cs typeface="Georgia" pitchFamily="34" charset="-120"/>
               </a:rPr>
-              <a:t>capaciteit</a:t>
+              <a:t>uren</a:t>
             </a:r>
             <a:pPr algn="l" indent="0" marL="0">
               <a:lnSpc>
@@ -8657,7 +8657,7 @@
                 <a:ea typeface="Arial" pitchFamily="34" charset="-122"/>
                 <a:cs typeface="Arial" pitchFamily="34" charset="-120"/>
               </a:rPr>
-              <a:t> ontbreekt.</a:t>
+              <a:t> ontbreken.</a:t>
             </a:r>
             <a:endParaRPr lang="en-US" sz="3200" dirty="0"/>
           </a:p>

--- a/output/LINK. pilotvoorstel OK Creative Agency.pptx
+++ b/output/LINK. pilotvoorstel OK Creative Agency.pptx
@@ -3544,7 +3544,7 @@
                 <a:ea typeface="Arial" pitchFamily="34" charset="-122"/>
                 <a:cs typeface="Arial" pitchFamily="34" charset="-120"/>
               </a:rPr>
-              <a:t>Akkoord op het script</a:t>
+              <a:t>Akkoord op de USP's</a:t>
             </a:r>
             <a:endParaRPr lang="en-US" sz="1450" dirty="0"/>
           </a:p>
@@ -3586,7 +3586,7 @@
                 <a:ea typeface="Arial" pitchFamily="34" charset="-122"/>
                 <a:cs typeface="Arial" pitchFamily="34" charset="-120"/>
               </a:rPr>
-              <a:t>Wij schrijven het, jullie lezen het door. Zo staat er niets in dat jullie niet zouden zeggen.</a:t>
+              <a:t>Wij leggen ze vast, jullie lezen ze door. Zo staat er niets in dat jullie niet zouden zeggen.</a:t>
             </a:r>
             <a:endParaRPr lang="en-US" sz="1050" dirty="0"/>
           </a:p>
@@ -4441,7 +4441,7 @@
                 <a:ea typeface="Arial" pitchFamily="34" charset="-122"/>
                 <a:cs typeface="Arial" pitchFamily="34" charset="-120"/>
               </a:rPr>
-              <a:t>Kick-off, script, lijst, belsysteem en nummer zitten in de prijs.</a:t>
+              <a:t>Kick-off, USP's, lijst, belsysteem en nummer zitten in de prijs.</a:t>
             </a:r>
             <a:endParaRPr lang="en-US" sz="950" dirty="0"/>
           </a:p>
@@ -9738,7 +9738,7 @@
                 <a:ea typeface="Arial" pitchFamily="34" charset="-122"/>
                 <a:cs typeface="Arial" pitchFamily="34" charset="-120"/>
               </a:rPr>
-              <a:t>Ervaren B2B-bellers die het gesprek voeren met de eigenaar of de marketingverantwoordelijke. Eigen belsysteem en een nummer op jullie naam.</a:t>
+              <a:t>Ervaren B2B-bellers die het gesprek voeren met de eigenaar of de marketingverantwoordelijke. Geen afgelezen belscript, maar vastgelegde USP's en een echt gesprek.</a:t>
             </a:r>
             <a:endParaRPr lang="en-US" sz="950" dirty="0"/>
           </a:p>
@@ -10788,7 +10788,7 @@
                 <a:ea typeface="Arial" pitchFamily="34" charset="-122"/>
                 <a:cs typeface="Arial" pitchFamily="34" charset="-120"/>
               </a:rPr>
-              <a:t>Lijst en script</a:t>
+              <a:t>Lijst en USP's</a:t>
             </a:r>
             <a:endParaRPr lang="en-US" sz="1250" dirty="0"/>
           </a:p>
@@ -10830,7 +10830,7 @@
                 <a:ea typeface="Arial" pitchFamily="34" charset="-122"/>
                 <a:cs typeface="Arial" pitchFamily="34" charset="-120"/>
               </a:rPr>
-              <a:t>Wij bouwen de bellijst met makelaarskantoren en schrijven het belscript op jullie analyse van hun websites. Jullie geven akkoord.</a:t>
+              <a:t>Wij bouwen de bellijst met makelaarskantoren en leggen de USP's vast op basis van jullie analyse van hun websites. Geen belscript, wel een scherp verhaal. Jullie geven akkoord.</a:t>
             </a:r>
             <a:endParaRPr lang="en-US" sz="900" dirty="0"/>
           </a:p>
@@ -13083,7 +13083,7 @@
                 <a:ea typeface="Arial" pitchFamily="34" charset="-122"/>
                 <a:cs typeface="Arial" pitchFamily="34" charset="-120"/>
               </a:rPr>
-              <a:t>Kick-off, belscript, bellijst, belsysteem, telefoonnummer en de wekelijkse rapportage. Geen opstartkosten en geen kosten per afspraak.</a:t>
+              <a:t>Kick-off, USP's, bellijst, belsysteem, telefoonnummer en de wekelijkse rapportage. Geen opstartkosten en geen kosten per afspraak.</a:t>
             </a:r>
             <a:endParaRPr lang="en-US" sz="875" dirty="0"/>
           </a:p>
@@ -13636,7 +13636,7 @@
                 <a:ea typeface="Arial" pitchFamily="34" charset="-122"/>
                 <a:cs typeface="Arial" pitchFamily="34" charset="-120"/>
               </a:rPr>
-              <a:t>Kick-off, script en bellijst</a:t>
+              <a:t>Kick-off, USP's en bellijst</a:t>
             </a:r>
             <a:endParaRPr lang="en-US" sz="900" dirty="0"/>
           </a:p>
